--- a/pdf/04_UnityUI基础_UGUI控件.pptx
+++ b/pdf/04_UnityUI基础_UGUI控件.pptx
@@ -1,26 +1,25 @@
 
 <file path=ppt/presentation.xml><?xml version="1.0" encoding="utf-8"?>
-<p:presentation xmlns:a="http://schemas.openxmlformats.org/drawingml/2006/main" xmlns:r="http://schemas.openxmlformats.org/officeDocument/2006/relationships" xmlns:p="http://schemas.openxmlformats.org/presentationml/2006/main" saveSubsetFonts="1" autoCompressPictures="0">
+<p:presentation xmlns:a="http://schemas.openxmlformats.org/drawingml/2006/main" xmlns:r="http://schemas.openxmlformats.org/officeDocument/2006/relationships" xmlns:p="http://schemas.openxmlformats.org/presentationml/2006/main" autoCompressPictures="0">
   <p:sldMasterIdLst>
     <p:sldMasterId id="2147483648" r:id="rId1"/>
   </p:sldMasterIdLst>
   <p:notesMasterIdLst>
-    <p:notesMasterId r:id="rId20"/>
+    <p:notesMasterId r:id="rId4"/>
   </p:notesMasterIdLst>
   <p:sldIdLst>
-    <p:sldId id="256" r:id="rId7"/>
-    <p:sldId id="257" r:id="rId8"/>
-    <p:sldId id="258" r:id="rId9"/>
-    <p:sldId id="259" r:id="rId10"/>
-    <p:sldId id="260" r:id="rId11"/>
-    <p:sldId id="261" r:id="rId12"/>
-    <p:sldId id="262" r:id="rId13"/>
-    <p:sldId id="263" r:id="rId14"/>
-    <p:sldId id="264" r:id="rId15"/>
-    <p:sldId id="265" r:id="rId16"/>
-    <p:sldId id="266" r:id="rId17"/>
-    <p:sldId id="267" r:id="rId18"/>
-    <p:sldId id="268" r:id="rId19"/>
+    <p:sldId id="256" r:id="rId3"/>
+    <p:sldId id="257" r:id="rId5"/>
+    <p:sldId id="258" r:id="rId6"/>
+    <p:sldId id="259" r:id="rId7"/>
+    <p:sldId id="260" r:id="rId8"/>
+    <p:sldId id="261" r:id="rId9"/>
+    <p:sldId id="262" r:id="rId10"/>
+    <p:sldId id="263" r:id="rId11"/>
+    <p:sldId id="264" r:id="rId12"/>
+    <p:sldId id="265" r:id="rId13"/>
+    <p:sldId id="266" r:id="rId14"/>
+    <p:sldId id="268" r:id="rId15"/>
   </p:sldIdLst>
   <p:sldSz cx="12192000" cy="6858000" type="screen4x3"/>
   <p:notesSz cx="6858000" cy="9144000"/>
@@ -119,12 +118,33 @@
       </a:defRPr>
     </a:lvl9pPr>
   </p:defaultTextStyle>
+  <p:extLst>
+    <p:ext uri="{EFAFB233-063F-42B5-8137-9DF3F51BA10A}">
+      <p15:sldGuideLst xmlns:p15="http://schemas.microsoft.com/office/powerpoint/2012/main">
+        <p15:guide id="1" orient="horz" pos="2160" userDrawn="1">
+          <p15:clr>
+            <a:srgbClr val="A4A3A4"/>
+          </p15:clr>
+        </p15:guide>
+        <p15:guide id="2" pos="2880" userDrawn="1">
+          <p15:clr>
+            <a:srgbClr val="A4A3A4"/>
+          </p15:clr>
+        </p15:guide>
+      </p15:sldGuideLst>
+    </p:ext>
+  </p:extLst>
 </p:presentation>
 </file>
 
 <file path=ppt/notesMasters/notesMaster1.xml><?xml version="1.0" encoding="utf-8"?>
 <p:notesMaster xmlns:a="http://schemas.openxmlformats.org/drawingml/2006/main" xmlns:r="http://schemas.openxmlformats.org/officeDocument/2006/relationships" xmlns:p="http://schemas.openxmlformats.org/presentationml/2006/main">
   <p:cSld>
+    <p:bg>
+      <p:bgRef idx="1001">
+        <a:schemeClr val="bg1"/>
+      </p:bgRef>
+    </p:bg>
     <p:spTree>
       <p:nvGrpSpPr>
         <p:cNvPr id="1" name=""/>
@@ -300,7 +320,7 @@
   <p:hf/>
   <p:notesStyle>
     <a:lvl1pPr marL="0" algn="l">
-      <a:defRPr sz="1200" lang="en-US"/>
+      <a:defRPr lang="en-US" sz="1200"/>
     </a:lvl1pPr>
   </p:notesStyle>
 </p:notesMaster>
@@ -354,6 +374,7 @@
               <a:rPr lang="zh-CN" dirty="0"/>
               <a:t>这一单元聚焦 Unity 的 UGUI 系统。目标不只是把控件摆出来，而是让界面在不同屏幕上稳定、能够接收输入，并把玩家操作可靠地转成游戏行为。</a:t>
             </a:r>
+            <a:endParaRPr lang="zh-CN" dirty="0"/>
           </a:p>
         </p:txBody>
       </p:sp>
@@ -413,6 +434,7 @@
               <a:rPr lang="zh-CN" dirty="0"/>
               <a:t>Toggle 表示开关或是非状态，多个 Toggle 放进 ToggleGroup 后可以形成单选。恢复保存值时使用 SetIsOnWithoutNotify，可以只更新显示而不误触发业务监听器。</a:t>
             </a:r>
+            <a:endParaRPr lang="zh-CN" dirty="0"/>
           </a:p>
         </p:txBody>
       </p:sp>
@@ -472,6 +494,7 @@
               <a:rPr lang="zh-CN" dirty="0"/>
               <a:t>Dropdown 的 Template、Caption 和 Item 之间有固定引用关系，修改层级后要重新检查。显示选项索引不一定等于内部质量等级，实际项目应建立明确映射并成对管理监听生命周期。</a:t>
             </a:r>
+            <a:endParaRPr lang="zh-CN" dirty="0"/>
           </a:p>
         </p:txBody>
       </p:sp>
@@ -529,67 +552,9 @@
           <a:p>
             <a:r>
               <a:rPr lang="zh-CN" dirty="0"/>
-              <a:t>设置面板用 Image 作为背景，用 RawImage 显示预览，用 Toggle、Dropdown 和 Button 分别管理状态、选择与提交。每个控件都应有明确的数据来源、当前值和输出行为。</a:t>
-            </a:r>
-          </a:p>
-        </p:txBody>
-      </p:sp>
-    </p:spTree>
-  </p:cSld>
-  <p:clrMapOvr>
-    <a:masterClrMapping/>
-  </p:clrMapOvr>
-</p:notes>
-</file>
-
-<file path=ppt/notesSlides/notesSlide13.xml><?xml version="1.0" encoding="utf-8"?>
-<p:notes xmlns:a="http://schemas.openxmlformats.org/drawingml/2006/main" xmlns:r="http://schemas.openxmlformats.org/officeDocument/2006/relationships" xmlns:p="http://schemas.openxmlformats.org/presentationml/2006/main">
-  <p:cSld>
-    <p:spTree>
-      <p:nvGrpSpPr>
-        <p:cNvPr id="1" name=""/>
-        <p:cNvGrpSpPr/>
-        <p:nvPr/>
-      </p:nvGrpSpPr>
-      <p:grpSpPr>
-        <a:xfrm>
-          <a:off x="0" y="0"/>
-          <a:ext cx="0" cy="0"/>
-          <a:chOff x="0" y="0"/>
-          <a:chExt cx="0" cy="0"/>
-        </a:xfrm>
-      </p:grpSpPr>
-      <p:sp>
-        <p:nvSpPr>
-          <p:cNvPr id="2" name="Slide Image Placeholder 1"/>
-          <p:cNvSpPr>
-            <a:spLocks noGrp="1" noRot="1" noChangeAspect="1"/>
-          </p:cNvSpPr>
-          <p:nvPr>
-            <p:ph type="sldImg" idx="2"/>
-          </p:nvPr>
-        </p:nvSpPr>
-        <p:spPr/>
-      </p:sp>
-      <p:sp>
-        <p:nvSpPr>
-          <p:cNvPr id="3" name="Notes Placeholder 2"/>
-          <p:cNvSpPr>
-            <a:spLocks noGrp="1"/>
-          </p:cNvSpPr>
-          <p:nvPr>
-            <p:ph type="body" sz="quarter" idx="3"/>
-          </p:nvPr>
-        </p:nvSpPr>
-        <p:spPr/>
-        <p:txBody>
-          <a:bodyPr/>
-          <a:lstStyle/>
-          <a:p>
-            <a:r>
-              <a:rPr lang="zh-CN" dirty="0"/>
               <a:t>交付前检查适配、交互、状态、事件和性能。一个成熟 UI 不仅能显示，还要在多种输入方式和屏幕比例下保持清楚、稳定、可操作。</a:t>
             </a:r>
+            <a:endParaRPr lang="zh-CN" dirty="0"/>
           </a:p>
         </p:txBody>
       </p:sp>
@@ -649,6 +614,7 @@
               <a:rPr lang="zh-CN" dirty="0"/>
               <a:t>Canvas 决定 UI 的空间与布局，EventSystem 负责输入事件，控件保存视觉和交互状态，脚本或 Inspector 事件执行真正的业务行为。理解这四层后，排错时就能快速判断问题属于哪一层。</a:t>
             </a:r>
+            <a:endParaRPr lang="zh-CN" dirty="0"/>
           </a:p>
         </p:txBody>
       </p:sp>
@@ -708,6 +674,7 @@
               <a:rPr lang="zh-CN" dirty="0"/>
               <a:t>Overlay 直接覆盖在游戏画面上，最适合菜单和 HUD；World Space 是 3D 世界中的真实平面，适合头顶血条和场景面板。选择 World Space 时，尺寸、朝向、Event Camera 和遮挡都需要额外检查。</a:t>
             </a:r>
+            <a:endParaRPr lang="zh-CN" dirty="0"/>
           </a:p>
         </p:txBody>
       </p:sp>
@@ -767,6 +734,7 @@
               <a:rPr lang="zh-CN" dirty="0"/>
               <a:t>RectTransform 用 Anchor 描述相对父矩形的位置关系，用 Pivot 描述旋转、缩放与位置参考点。Canvas Scaler 再根据基准分辨率和 Match 值，让同一套布局适配不同屏幕比例。</a:t>
             </a:r>
+            <a:endParaRPr lang="zh-CN" dirty="0"/>
           </a:p>
         </p:txBody>
       </p:sp>
@@ -826,6 +794,7 @@
               <a:rPr lang="zh-CN" dirty="0"/>
               <a:t>输入先由设备产生，再经过与项目匹配的输入模块交给 EventSystem。Graphic Raycaster 判断指针命中哪个 UI Graphic，最后控件接收点击或导航事件；任意一环缺失都可能导致交互失败。</a:t>
             </a:r>
+            <a:endParaRPr lang="zh-CN" dirty="0"/>
           </a:p>
         </p:txBody>
       </p:sp>
@@ -885,6 +854,7 @@
               <a:rPr lang="zh-CN" dirty="0"/>
               <a:t>排错要从全局基础设施开始，再检查 Canvas 和控件，最后检查遮挡与摄像机。按照清单顺序逐项确认，可以避免在复杂层级里反复猜测。</a:t>
             </a:r>
+            <a:endParaRPr lang="zh-CN" dirty="0"/>
           </a:p>
         </p:txBody>
       </p:sp>
@@ -944,6 +914,7 @@
               <a:rPr lang="zh-CN" dirty="0"/>
               <a:t>Button 至少要让玩家分辨普通、悬停、按下和禁用状态。事件既可以在 Inspector 中连接，也可以在脚本中监听；如果在 OnEnable 添加监听，就应在 OnDisable 移除。</a:t>
             </a:r>
+            <a:endParaRPr lang="zh-CN" dirty="0"/>
           </a:p>
         </p:txBody>
       </p:sp>
@@ -1003,6 +974,7 @@
               <a:rPr lang="zh-CN" dirty="0"/>
               <a:t>Simple 适合普通图标，Sliced 适合可缩放的按钮和面板，Tiled 用于重复纹理，Filled 用于血条和冷却。纯装饰 Image 通常可以关闭 Raycast Target，避免透明图片挡住后面的控件。</a:t>
             </a:r>
+            <a:endParaRPr lang="zh-CN" dirty="0"/>
           </a:p>
         </p:txBody>
       </p:sp>
@@ -1062,6 +1034,7 @@
               <a:rPr lang="zh-CN" dirty="0"/>
               <a:t>RawImage 直接显示 Texture，常与 RenderTexture 和 Camera 组合。Image 更适合 Sprite、九宫格和 Filled，RawImage 更适合摄像机、视频或运行时纹理，不应为了普通图标大量替代 Image。</a:t>
             </a:r>
+            <a:endParaRPr lang="zh-CN" dirty="0"/>
           </a:p>
         </p:txBody>
       </p:sp>
@@ -1073,8 +1046,8 @@
 </p:notes>
 </file>
 
-<file path=ppt/slideLayouts/slideLayout12.xml><?xml version="1.0" encoding="utf-8"?>
-<p:sldLayout xmlns:a="http://schemas.openxmlformats.org/drawingml/2006/main" xmlns:p="http://schemas.openxmlformats.org/presentationml/2006/main" xmlns:p14="http://schemas.microsoft.com/office/powerpoint/2010/main" type="cust" preserve="1" showMasterSp="1">
+<file path=ppt/slideLayouts/slideLayout1.xml><?xml version="1.0" encoding="utf-8"?>
+<p:sldLayout xmlns:a="http://schemas.openxmlformats.org/drawingml/2006/main" xmlns:r="http://schemas.openxmlformats.org/officeDocument/2006/relationships" xmlns:p="http://schemas.openxmlformats.org/presentationml/2006/main" preserve="1">
   <p:cSld name="Cover">
     <p:spTree>
       <p:nvGrpSpPr>
@@ -1091,11 +1064,6 @@
         </a:xfrm>
       </p:grpSpPr>
     </p:spTree>
-    <p:extLst>
-      <p:ext uri="{BB962C8B-B14F-4D97-AF65-F5344CB8AC3E}">
-        <p14:creationId val="1212999818"/>
-      </p:ext>
-    </p:extLst>
   </p:cSld>
   <p:clrMapOvr>
     <a:masterClrMapping/>
@@ -1103,8 +1071,8 @@
 </p:sldLayout>
 </file>
 
-<file path=ppt/slideLayouts/slideLayout13.xml><?xml version="1.0" encoding="utf-8"?>
-<p:sldLayout xmlns:a="http://schemas.openxmlformats.org/drawingml/2006/main" xmlns:p="http://schemas.openxmlformats.org/presentationml/2006/main" xmlns:p14="http://schemas.microsoft.com/office/powerpoint/2010/main" type="cust" preserve="1" showMasterSp="1">
+<file path=ppt/slideLayouts/slideLayout2.xml><?xml version="1.0" encoding="utf-8"?>
+<p:sldLayout xmlns:a="http://schemas.openxmlformats.org/drawingml/2006/main" xmlns:r="http://schemas.openxmlformats.org/officeDocument/2006/relationships" xmlns:p="http://schemas.openxmlformats.org/presentationml/2006/main" preserve="1">
   <p:cSld name="Agenda">
     <p:spTree>
       <p:nvGrpSpPr>
@@ -1121,11 +1089,6 @@
         </a:xfrm>
       </p:grpSpPr>
     </p:spTree>
-    <p:extLst>
-      <p:ext uri="{BB962C8B-B14F-4D97-AF65-F5344CB8AC3E}">
-        <p14:creationId val="1212999818"/>
-      </p:ext>
-    </p:extLst>
   </p:cSld>
   <p:clrMapOvr>
     <a:masterClrMapping/>
@@ -1133,8 +1096,8 @@
 </p:sldLayout>
 </file>
 
-<file path=ppt/slideLayouts/slideLayout14.xml><?xml version="1.0" encoding="utf-8"?>
-<p:sldLayout xmlns:a="http://schemas.openxmlformats.org/drawingml/2006/main" xmlns:p="http://schemas.openxmlformats.org/presentationml/2006/main" xmlns:p14="http://schemas.microsoft.com/office/powerpoint/2010/main" type="cust" preserve="1" showMasterSp="1">
+<file path=ppt/slideLayouts/slideLayout3.xml><?xml version="1.0" encoding="utf-8"?>
+<p:sldLayout xmlns:a="http://schemas.openxmlformats.org/drawingml/2006/main" xmlns:r="http://schemas.openxmlformats.org/officeDocument/2006/relationships" xmlns:p="http://schemas.openxmlformats.org/presentationml/2006/main" preserve="1">
   <p:cSld name="Content">
     <p:spTree>
       <p:nvGrpSpPr>
@@ -1151,11 +1114,6 @@
         </a:xfrm>
       </p:grpSpPr>
     </p:spTree>
-    <p:extLst>
-      <p:ext uri="{BB962C8B-B14F-4D97-AF65-F5344CB8AC3E}">
-        <p14:creationId val="1212999818"/>
-      </p:ext>
-    </p:extLst>
   </p:cSld>
   <p:clrMapOvr>
     <a:masterClrMapping/>
@@ -1163,8 +1121,8 @@
 </p:sldLayout>
 </file>
 
-<file path=ppt/slideLayouts/slideLayout15.xml><?xml version="1.0" encoding="utf-8"?>
-<p:sldLayout xmlns:a="http://schemas.openxmlformats.org/drawingml/2006/main" xmlns:p="http://schemas.openxmlformats.org/presentationml/2006/main" xmlns:p14="http://schemas.microsoft.com/office/powerpoint/2010/main" type="cust" preserve="1" showMasterSp="1">
+<file path=ppt/slideLayouts/slideLayout4.xml><?xml version="1.0" encoding="utf-8"?>
+<p:sldLayout xmlns:a="http://schemas.openxmlformats.org/drawingml/2006/main" xmlns:r="http://schemas.openxmlformats.org/officeDocument/2006/relationships" xmlns:p="http://schemas.openxmlformats.org/presentationml/2006/main" preserve="1">
   <p:cSld name="Closing">
     <p:bg>
       <p:bgPr>
@@ -1189,11 +1147,6 @@
         </a:xfrm>
       </p:grpSpPr>
     </p:spTree>
-    <p:extLst>
-      <p:ext uri="{BB962C8B-B14F-4D97-AF65-F5344CB8AC3E}">
-        <p14:creationId val="1212999818"/>
-      </p:ext>
-    </p:extLst>
   </p:cSld>
   <p:clrMapOvr>
     <a:masterClrMapping/>
@@ -1289,6 +1242,7 @@
               <a:rPr lang="en-US" smtClean="0"/>
               <a:t>Click to edit Master text styles</a:t>
             </a:r>
+            <a:endParaRPr lang="en-US" smtClean="0"/>
           </a:p>
           <a:p>
             <a:pPr lvl="1"/>
@@ -1296,6 +1250,7 @@
               <a:rPr lang="en-US" smtClean="0"/>
               <a:t>Second level</a:t>
             </a:r>
+            <a:endParaRPr lang="en-US" smtClean="0"/>
           </a:p>
           <a:p>
             <a:pPr lvl="2"/>
@@ -1303,6 +1258,7 @@
               <a:rPr lang="en-US" smtClean="0"/>
               <a:t>Third level</a:t>
             </a:r>
+            <a:endParaRPr lang="en-US" smtClean="0"/>
           </a:p>
           <a:p>
             <a:pPr lvl="3"/>
@@ -1310,6 +1266,7 @@
               <a:rPr lang="en-US" smtClean="0"/>
               <a:t>Fourth level</a:t>
             </a:r>
+            <a:endParaRPr lang="en-US" smtClean="0"/>
           </a:p>
           <a:p>
             <a:pPr lvl="4"/>
@@ -1356,7 +1313,6 @@
           <a:p>
             <a:fld id="{5BCAD085-E8A6-8845-BD4E-CB4CCA059FC4}" type="datetimeFigureOut">
               <a:rPr lang="en-US" smtClean="0"/>
-              <a:t>1/27/13</a:t>
             </a:fld>
             <a:endParaRPr lang="en-US"/>
           </a:p>
@@ -1434,25 +1390,19 @@
           <a:p>
             <a:fld id="{C1FF6DA9-008F-8B48-92A6-B652298478BF}" type="slidenum">
               <a:rPr lang="en-US" smtClean="0"/>
-              <a:t>‹#›</a:t>
             </a:fld>
             <a:endParaRPr lang="en-US"/>
           </a:p>
         </p:txBody>
       </p:sp>
     </p:spTree>
-    <p:extLst>
-      <p:ext uri="{BB962C8B-B14F-4D97-AF65-F5344CB8AC3E}">
-        <p14:creationId xmlns:p14="http://schemas.microsoft.com/office/powerpoint/2010/main" val="2209977519"/>
-      </p:ext>
-    </p:extLst>
   </p:cSld>
   <p:clrMap bg1="lt1" tx1="dk1" bg2="lt2" tx2="dk2" accent1="accent1" accent2="accent2" accent3="accent3" accent4="accent4" accent5="accent5" accent6="accent6" hlink="hlink" folHlink="folHlink"/>
   <p:sldLayoutIdLst>
-    <p:sldLayoutId id="2147483660" r:id="rId13"/>
-    <p:sldLayoutId id="2147483661" r:id="rId14"/>
-    <p:sldLayoutId id="2147483662" r:id="rId15"/>
-    <p:sldLayoutId id="2147483663" r:id="rId16"/>
+    <p:sldLayoutId id="2147483649" r:id="rId1"/>
+    <p:sldLayoutId id="2147483650" r:id="rId2"/>
+    <p:sldLayoutId id="2147483651" r:id="rId3"/>
+    <p:sldLayoutId id="2147483652" r:id="rId4"/>
   </p:sldLayoutIdLst>
   <p:txStyles>
     <p:titleStyle>
@@ -1476,7 +1426,7 @@
         <a:spcBef>
           <a:spcPct val="20000"/>
         </a:spcBef>
-        <a:buFont typeface="Arial"/>
+        <a:buFont typeface="Arial" panose="020B0604020202020204"/>
         <a:buChar char="•"/>
         <a:defRPr sz="3200" kern="1200">
           <a:solidFill>
@@ -1491,7 +1441,7 @@
         <a:spcBef>
           <a:spcPct val="20000"/>
         </a:spcBef>
-        <a:buFont typeface="Arial"/>
+        <a:buFont typeface="Arial" panose="020B0604020202020204"/>
         <a:buChar char="–"/>
         <a:defRPr sz="2800" kern="1200">
           <a:solidFill>
@@ -1506,7 +1456,7 @@
         <a:spcBef>
           <a:spcPct val="20000"/>
         </a:spcBef>
-        <a:buFont typeface="Arial"/>
+        <a:buFont typeface="Arial" panose="020B0604020202020204"/>
         <a:buChar char="•"/>
         <a:defRPr sz="2400" kern="1200">
           <a:solidFill>
@@ -1521,7 +1471,7 @@
         <a:spcBef>
           <a:spcPct val="20000"/>
         </a:spcBef>
-        <a:buFont typeface="Arial"/>
+        <a:buFont typeface="Arial" panose="020B0604020202020204"/>
         <a:buChar char="–"/>
         <a:defRPr sz="2000" kern="1200">
           <a:solidFill>
@@ -1536,7 +1486,7 @@
         <a:spcBef>
           <a:spcPct val="20000"/>
         </a:spcBef>
-        <a:buFont typeface="Arial"/>
+        <a:buFont typeface="Arial" panose="020B0604020202020204"/>
         <a:buChar char="»"/>
         <a:defRPr sz="2000" kern="1200">
           <a:solidFill>
@@ -1551,7 +1501,7 @@
         <a:spcBef>
           <a:spcPct val="20000"/>
         </a:spcBef>
-        <a:buFont typeface="Arial"/>
+        <a:buFont typeface="Arial" panose="020B0604020202020204"/>
         <a:buChar char="•"/>
         <a:defRPr sz="2000" kern="1200">
           <a:solidFill>
@@ -1566,7 +1516,7 @@
         <a:spcBef>
           <a:spcPct val="20000"/>
         </a:spcBef>
-        <a:buFont typeface="Arial"/>
+        <a:buFont typeface="Arial" panose="020B0604020202020204"/>
         <a:buChar char="•"/>
         <a:defRPr sz="2000" kern="1200">
           <a:solidFill>
@@ -1581,7 +1531,7 @@
         <a:spcBef>
           <a:spcPct val="20000"/>
         </a:spcBef>
-        <a:buFont typeface="Arial"/>
+        <a:buFont typeface="Arial" panose="020B0604020202020204"/>
         <a:buChar char="•"/>
         <a:defRPr sz="2000" kern="1200">
           <a:solidFill>
@@ -1596,7 +1546,7 @@
         <a:spcBef>
           <a:spcPct val="20000"/>
         </a:spcBef>
-        <a:buFont typeface="Arial"/>
+        <a:buFont typeface="Arial" panose="020B0604020202020204"/>
         <a:buChar char="•"/>
         <a:defRPr sz="2000" kern="1200">
           <a:solidFill>
@@ -1849,6 +1799,14 @@
               </a:rPr>
               <a:t>Unity UI 基础</a:t>
             </a:r>
+            <a:endParaRPr lang="zh-CN" sz="6900" b="1" dirty="0">
+              <a:solidFill>
+                <a:schemeClr val="dk1"/>
+              </a:solidFill>
+              <a:latin typeface="+mj-lt"/>
+              <a:ea typeface="+mj-ea"/>
+              <a:cs typeface="+mj-cs"/>
+            </a:endParaRPr>
           </a:p>
         </p:txBody>
       </p:sp>
@@ -1889,6 +1847,14 @@
               </a:rPr>
               <a:t>Canvas、EventSystem 与常用 UGUI 控件</a:t>
             </a:r>
+            <a:endParaRPr lang="zh-CN" sz="3150" b="1" dirty="0">
+              <a:solidFill>
+                <a:schemeClr val="accent1"/>
+              </a:solidFill>
+              <a:latin typeface="+mj-lt"/>
+              <a:ea typeface="+mj-ea"/>
+              <a:cs typeface="+mj-cs"/>
+            </a:endParaRPr>
           </a:p>
         </p:txBody>
       </p:sp>
@@ -1929,659 +1895,17 @@
               </a:rPr>
               <a:t>把“看得见”变成“点得到、会响应、能适配”</a:t>
             </a:r>
+            <a:endParaRPr lang="zh-CN" sz="2400" dirty="0">
+              <a:solidFill>
+                <a:schemeClr val="dk2"/>
+              </a:solidFill>
+              <a:latin typeface="+mn-lt"/>
+              <a:ea typeface="+mn-ea"/>
+              <a:cs typeface="+mn-cs"/>
+            </a:endParaRPr>
           </a:p>
         </p:txBody>
       </p:sp>
-      <p:grpSp>
-        <p:nvGrpSpPr>
-          <p:cNvPr id="26" name="Group 26"/>
-          <p:cNvGrpSpPr/>
-          <p:nvPr/>
-        </p:nvGrpSpPr>
-        <p:grpSpPr>
-          <a:xfrm>
-            <a:off x="7477125" y="781050"/>
-            <a:ext cx="4000500" cy="4572000"/>
-            <a:chOff x="7477125" y="781050"/>
-            <a:chExt cx="4000500" cy="4572000"/>
-          </a:xfrm>
-        </p:grpSpPr>
-        <p:sp>
-          <p:nvSpPr>
-            <p:cNvPr id="7" name="Rectangle 7"/>
-            <p:cNvSpPr/>
-            <p:nvPr/>
-          </p:nvSpPr>
-          <p:spPr>
-            <a:xfrm>
-              <a:off x="7477125" y="781050"/>
-              <a:ext cx="4000500" cy="4572000"/>
-            </a:xfrm>
-            <a:prstGeom prst="roundRect">
-              <a:avLst>
-                <a:gd name="adj" fmla="val 6667"/>
-              </a:avLst>
-            </a:prstGeom>
-            <a:solidFill>
-              <a:srgbClr val="FFFFFF"/>
-            </a:solidFill>
-            <a:ln w="38100">
-              <a:solidFill>
-                <a:schemeClr val="accent4"/>
-              </a:solidFill>
-            </a:ln>
-          </p:spPr>
-        </p:sp>
-        <p:sp>
-          <p:nvSpPr>
-            <p:cNvPr id="8" name="Rectangle 8"/>
-            <p:cNvSpPr/>
-            <p:nvPr/>
-          </p:nvSpPr>
-          <p:spPr>
-            <a:xfrm>
-              <a:off x="7477125" y="781050"/>
-              <a:ext cx="4000500" cy="628650"/>
-            </a:xfrm>
-            <a:prstGeom prst="roundRect">
-              <a:avLst>
-                <a:gd name="adj" fmla="val 42424"/>
-              </a:avLst>
-            </a:prstGeom>
-            <a:solidFill>
-              <a:schemeClr val="accent1"/>
-            </a:solidFill>
-            <a:ln>
-              <a:noFill/>
-            </a:ln>
-          </p:spPr>
-        </p:sp>
-        <p:sp>
-          <p:nvSpPr>
-            <p:cNvPr id="9" name="Ellipse 9"/>
-            <p:cNvSpPr/>
-            <p:nvPr/>
-          </p:nvSpPr>
-          <p:spPr>
-            <a:xfrm>
-              <a:off x="7715250" y="1000125"/>
-              <a:ext cx="190500" cy="190500"/>
-            </a:xfrm>
-            <a:prstGeom prst="ellipse">
-              <a:avLst/>
-            </a:prstGeom>
-            <a:solidFill>
-              <a:srgbClr val="D85C45"/>
-            </a:solidFill>
-            <a:ln>
-              <a:noFill/>
-            </a:ln>
-          </p:spPr>
-        </p:sp>
-        <p:sp>
-          <p:nvSpPr>
-            <p:cNvPr id="10" name="Ellipse 10"/>
-            <p:cNvSpPr/>
-            <p:nvPr/>
-          </p:nvSpPr>
-          <p:spPr>
-            <a:xfrm>
-              <a:off x="8001000" y="1000125"/>
-              <a:ext cx="190500" cy="190500"/>
-            </a:xfrm>
-            <a:prstGeom prst="ellipse">
-              <a:avLst/>
-            </a:prstGeom>
-            <a:solidFill>
-              <a:schemeClr val="accent2"/>
-            </a:solidFill>
-            <a:ln>
-              <a:noFill/>
-            </a:ln>
-          </p:spPr>
-        </p:sp>
-        <p:sp>
-          <p:nvSpPr>
-            <p:cNvPr id="11" name="Ellipse 11"/>
-            <p:cNvSpPr/>
-            <p:nvPr/>
-          </p:nvSpPr>
-          <p:spPr>
-            <a:xfrm>
-              <a:off x="8286750" y="1000125"/>
-              <a:ext cx="190500" cy="190500"/>
-            </a:xfrm>
-            <a:prstGeom prst="ellipse">
-              <a:avLst/>
-            </a:prstGeom>
-            <a:solidFill>
-              <a:schemeClr val="accent3"/>
-            </a:solidFill>
-            <a:ln>
-              <a:noFill/>
-            </a:ln>
-          </p:spPr>
-        </p:sp>
-        <p:sp>
-          <p:nvSpPr>
-            <p:cNvPr id="12" name="TextBox 12"/>
-            <p:cNvSpPr txBox="1"/>
-            <p:nvPr/>
-          </p:nvSpPr>
-          <p:spPr>
-            <a:xfrm>
-              <a:off x="8936965" y="996315"/>
-              <a:ext cx="1080821" cy="352044"/>
-            </a:xfrm>
-            <a:prstGeom prst="rect">
-              <a:avLst/>
-            </a:prstGeom>
-            <a:noFill/>
-            <a:ln>
-              <a:noFill/>
-            </a:ln>
-          </p:spPr>
-          <p:txBody>
-            <a:bodyPr wrap="none" lIns="0" tIns="0" rIns="0" bIns="0" anchor="t" anchorCtr="0">
-              <a:spAutoFit/>
-            </a:bodyPr>
-            <a:lstStyle/>
-            <a:p>
-              <a:pPr algn="ctr"/>
-              <a:r>
-                <a:rPr lang="en-US" sz="1800" dirty="0">
-                  <a:solidFill>
-                    <a:srgbClr val="FFFFFF"/>
-                  </a:solidFill>
-                  <a:latin typeface="Consolas"/>
-                  <a:ea typeface="Consolas"/>
-                  <a:cs typeface="Consolas"/>
-                </a:rPr>
-                <a:t>SETTINGS</a:t>
-              </a:r>
-            </a:p>
-          </p:txBody>
-        </p:sp>
-        <p:sp>
-          <p:nvSpPr>
-            <p:cNvPr id="13" name="Rectangle 13"/>
-            <p:cNvSpPr/>
-            <p:nvPr/>
-          </p:nvSpPr>
-          <p:spPr>
-            <a:xfrm>
-              <a:off x="7781925" y="1695450"/>
-              <a:ext cx="3390900" cy="1047750"/>
-            </a:xfrm>
-            <a:prstGeom prst="roundRect">
-              <a:avLst>
-                <a:gd name="adj" fmla="val 18182"/>
-              </a:avLst>
-            </a:prstGeom>
-            <a:solidFill>
-              <a:srgbClr val="EAF0FA"/>
-            </a:solidFill>
-            <a:ln>
-              <a:noFill/>
-            </a:ln>
-          </p:spPr>
-        </p:sp>
-        <p:grpSp>
-          <p:nvGrpSpPr>
-            <p:cNvPr id="16" name="Group 16"/>
-            <p:cNvGrpSpPr/>
-            <p:nvPr/>
-          </p:nvGrpSpPr>
-          <p:grpSpPr>
-            <a:xfrm>
-              <a:off x="9163050" y="1978025"/>
-              <a:ext cx="628651" cy="558801"/>
-              <a:chOff x="9163050" y="1978025"/>
-              <a:chExt cx="628651" cy="558801"/>
-            </a:xfrm>
-          </p:grpSpPr>
-          <p:sp>
-            <p:nvSpPr>
-              <p:cNvPr id="14" name="Freeform 14"/>
-              <p:cNvSpPr/>
-              <p:nvPr/>
-            </p:nvSpPr>
-            <p:spPr>
-              <a:xfrm>
-                <a:off x="9163050" y="1978025"/>
-                <a:ext cx="628651" cy="558801"/>
-              </a:xfrm>
-              <a:custGeom>
-                <a:avLst/>
-                <a:gdLst/>
-                <a:ahLst/>
-                <a:cxnLst/>
-                <a:rect l="l" t="t" r="r" b="b"/>
-                <a:pathLst>
-                  <a:path w="628651" h="558801">
-                    <a:moveTo>
-                      <a:pt x="69850" y="104775"/>
-                    </a:moveTo>
-                    <a:lnTo>
-                      <a:pt x="104775" y="104775"/>
-                    </a:lnTo>
-                    <a:cubicBezTo>
-                      <a:pt x="143352" y="104775"/>
-                      <a:pt x="174625" y="73502"/>
-                      <a:pt x="174625" y="34925"/>
-                    </a:cubicBezTo>
-                    <a:cubicBezTo>
-                      <a:pt x="174625" y="15636"/>
-                      <a:pt x="190262" y="0"/>
-                      <a:pt x="209550" y="0"/>
-                    </a:cubicBezTo>
-                    <a:lnTo>
-                      <a:pt x="419100" y="0"/>
-                    </a:lnTo>
-                    <a:cubicBezTo>
-                      <a:pt x="438389" y="0"/>
-                      <a:pt x="454025" y="15636"/>
-                      <a:pt x="454025" y="34925"/>
-                    </a:cubicBezTo>
-                    <a:cubicBezTo>
-                      <a:pt x="454025" y="73502"/>
-                      <a:pt x="485298" y="104775"/>
-                      <a:pt x="523875" y="104775"/>
-                    </a:cubicBezTo>
-                    <a:lnTo>
-                      <a:pt x="558801" y="104775"/>
-                    </a:lnTo>
-                    <a:cubicBezTo>
-                      <a:pt x="597378" y="104775"/>
-                      <a:pt x="628651" y="136048"/>
-                      <a:pt x="628651" y="174625"/>
-                    </a:cubicBezTo>
-                    <a:lnTo>
-                      <a:pt x="628651" y="488950"/>
-                    </a:lnTo>
-                    <a:cubicBezTo>
-                      <a:pt x="628651" y="527528"/>
-                      <a:pt x="597378" y="558801"/>
-                      <a:pt x="558801" y="558801"/>
-                    </a:cubicBezTo>
-                    <a:lnTo>
-                      <a:pt x="69850" y="558801"/>
-                    </a:lnTo>
-                    <a:cubicBezTo>
-                      <a:pt x="31273" y="558801"/>
-                      <a:pt x="0" y="527528"/>
-                      <a:pt x="0" y="488950"/>
-                    </a:cubicBezTo>
-                    <a:lnTo>
-                      <a:pt x="0" y="174625"/>
-                    </a:lnTo>
-                    <a:cubicBezTo>
-                      <a:pt x="0" y="136048"/>
-                      <a:pt x="31273" y="104775"/>
-                      <a:pt x="69850" y="104775"/>
-                    </a:cubicBezTo>
-                  </a:path>
-                </a:pathLst>
-              </a:custGeom>
-              <a:noFill/>
-              <a:ln w="19050">
-                <a:solidFill>
-                  <a:schemeClr val="accent1"/>
-                </a:solidFill>
-              </a:ln>
-            </p:spPr>
-          </p:sp>
-          <p:sp>
-            <p:nvSpPr>
-              <p:cNvPr id="15" name="Freeform 15"/>
-              <p:cNvSpPr/>
-              <p:nvPr/>
-            </p:nvSpPr>
-            <p:spPr>
-              <a:xfrm>
-                <a:off x="9372600" y="2187575"/>
-                <a:ext cx="209550" cy="209550"/>
-              </a:xfrm>
-              <a:custGeom>
-                <a:avLst/>
-                <a:gdLst/>
-                <a:ahLst/>
-                <a:cxnLst/>
-                <a:rect l="l" t="t" r="r" b="b"/>
-                <a:pathLst>
-                  <a:path w="209550" h="209550">
-                    <a:moveTo>
-                      <a:pt x="0" y="104775"/>
-                    </a:moveTo>
-                    <a:cubicBezTo>
-                      <a:pt x="0" y="162641"/>
-                      <a:pt x="46909" y="209550"/>
-                      <a:pt x="104775" y="209550"/>
-                    </a:cubicBezTo>
-                    <a:cubicBezTo>
-                      <a:pt x="162641" y="209550"/>
-                      <a:pt x="209550" y="162641"/>
-                      <a:pt x="209550" y="104775"/>
-                    </a:cubicBezTo>
-                    <a:cubicBezTo>
-                      <a:pt x="209550" y="46909"/>
-                      <a:pt x="162641" y="0"/>
-                      <a:pt x="104775" y="0"/>
-                    </a:cubicBezTo>
-                    <a:cubicBezTo>
-                      <a:pt x="46909" y="0"/>
-                      <a:pt x="0" y="46909"/>
-                      <a:pt x="0" y="104775"/>
-                    </a:cubicBezTo>
-                  </a:path>
-                </a:pathLst>
-              </a:custGeom>
-              <a:noFill/>
-              <a:ln w="19050">
-                <a:solidFill>
-                  <a:schemeClr val="accent1"/>
-                </a:solidFill>
-              </a:ln>
-            </p:spPr>
-          </p:sp>
-        </p:grpSp>
-        <p:sp>
-          <p:nvSpPr>
-            <p:cNvPr id="17" name="TextBox 17"/>
-            <p:cNvSpPr txBox="1"/>
-            <p:nvPr/>
-          </p:nvSpPr>
-          <p:spPr>
-            <a:xfrm>
-              <a:off x="7848981" y="3006090"/>
-              <a:ext cx="502920" cy="352044"/>
-            </a:xfrm>
-            <a:prstGeom prst="rect">
-              <a:avLst/>
-            </a:prstGeom>
-            <a:noFill/>
-            <a:ln>
-              <a:noFill/>
-            </a:ln>
-          </p:spPr>
-          <p:txBody>
-            <a:bodyPr wrap="none" lIns="0" tIns="0" rIns="0" bIns="0" anchor="t" anchorCtr="0">
-              <a:spAutoFit/>
-            </a:bodyPr>
-            <a:lstStyle/>
-            <a:p>
-              <a:pPr algn="l"/>
-              <a:r>
-                <a:rPr lang="zh-CN" sz="1800" dirty="0">
-                  <a:solidFill>
-                    <a:schemeClr val="dk1"/>
-                  </a:solidFill>
-                  <a:latin typeface="+mn-lt"/>
-                  <a:ea typeface="+mn-ea"/>
-                  <a:cs typeface="+mn-cs"/>
-                </a:rPr>
-                <a:t>音乐</a:t>
-              </a:r>
-            </a:p>
-          </p:txBody>
-        </p:sp>
-        <p:sp>
-          <p:nvSpPr>
-            <p:cNvPr id="18" name="Rectangle 18"/>
-            <p:cNvSpPr/>
-            <p:nvPr/>
-          </p:nvSpPr>
-          <p:spPr>
-            <a:xfrm>
-              <a:off x="10353675" y="2933700"/>
-              <a:ext cx="819150" cy="438150"/>
-            </a:xfrm>
-            <a:prstGeom prst="roundRect">
-              <a:avLst>
-                <a:gd name="adj" fmla="val 50000"/>
-              </a:avLst>
-            </a:prstGeom>
-            <a:solidFill>
-              <a:schemeClr val="accent3"/>
-            </a:solidFill>
-            <a:ln>
-              <a:noFill/>
-            </a:ln>
-          </p:spPr>
-        </p:sp>
-        <p:sp>
-          <p:nvSpPr>
-            <p:cNvPr id="19" name="Ellipse 19"/>
-            <p:cNvSpPr/>
-            <p:nvPr/>
-          </p:nvSpPr>
-          <p:spPr>
-            <a:xfrm>
-              <a:off x="10782300" y="2981325"/>
-              <a:ext cx="342900" cy="342900"/>
-            </a:xfrm>
-            <a:prstGeom prst="ellipse">
-              <a:avLst/>
-            </a:prstGeom>
-            <a:solidFill>
-              <a:srgbClr val="FFFFFF"/>
-            </a:solidFill>
-            <a:ln>
-              <a:noFill/>
-            </a:ln>
-          </p:spPr>
-        </p:sp>
-        <p:sp>
-          <p:nvSpPr>
-            <p:cNvPr id="20" name="TextBox 20"/>
-            <p:cNvSpPr txBox="1"/>
-            <p:nvPr/>
-          </p:nvSpPr>
-          <p:spPr>
-            <a:xfrm>
-              <a:off x="7848981" y="3691890"/>
-              <a:ext cx="502920" cy="352044"/>
-            </a:xfrm>
-            <a:prstGeom prst="rect">
-              <a:avLst/>
-            </a:prstGeom>
-            <a:noFill/>
-            <a:ln>
-              <a:noFill/>
-            </a:ln>
-          </p:spPr>
-          <p:txBody>
-            <a:bodyPr wrap="none" lIns="0" tIns="0" rIns="0" bIns="0" anchor="t" anchorCtr="0">
-              <a:spAutoFit/>
-            </a:bodyPr>
-            <a:lstStyle/>
-            <a:p>
-              <a:pPr algn="l"/>
-              <a:r>
-                <a:rPr lang="zh-CN" sz="1800" dirty="0">
-                  <a:solidFill>
-                    <a:schemeClr val="dk1"/>
-                  </a:solidFill>
-                  <a:latin typeface="+mn-lt"/>
-                  <a:ea typeface="+mn-ea"/>
-                  <a:cs typeface="+mn-cs"/>
-                </a:rPr>
-                <a:t>画质</a:t>
-              </a:r>
-            </a:p>
-          </p:txBody>
-        </p:sp>
-        <p:sp>
-          <p:nvSpPr>
-            <p:cNvPr id="21" name="Rectangle 21"/>
-            <p:cNvSpPr/>
-            <p:nvPr/>
-          </p:nvSpPr>
-          <p:spPr>
-            <a:xfrm>
-              <a:off x="9286875" y="3562350"/>
-              <a:ext cx="1885950" cy="476250"/>
-            </a:xfrm>
-            <a:prstGeom prst="roundRect">
-              <a:avLst>
-                <a:gd name="adj" fmla="val 28000"/>
-              </a:avLst>
-            </a:prstGeom>
-            <a:solidFill>
-              <a:srgbClr val="FFF9E9"/>
-            </a:solidFill>
-            <a:ln w="28575">
-              <a:solidFill>
-                <a:schemeClr val="accent4"/>
-              </a:solidFill>
-            </a:ln>
-          </p:spPr>
-        </p:sp>
-        <p:sp>
-          <p:nvSpPr>
-            <p:cNvPr id="22" name="TextBox 22"/>
-            <p:cNvSpPr txBox="1"/>
-            <p:nvPr/>
-          </p:nvSpPr>
-          <p:spPr>
-            <a:xfrm>
-              <a:off x="9506331" y="3691890"/>
-              <a:ext cx="260604" cy="352044"/>
-            </a:xfrm>
-            <a:prstGeom prst="rect">
-              <a:avLst/>
-            </a:prstGeom>
-            <a:noFill/>
-            <a:ln>
-              <a:noFill/>
-            </a:ln>
-          </p:spPr>
-          <p:txBody>
-            <a:bodyPr wrap="none" lIns="0" tIns="0" rIns="0" bIns="0" anchor="t" anchorCtr="0">
-              <a:spAutoFit/>
-            </a:bodyPr>
-            <a:lstStyle/>
-            <a:p>
-              <a:pPr algn="l"/>
-              <a:r>
-                <a:rPr lang="zh-CN" sz="1800" dirty="0">
-                  <a:solidFill>
-                    <a:schemeClr val="dk2"/>
-                  </a:solidFill>
-                  <a:latin typeface="+mn-lt"/>
-                  <a:ea typeface="+mn-ea"/>
-                  <a:cs typeface="+mn-cs"/>
-                </a:rPr>
-                <a:t>高</a:t>
-              </a:r>
-            </a:p>
-          </p:txBody>
-        </p:sp>
-        <p:sp>
-          <p:nvSpPr>
-            <p:cNvPr id="23" name="Freeform 23"/>
-            <p:cNvSpPr/>
-            <p:nvPr/>
-          </p:nvSpPr>
-          <p:spPr>
-            <a:xfrm>
-              <a:off x="10772775" y="3733800"/>
-              <a:ext cx="266700" cy="152400"/>
-            </a:xfrm>
-            <a:custGeom>
-              <a:avLst/>
-              <a:gdLst/>
-              <a:ahLst/>
-              <a:cxnLst/>
-              <a:rect l="l" t="t" r="r" b="b"/>
-              <a:pathLst>
-                <a:path w="266700" h="152400">
-                  <a:moveTo>
-                    <a:pt x="0" y="0"/>
-                  </a:moveTo>
-                  <a:lnTo>
-                    <a:pt x="133350" y="152400"/>
-                  </a:lnTo>
-                  <a:lnTo>
-                    <a:pt x="266700" y="0"/>
-                  </a:lnTo>
-                </a:path>
-              </a:pathLst>
-            </a:custGeom>
-            <a:noFill/>
-            <a:ln w="38100" cap="rnd">
-              <a:solidFill>
-                <a:schemeClr val="dk2"/>
-              </a:solidFill>
-              <a:round/>
-            </a:ln>
-          </p:spPr>
-        </p:sp>
-        <p:sp>
-          <p:nvSpPr>
-            <p:cNvPr id="24" name="Rectangle 24"/>
-            <p:cNvSpPr/>
-            <p:nvPr/>
-          </p:nvSpPr>
-          <p:spPr>
-            <a:xfrm>
-              <a:off x="8334375" y="4419600"/>
-              <a:ext cx="2286000" cy="590550"/>
-            </a:xfrm>
-            <a:prstGeom prst="roundRect">
-              <a:avLst>
-                <a:gd name="adj" fmla="val 29032"/>
-              </a:avLst>
-            </a:prstGeom>
-            <a:solidFill>
-              <a:schemeClr val="accent2"/>
-            </a:solidFill>
-            <a:ln>
-              <a:noFill/>
-            </a:ln>
-          </p:spPr>
-        </p:sp>
-        <p:sp>
-          <p:nvSpPr>
-            <p:cNvPr id="25" name="TextBox 25"/>
-            <p:cNvSpPr txBox="1"/>
-            <p:nvPr/>
-          </p:nvSpPr>
-          <p:spPr>
-            <a:xfrm>
-              <a:off x="8786698" y="4560570"/>
-              <a:ext cx="1381354" cy="469392"/>
-            </a:xfrm>
-            <a:prstGeom prst="rect">
-              <a:avLst/>
-            </a:prstGeom>
-            <a:noFill/>
-            <a:ln>
-              <a:noFill/>
-            </a:ln>
-          </p:spPr>
-          <p:txBody>
-            <a:bodyPr wrap="none" lIns="0" tIns="0" rIns="0" bIns="0" anchor="t" anchorCtr="0">
-              <a:spAutoFit/>
-            </a:bodyPr>
-            <a:lstStyle/>
-            <a:p>
-              <a:pPr algn="ctr"/>
-              <a:r>
-                <a:rPr lang="zh-CN" sz="2400" b="1" dirty="0">
-                  <a:solidFill>
-                    <a:srgbClr val="FFFFFF"/>
-                  </a:solidFill>
-                  <a:latin typeface="+mn-lt"/>
-                  <a:ea typeface="+mn-ea"/>
-                  <a:cs typeface="+mn-cs"/>
-                </a:rPr>
-                <a:t>应用设置</a:t>
-              </a:r>
-            </a:p>
-          </p:txBody>
-        </p:sp>
-      </p:grpSp>
       <p:grpSp>
         <p:nvGrpSpPr>
           <p:cNvPr id="34" name="Group 34"/>
@@ -2928,69 +2252,46 @@
                   <a:solidFill>
                     <a:schemeClr val="dk1"/>
                   </a:solidFill>
-                  <a:latin typeface="Consolas"/>
-                  <a:ea typeface="Consolas"/>
-                  <a:cs typeface="Consolas"/>
+                  <a:latin typeface="Consolas" panose="020B0609020204030204"/>
+                  <a:ea typeface="Consolas" panose="020B0609020204030204"/>
+                  <a:cs typeface="Consolas" panose="020B0609020204030204"/>
                 </a:rPr>
                 <a:t>Canvas + Input + Controls + Events</a:t>
               </a:r>
+              <a:endParaRPr lang="en-US" sz="1800" b="1" dirty="0">
+                <a:solidFill>
+                  <a:schemeClr val="dk1"/>
+                </a:solidFill>
+                <a:latin typeface="Consolas" panose="020B0609020204030204"/>
+                <a:ea typeface="Consolas" panose="020B0609020204030204"/>
+                <a:cs typeface="Consolas" panose="020B0609020204030204"/>
+              </a:endParaRPr>
             </a:p>
           </p:txBody>
         </p:sp>
       </p:grpSp>
-      <p:sp>
-        <p:nvSpPr>
-          <p:cNvPr id="35" name="TextBox 35"/>
-          <p:cNvSpPr txBox="1"/>
-          <p:nvPr/>
-        </p:nvSpPr>
-        <p:spPr>
-          <a:xfrm>
-            <a:off x="678942" y="6274118"/>
-            <a:ext cx="2582527" cy="264033"/>
-          </a:xfrm>
-          <a:prstGeom prst="rect">
-            <a:avLst/>
-          </a:prstGeom>
-          <a:noFill/>
-          <a:ln>
-            <a:noFill/>
-          </a:ln>
-        </p:spPr>
-        <p:txBody>
-          <a:bodyPr wrap="none" lIns="0" tIns="0" rIns="0" bIns="0" anchor="t" anchorCtr="0">
-            <a:spAutoFit/>
-          </a:bodyPr>
-          <a:lstStyle/>
-          <a:p>
-            <a:pPr algn="l"/>
-            <a:r>
-              <a:rPr lang="zh-CN" sz="1350" dirty="0">
-                <a:solidFill>
-                  <a:schemeClr val="accent5"/>
-                </a:solidFill>
-                <a:latin typeface="+mn-lt"/>
-                <a:ea typeface="+mn-ea"/>
-                <a:cs typeface="+mn-cs"/>
-              </a:rPr>
-              <a:t>Unity UI 基础课程 · 第 04 单元</a:t>
-            </a:r>
-          </a:p>
-        </p:txBody>
-      </p:sp>
     </p:spTree>
   </p:cSld>
   <p:clrMapOvr>
     <a:masterClrMapping/>
   </p:clrMapOvr>
-  <p:transition xmlns:p14="http://schemas.microsoft.com/office/powerpoint/2010/main" p14:dur="400">
-    <p:fade/>
-  </p:transition>
+  <mc:AlternateContent xmlns:mc="http://schemas.openxmlformats.org/markup-compatibility/2006">
+    <mc:Choice xmlns:p14="http://schemas.microsoft.com/office/powerpoint/2010/main" Requires="p14">
+      <p:transition p14:dur="400">
+        <p:fade/>
+      </p:transition>
+    </mc:Choice>
+    <mc:Fallback>
+      <p:transition>
+        <p:fade/>
+      </p:transition>
+    </mc:Fallback>
+  </mc:AlternateContent>
 </p:sld>
 </file>
 
 <file path=ppt/slides/slide10.xml><?xml version="1.0" encoding="utf-8"?>
-<p:sld xmlns:a="http://schemas.openxmlformats.org/drawingml/2006/main" xmlns:p="http://schemas.openxmlformats.org/presentationml/2006/main" xmlns:p14="http://schemas.microsoft.com/office/powerpoint/2010/main">
+<p:sld xmlns:a="http://schemas.openxmlformats.org/drawingml/2006/main" xmlns:r="http://schemas.openxmlformats.org/officeDocument/2006/relationships" xmlns:p="http://schemas.openxmlformats.org/presentationml/2006/main">
   <p:cSld>
     <p:bg>
       <p:bgPr>
@@ -3051,6 +2352,14 @@
               </a:rPr>
               <a:t>Toggle：一个布尔状态，或一组互斥选择</a:t>
             </a:r>
+            <a:endParaRPr lang="zh-CN" sz="4200" b="1" dirty="0">
+              <a:solidFill>
+                <a:schemeClr val="dk1"/>
+              </a:solidFill>
+              <a:latin typeface="+mj-lt"/>
+              <a:ea typeface="+mj-ea"/>
+              <a:cs typeface="+mj-cs"/>
+            </a:endParaRPr>
           </a:p>
         </p:txBody>
       </p:sp>
@@ -3091,6 +2400,14 @@
               </a:rPr>
               <a:t>开关用 Toggle；多选一可用 ToggleGroup</a:t>
             </a:r>
+            <a:endParaRPr lang="zh-CN" sz="1800" dirty="0">
+              <a:solidFill>
+                <a:schemeClr val="dk2"/>
+              </a:solidFill>
+              <a:latin typeface="+mn-lt"/>
+              <a:ea typeface="+mn-ea"/>
+              <a:cs typeface="+mn-cs"/>
+            </a:endParaRPr>
           </a:p>
         </p:txBody>
       </p:sp>
@@ -3336,6 +2653,14 @@
                   </a:rPr>
                   <a:t>单个 Toggle</a:t>
                 </a:r>
+                <a:endParaRPr lang="zh-CN" sz="2700" b="1" dirty="0">
+                  <a:solidFill>
+                    <a:srgbClr val="FFFFFF"/>
+                  </a:solidFill>
+                  <a:latin typeface="+mn-lt"/>
+                  <a:ea typeface="+mn-ea"/>
+                  <a:cs typeface="+mn-cs"/>
+                </a:endParaRPr>
               </a:p>
             </p:txBody>
           </p:sp>
@@ -3376,6 +2701,14 @@
                   </a:rPr>
                   <a:t>音乐：开 / 关</a:t>
                 </a:r>
+                <a:endParaRPr lang="zh-CN" sz="2400" b="1" dirty="0">
+                  <a:solidFill>
+                    <a:schemeClr val="dk1"/>
+                  </a:solidFill>
+                  <a:latin typeface="+mn-lt"/>
+                  <a:ea typeface="+mn-ea"/>
+                  <a:cs typeface="+mn-cs"/>
+                </a:endParaRPr>
               </a:p>
             </p:txBody>
           </p:sp>
@@ -3462,6 +2795,14 @@
                   </a:rPr>
                   <a:t>Is On 保存当前状态</a:t>
                 </a:r>
+                <a:endParaRPr lang="zh-CN" sz="1800" dirty="0">
+                  <a:solidFill>
+                    <a:schemeClr val="dk2"/>
+                  </a:solidFill>
+                  <a:latin typeface="+mn-lt"/>
+                  <a:ea typeface="+mn-ea"/>
+                  <a:cs typeface="+mn-cs"/>
+                </a:endParaRPr>
               </a:p>
             </p:txBody>
           </p:sp>
@@ -3502,6 +2843,14 @@
                   </a:rPr>
                   <a:t>On Value Changed(bool)</a:t>
                 </a:r>
+                <a:endParaRPr lang="en-US" sz="1800" dirty="0">
+                  <a:solidFill>
+                    <a:schemeClr val="dk2"/>
+                  </a:solidFill>
+                  <a:latin typeface="+mn-lt"/>
+                  <a:ea typeface="+mn-ea"/>
+                  <a:cs typeface="+mn-cs"/>
+                </a:endParaRPr>
               </a:p>
             </p:txBody>
           </p:sp>
@@ -3560,12 +2909,20 @@
                     <a:solidFill>
                       <a:schemeClr val="accent1"/>
                     </a:solidFill>
-                    <a:latin typeface="Consolas"/>
-                    <a:ea typeface="Consolas"/>
-                    <a:cs typeface="Consolas"/>
+                    <a:latin typeface="Consolas" panose="020B0609020204030204"/>
+                    <a:ea typeface="Consolas" panose="020B0609020204030204"/>
+                    <a:cs typeface="Consolas" panose="020B0609020204030204"/>
                   </a:rPr>
                   <a:t>SetIsOnWithoutNotify(value)</a:t>
                 </a:r>
+                <a:endParaRPr lang="en-US" sz="1800" dirty="0">
+                  <a:solidFill>
+                    <a:schemeClr val="accent1"/>
+                  </a:solidFill>
+                  <a:latin typeface="Consolas" panose="020B0609020204030204"/>
+                  <a:ea typeface="Consolas" panose="020B0609020204030204"/>
+                  <a:cs typeface="Consolas" panose="020B0609020204030204"/>
+                </a:endParaRPr>
               </a:p>
             </p:txBody>
           </p:sp>
@@ -3606,6 +2963,14 @@
                   </a:rPr>
                   <a:t>初始化显示，不误触发监听器</a:t>
                 </a:r>
+                <a:endParaRPr lang="zh-CN" sz="1800" dirty="0">
+                  <a:solidFill>
+                    <a:schemeClr val="dk2"/>
+                  </a:solidFill>
+                  <a:latin typeface="+mn-lt"/>
+                  <a:ea typeface="+mn-ea"/>
+                  <a:cs typeface="+mn-cs"/>
+                </a:endParaRPr>
               </a:p>
             </p:txBody>
           </p:sp>
@@ -3942,6 +3307,14 @@
                   </a:rPr>
                   <a:t>Toggle Group</a:t>
                 </a:r>
+                <a:endParaRPr lang="en-US" sz="2700" b="1" dirty="0">
+                  <a:solidFill>
+                    <a:srgbClr val="FFFFFF"/>
+                  </a:solidFill>
+                  <a:latin typeface="+mn-lt"/>
+                  <a:ea typeface="+mn-ea"/>
+                  <a:cs typeface="+mn-cs"/>
+                </a:endParaRPr>
               </a:p>
             </p:txBody>
           </p:sp>
@@ -3982,6 +3355,14 @@
                   </a:rPr>
                   <a:t>难度：多选一</a:t>
                 </a:r>
+                <a:endParaRPr lang="zh-CN" sz="2400" b="1" dirty="0">
+                  <a:solidFill>
+                    <a:schemeClr val="dk1"/>
+                  </a:solidFill>
+                  <a:latin typeface="+mn-lt"/>
+                  <a:ea typeface="+mn-ea"/>
+                  <a:cs typeface="+mn-cs"/>
+                </a:endParaRPr>
               </a:p>
             </p:txBody>
           </p:sp>
@@ -4080,6 +3461,14 @@
                     </a:rPr>
                     <a:t>简单</a:t>
                   </a:r>
+                  <a:endParaRPr lang="zh-CN" sz="1800" dirty="0">
+                    <a:solidFill>
+                      <a:schemeClr val="dk1"/>
+                    </a:solidFill>
+                    <a:latin typeface="+mn-lt"/>
+                    <a:ea typeface="+mn-ea"/>
+                    <a:cs typeface="+mn-cs"/>
+                  </a:endParaRPr>
                 </a:p>
               </p:txBody>
             </p:sp>
@@ -4144,6 +3533,14 @@
                     </a:rPr>
                     <a:t>普通</a:t>
                   </a:r>
+                  <a:endParaRPr lang="zh-CN" sz="1800" dirty="0">
+                    <a:solidFill>
+                      <a:schemeClr val="dk1"/>
+                    </a:solidFill>
+                    <a:latin typeface="+mn-lt"/>
+                    <a:ea typeface="+mn-ea"/>
+                    <a:cs typeface="+mn-cs"/>
+                  </a:endParaRPr>
                 </a:p>
               </p:txBody>
             </p:sp>
@@ -4208,6 +3605,14 @@
                     </a:rPr>
                     <a:t>困难</a:t>
                   </a:r>
+                  <a:endParaRPr lang="zh-CN" sz="1800" dirty="0">
+                    <a:solidFill>
+                      <a:schemeClr val="dk1"/>
+                    </a:solidFill>
+                    <a:latin typeface="+mn-lt"/>
+                    <a:ea typeface="+mn-ea"/>
+                    <a:cs typeface="+mn-cs"/>
+                  </a:endParaRPr>
                 </a:p>
               </p:txBody>
             </p:sp>
@@ -4273,6 +3678,14 @@
                   </a:rPr>
                   <a:t>适合</a:t>
                 </a:r>
+                <a:endParaRPr lang="zh-CN" sz="1800" b="1" dirty="0">
+                  <a:solidFill>
+                    <a:srgbClr val="2F8F6A"/>
+                  </a:solidFill>
+                  <a:latin typeface="+mn-lt"/>
+                  <a:ea typeface="+mn-ea"/>
+                  <a:cs typeface="+mn-cs"/>
+                </a:endParaRPr>
               </a:p>
             </p:txBody>
           </p:sp>
@@ -4313,6 +3726,14 @@
                   </a:rPr>
                   <a:t>难度 / 角色</a:t>
                 </a:r>
+                <a:endParaRPr lang="zh-CN" sz="1800" dirty="0">
+                  <a:solidFill>
+                    <a:schemeClr val="dk2"/>
+                  </a:solidFill>
+                  <a:latin typeface="+mn-lt"/>
+                  <a:ea typeface="+mn-ea"/>
+                  <a:cs typeface="+mn-cs"/>
+                </a:endParaRPr>
               </a:p>
             </p:txBody>
           </p:sp>
@@ -4353,6 +3774,14 @@
                   </a:rPr>
                   <a:t>互斥模式</a:t>
                 </a:r>
+                <a:endParaRPr lang="zh-CN" sz="1800" dirty="0">
+                  <a:solidFill>
+                    <a:schemeClr val="dk2"/>
+                  </a:solidFill>
+                  <a:latin typeface="+mn-lt"/>
+                  <a:ea typeface="+mn-ea"/>
+                  <a:cs typeface="+mn-cs"/>
+                </a:endParaRPr>
               </a:p>
             </p:txBody>
           </p:sp>
@@ -4393,6 +3822,14 @@
                   </a:rPr>
                   <a:t>选项很多时，改用 Dropdown</a:t>
                 </a:r>
+                <a:endParaRPr lang="zh-CN" sz="1800" dirty="0">
+                  <a:solidFill>
+                    <a:srgbClr val="D85C45"/>
+                  </a:solidFill>
+                  <a:latin typeface="+mn-lt"/>
+                  <a:ea typeface="+mn-ea"/>
+                  <a:cs typeface="+mn-cs"/>
+                </a:endParaRPr>
               </a:p>
             </p:txBody>
           </p:sp>
@@ -4450,46 +3887,6 @@
         </p:sp>
         <p:sp>
           <p:nvSpPr>
-            <p:cNvPr id="46" name="TextBox 46"/>
-            <p:cNvSpPr txBox="1"/>
-            <p:nvPr/>
-          </p:nvSpPr>
-          <p:spPr>
-            <a:xfrm>
-              <a:off x="564642" y="6521768"/>
-              <a:ext cx="2435276" cy="264033"/>
-            </a:xfrm>
-            <a:prstGeom prst="rect">
-              <a:avLst/>
-            </a:prstGeom>
-            <a:noFill/>
-            <a:ln>
-              <a:noFill/>
-            </a:ln>
-          </p:spPr>
-          <p:txBody>
-            <a:bodyPr wrap="none" lIns="0" tIns="0" rIns="0" bIns="0" anchor="t" anchorCtr="0">
-              <a:spAutoFit/>
-            </a:bodyPr>
-            <a:lstStyle/>
-            <a:p>
-              <a:pPr algn="l"/>
-              <a:r>
-                <a:rPr lang="zh-CN" sz="1350" dirty="0">
-                  <a:solidFill>
-                    <a:schemeClr val="accent5"/>
-                  </a:solidFill>
-                  <a:latin typeface="+mn-lt"/>
-                  <a:ea typeface="+mn-ea"/>
-                  <a:cs typeface="+mn-cs"/>
-                </a:rPr>
-                <a:t>Toggle · 布尔状态与互斥选择</a:t>
-              </a:r>
-            </a:p>
-          </p:txBody>
-        </p:sp>
-        <p:sp>
-          <p:nvSpPr>
             <p:cNvPr id="47" name="TextBox 47"/>
             <p:cNvSpPr txBox="1"/>
             <p:nvPr/>
@@ -4523,8 +3920,15 @@
                   <a:ea typeface="+mn-ea"/>
                   <a:cs typeface="+mn-cs"/>
                 </a:rPr>
-                <a:t>10</a:t>
               </a:fld>
+              <a:endParaRPr lang="en-US" sz="1350" dirty="0">
+                <a:solidFill>
+                  <a:schemeClr val="accent5"/>
+                </a:solidFill>
+                <a:latin typeface="+mn-lt"/>
+                <a:ea typeface="+mn-ea"/>
+                <a:cs typeface="+mn-cs"/>
+              </a:endParaRPr>
             </a:p>
           </p:txBody>
         </p:sp>
@@ -4534,14 +3938,23 @@
   <p:clrMapOvr>
     <a:masterClrMapping/>
   </p:clrMapOvr>
-  <p:transition p14:dur="400">
-    <p:fade/>
-  </p:transition>
+  <mc:AlternateContent xmlns:mc="http://schemas.openxmlformats.org/markup-compatibility/2006">
+    <mc:Choice xmlns:p14="http://schemas.microsoft.com/office/powerpoint/2010/main" Requires="p14">
+      <p:transition p14:dur="400">
+        <p:fade/>
+      </p:transition>
+    </mc:Choice>
+    <mc:Fallback>
+      <p:transition>
+        <p:fade/>
+      </p:transition>
+    </mc:Fallback>
+  </mc:AlternateContent>
 </p:sld>
 </file>
 
 <file path=ppt/slides/slide11.xml><?xml version="1.0" encoding="utf-8"?>
-<p:sld xmlns:a="http://schemas.openxmlformats.org/drawingml/2006/main" xmlns:p="http://schemas.openxmlformats.org/presentationml/2006/main" xmlns:p14="http://schemas.microsoft.com/office/powerpoint/2010/main">
+<p:sld xmlns:a="http://schemas.openxmlformats.org/drawingml/2006/main" xmlns:r="http://schemas.openxmlformats.org/officeDocument/2006/relationships" xmlns:p="http://schemas.openxmlformats.org/presentationml/2006/main">
   <p:cSld>
     <p:bg>
       <p:bgPr>
@@ -4602,6 +4015,14 @@
               </a:rPr>
               <a:t>Dropdown：从互斥列表中选择一项</a:t>
             </a:r>
+            <a:endParaRPr lang="zh-CN" sz="4200" b="1" dirty="0">
+              <a:solidFill>
+                <a:schemeClr val="dk1"/>
+              </a:solidFill>
+              <a:latin typeface="+mj-lt"/>
+              <a:ea typeface="+mj-ea"/>
+              <a:cs typeface="+mj-cs"/>
+            </a:endParaRPr>
           </a:p>
         </p:txBody>
       </p:sp>
@@ -4642,6 +4063,14 @@
               </a:rPr>
               <a:t>现代项目优先 TMP_Dropdown，并明确索引映射</a:t>
             </a:r>
+            <a:endParaRPr lang="zh-CN" sz="1800" dirty="0">
+              <a:solidFill>
+                <a:schemeClr val="dk2"/>
+              </a:solidFill>
+              <a:latin typeface="+mn-lt"/>
+              <a:ea typeface="+mn-ea"/>
+              <a:cs typeface="+mn-cs"/>
+            </a:endParaRPr>
           </a:p>
         </p:txBody>
       </p:sp>
@@ -4768,6 +4197,14 @@
                   </a:rPr>
                   <a:t>1</a:t>
                 </a:r>
+                <a:endParaRPr lang="en-US" sz="2400" b="1" dirty="0">
+                  <a:solidFill>
+                    <a:srgbClr val="FFFFFF"/>
+                  </a:solidFill>
+                  <a:latin typeface="+mn-lt"/>
+                  <a:ea typeface="+mn-ea"/>
+                  <a:cs typeface="+mn-cs"/>
+                </a:endParaRPr>
               </a:p>
             </p:txBody>
           </p:sp>
@@ -4834,6 +4271,14 @@
                   </a:rPr>
                   <a:t>准备结构</a:t>
                 </a:r>
+                <a:endParaRPr lang="zh-CN" sz="2400" b="1" dirty="0">
+                  <a:solidFill>
+                    <a:schemeClr val="accent1"/>
+                  </a:solidFill>
+                  <a:latin typeface="+mn-lt"/>
+                  <a:ea typeface="+mn-ea"/>
+                  <a:cs typeface="+mn-cs"/>
+                </a:endParaRPr>
               </a:p>
             </p:txBody>
           </p:sp>
@@ -4874,6 +4319,14 @@
                   </a:rPr>
                   <a:t>Caption</a:t>
                 </a:r>
+                <a:endParaRPr lang="en-US" sz="1800" dirty="0">
+                  <a:solidFill>
+                    <a:schemeClr val="dk2"/>
+                  </a:solidFill>
+                  <a:latin typeface="+mn-lt"/>
+                  <a:ea typeface="+mn-ea"/>
+                  <a:cs typeface="+mn-cs"/>
+                </a:endParaRPr>
               </a:p>
             </p:txBody>
           </p:sp>
@@ -4914,6 +4367,14 @@
                   </a:rPr>
                   <a:t>Template</a:t>
                 </a:r>
+                <a:endParaRPr lang="en-US" sz="1800" dirty="0">
+                  <a:solidFill>
+                    <a:schemeClr val="dk2"/>
+                  </a:solidFill>
+                  <a:latin typeface="+mn-lt"/>
+                  <a:ea typeface="+mn-ea"/>
+                  <a:cs typeface="+mn-cs"/>
+                </a:endParaRPr>
               </a:p>
             </p:txBody>
           </p:sp>
@@ -4954,6 +4415,14 @@
                   </a:rPr>
                   <a:t>Viewport</a:t>
                 </a:r>
+                <a:endParaRPr lang="en-US" sz="1800" dirty="0">
+                  <a:solidFill>
+                    <a:schemeClr val="dk2"/>
+                  </a:solidFill>
+                  <a:latin typeface="+mn-lt"/>
+                  <a:ea typeface="+mn-ea"/>
+                  <a:cs typeface="+mn-cs"/>
+                </a:endParaRPr>
               </a:p>
             </p:txBody>
           </p:sp>
@@ -4994,6 +4463,14 @@
                   </a:rPr>
                   <a:t>Item</a:t>
                 </a:r>
+                <a:endParaRPr lang="en-US" sz="1800" dirty="0">
+                  <a:solidFill>
+                    <a:schemeClr val="dk2"/>
+                  </a:solidFill>
+                  <a:latin typeface="+mn-lt"/>
+                  <a:ea typeface="+mn-ea"/>
+                  <a:cs typeface="+mn-cs"/>
+                </a:endParaRPr>
               </a:p>
             </p:txBody>
           </p:sp>
@@ -5071,6 +4548,14 @@
                   </a:rPr>
                   <a:t>2</a:t>
                 </a:r>
+                <a:endParaRPr lang="en-US" sz="2400" b="1" dirty="0">
+                  <a:solidFill>
+                    <a:srgbClr val="FFFFFF"/>
+                  </a:solidFill>
+                  <a:latin typeface="+mn-lt"/>
+                  <a:ea typeface="+mn-ea"/>
+                  <a:cs typeface="+mn-cs"/>
+                </a:endParaRPr>
               </a:p>
             </p:txBody>
           </p:sp>
@@ -5137,6 +4622,14 @@
                   </a:rPr>
                   <a:t>添加选项</a:t>
                 </a:r>
+                <a:endParaRPr lang="zh-CN" sz="2400" b="1" dirty="0">
+                  <a:solidFill>
+                    <a:srgbClr val="2F8F6A"/>
+                  </a:solidFill>
+                  <a:latin typeface="+mn-lt"/>
+                  <a:ea typeface="+mn-ea"/>
+                  <a:cs typeface="+mn-cs"/>
+                </a:endParaRPr>
               </a:p>
             </p:txBody>
           </p:sp>
@@ -5177,6 +4670,14 @@
                   </a:rPr>
                   <a:t>低</a:t>
                 </a:r>
+                <a:endParaRPr lang="zh-CN" sz="1800" dirty="0">
+                  <a:solidFill>
+                    <a:schemeClr val="dk2"/>
+                  </a:solidFill>
+                  <a:latin typeface="+mn-lt"/>
+                  <a:ea typeface="+mn-ea"/>
+                  <a:cs typeface="+mn-cs"/>
+                </a:endParaRPr>
               </a:p>
             </p:txBody>
           </p:sp>
@@ -5217,6 +4718,14 @@
                   </a:rPr>
                   <a:t>中</a:t>
                 </a:r>
+                <a:endParaRPr lang="zh-CN" sz="1800" dirty="0">
+                  <a:solidFill>
+                    <a:schemeClr val="dk2"/>
+                  </a:solidFill>
+                  <a:latin typeface="+mn-lt"/>
+                  <a:ea typeface="+mn-ea"/>
+                  <a:cs typeface="+mn-cs"/>
+                </a:endParaRPr>
               </a:p>
             </p:txBody>
           </p:sp>
@@ -5257,6 +4766,14 @@
                   </a:rPr>
                   <a:t>高</a:t>
                 </a:r>
+                <a:endParaRPr lang="zh-CN" sz="1800" dirty="0">
+                  <a:solidFill>
+                    <a:schemeClr val="dk2"/>
+                  </a:solidFill>
+                  <a:latin typeface="+mn-lt"/>
+                  <a:ea typeface="+mn-ea"/>
+                  <a:cs typeface="+mn-cs"/>
+                </a:endParaRPr>
               </a:p>
             </p:txBody>
           </p:sp>
@@ -5334,6 +4851,14 @@
                   </a:rPr>
                   <a:t>3</a:t>
                 </a:r>
+                <a:endParaRPr lang="en-US" sz="2400" b="1" dirty="0">
+                  <a:solidFill>
+                    <a:srgbClr val="FFFFFF"/>
+                  </a:solidFill>
+                  <a:latin typeface="+mn-lt"/>
+                  <a:ea typeface="+mn-ea"/>
+                  <a:cs typeface="+mn-cs"/>
+                </a:endParaRPr>
               </a:p>
             </p:txBody>
           </p:sp>
@@ -5400,6 +4925,14 @@
                   </a:rPr>
                   <a:t>恢复初值</a:t>
                 </a:r>
+                <a:endParaRPr lang="zh-CN" sz="2400" b="1" dirty="0">
+                  <a:solidFill>
+                    <a:srgbClr val="8C5A00"/>
+                  </a:solidFill>
+                  <a:latin typeface="+mn-lt"/>
+                  <a:ea typeface="+mn-ea"/>
+                  <a:cs typeface="+mn-cs"/>
+                </a:endParaRPr>
               </a:p>
             </p:txBody>
           </p:sp>
@@ -5434,12 +4967,20 @@
                     <a:solidFill>
                       <a:schemeClr val="dk1"/>
                     </a:solidFill>
-                    <a:latin typeface="Consolas"/>
-                    <a:ea typeface="Consolas"/>
-                    <a:cs typeface="Consolas"/>
+                    <a:latin typeface="Consolas" panose="020B0609020204030204"/>
+                    <a:ea typeface="Consolas" panose="020B0609020204030204"/>
+                    <a:cs typeface="Consolas" panose="020B0609020204030204"/>
                   </a:rPr>
                   <a:t>SetValue</a:t>
                 </a:r>
+                <a:endParaRPr lang="en-US" sz="1800" dirty="0">
+                  <a:solidFill>
+                    <a:schemeClr val="dk1"/>
+                  </a:solidFill>
+                  <a:latin typeface="Consolas" panose="020B0609020204030204"/>
+                  <a:ea typeface="Consolas" panose="020B0609020204030204"/>
+                  <a:cs typeface="Consolas" panose="020B0609020204030204"/>
+                </a:endParaRPr>
               </a:p>
             </p:txBody>
           </p:sp>
@@ -5474,12 +5015,20 @@
                     <a:solidFill>
                       <a:schemeClr val="dk1"/>
                     </a:solidFill>
-                    <a:latin typeface="Consolas"/>
-                    <a:ea typeface="Consolas"/>
-                    <a:cs typeface="Consolas"/>
+                    <a:latin typeface="Consolas" panose="020B0609020204030204"/>
+                    <a:ea typeface="Consolas" panose="020B0609020204030204"/>
+                    <a:cs typeface="Consolas" panose="020B0609020204030204"/>
                   </a:rPr>
                   <a:t>WithoutNotify</a:t>
                 </a:r>
+                <a:endParaRPr lang="en-US" sz="1800" dirty="0">
+                  <a:solidFill>
+                    <a:schemeClr val="dk1"/>
+                  </a:solidFill>
+                  <a:latin typeface="Consolas" panose="020B0609020204030204"/>
+                  <a:ea typeface="Consolas" panose="020B0609020204030204"/>
+                  <a:cs typeface="Consolas" panose="020B0609020204030204"/>
+                </a:endParaRPr>
               </a:p>
             </p:txBody>
           </p:sp>
@@ -5520,6 +5069,14 @@
                   </a:rPr>
                   <a:t>刷新显示</a:t>
                 </a:r>
+                <a:endParaRPr lang="zh-CN" sz="1800" dirty="0">
+                  <a:solidFill>
+                    <a:schemeClr val="dk2"/>
+                  </a:solidFill>
+                  <a:latin typeface="+mn-lt"/>
+                  <a:ea typeface="+mn-ea"/>
+                  <a:cs typeface="+mn-cs"/>
+                </a:endParaRPr>
               </a:p>
             </p:txBody>
           </p:sp>
@@ -5597,6 +5154,14 @@
                   </a:rPr>
                   <a:t>4</a:t>
                 </a:r>
+                <a:endParaRPr lang="en-US" sz="2400" b="1" dirty="0">
+                  <a:solidFill>
+                    <a:srgbClr val="FFFFFF"/>
+                  </a:solidFill>
+                  <a:latin typeface="+mn-lt"/>
+                  <a:ea typeface="+mn-ea"/>
+                  <a:cs typeface="+mn-cs"/>
+                </a:endParaRPr>
               </a:p>
             </p:txBody>
           </p:sp>
@@ -5663,6 +5228,14 @@
                   </a:rPr>
                   <a:t>监听变化</a:t>
                 </a:r>
+                <a:endParaRPr lang="zh-CN" sz="2400" b="1" dirty="0">
+                  <a:solidFill>
+                    <a:srgbClr val="D85C45"/>
+                  </a:solidFill>
+                  <a:latin typeface="+mn-lt"/>
+                  <a:ea typeface="+mn-ea"/>
+                  <a:cs typeface="+mn-cs"/>
+                </a:endParaRPr>
               </a:p>
             </p:txBody>
           </p:sp>
@@ -5697,12 +5270,20 @@
                     <a:solidFill>
                       <a:schemeClr val="dk1"/>
                     </a:solidFill>
-                    <a:latin typeface="Consolas"/>
-                    <a:ea typeface="Consolas"/>
-                    <a:cs typeface="Consolas"/>
+                    <a:latin typeface="Consolas" panose="020B0609020204030204"/>
+                    <a:ea typeface="Consolas" panose="020B0609020204030204"/>
+                    <a:cs typeface="Consolas" panose="020B0609020204030204"/>
                   </a:rPr>
                   <a:t>onValue</a:t>
                 </a:r>
+                <a:endParaRPr lang="en-US" sz="1800" dirty="0">
+                  <a:solidFill>
+                    <a:schemeClr val="dk1"/>
+                  </a:solidFill>
+                  <a:latin typeface="Consolas" panose="020B0609020204030204"/>
+                  <a:ea typeface="Consolas" panose="020B0609020204030204"/>
+                  <a:cs typeface="Consolas" panose="020B0609020204030204"/>
+                </a:endParaRPr>
               </a:p>
             </p:txBody>
           </p:sp>
@@ -5737,12 +5318,20 @@
                     <a:solidFill>
                       <a:schemeClr val="dk1"/>
                     </a:solidFill>
-                    <a:latin typeface="Consolas"/>
-                    <a:ea typeface="Consolas"/>
-                    <a:cs typeface="Consolas"/>
+                    <a:latin typeface="Consolas" panose="020B0609020204030204"/>
+                    <a:ea typeface="Consolas" panose="020B0609020204030204"/>
+                    <a:cs typeface="Consolas" panose="020B0609020204030204"/>
                   </a:rPr>
                   <a:t>Changed</a:t>
                 </a:r>
+                <a:endParaRPr lang="en-US" sz="1800" dirty="0">
+                  <a:solidFill>
+                    <a:schemeClr val="dk1"/>
+                  </a:solidFill>
+                  <a:latin typeface="Consolas" panose="020B0609020204030204"/>
+                  <a:ea typeface="Consolas" panose="020B0609020204030204"/>
+                  <a:cs typeface="Consolas" panose="020B0609020204030204"/>
+                </a:endParaRPr>
               </a:p>
             </p:txBody>
           </p:sp>
@@ -5783,6 +5372,14 @@
                   </a:rPr>
                   <a:t>Add / Remove</a:t>
                 </a:r>
+                <a:endParaRPr lang="en-US" sz="1800" dirty="0">
+                  <a:solidFill>
+                    <a:schemeClr val="dk2"/>
+                  </a:solidFill>
+                  <a:latin typeface="+mn-lt"/>
+                  <a:ea typeface="+mn-ea"/>
+                  <a:cs typeface="+mn-cs"/>
+                </a:endParaRPr>
               </a:p>
             </p:txBody>
           </p:sp>
@@ -5860,6 +5457,14 @@
                   </a:rPr>
                   <a:t>5</a:t>
                 </a:r>
+                <a:endParaRPr lang="en-US" sz="2400" b="1" dirty="0">
+                  <a:solidFill>
+                    <a:srgbClr val="FFFFFF"/>
+                  </a:solidFill>
+                  <a:latin typeface="+mn-lt"/>
+                  <a:ea typeface="+mn-ea"/>
+                  <a:cs typeface="+mn-cs"/>
+                </a:endParaRPr>
               </a:p>
             </p:txBody>
           </p:sp>
@@ -5926,6 +5531,14 @@
                   </a:rPr>
                   <a:t>应用映射</a:t>
                 </a:r>
+                <a:endParaRPr lang="zh-CN" sz="2400" b="1" dirty="0">
+                  <a:solidFill>
+                    <a:schemeClr val="dk1"/>
+                  </a:solidFill>
+                  <a:latin typeface="+mn-lt"/>
+                  <a:ea typeface="+mn-ea"/>
+                  <a:cs typeface="+mn-cs"/>
+                </a:endParaRPr>
               </a:p>
             </p:txBody>
           </p:sp>
@@ -5966,6 +5579,14 @@
                   </a:rPr>
                   <a:t>显示顺序</a:t>
                 </a:r>
+                <a:endParaRPr lang="zh-CN" sz="1800" dirty="0">
+                  <a:solidFill>
+                    <a:schemeClr val="dk2"/>
+                  </a:solidFill>
+                  <a:latin typeface="+mn-lt"/>
+                  <a:ea typeface="+mn-ea"/>
+                  <a:cs typeface="+mn-cs"/>
+                </a:endParaRPr>
               </a:p>
             </p:txBody>
           </p:sp>
@@ -6006,6 +5627,14 @@
                   </a:rPr>
                   <a:t>≠</a:t>
                 </a:r>
+                <a:endParaRPr lang="en-US" sz="1800" dirty="0">
+                  <a:solidFill>
+                    <a:schemeClr val="dk2"/>
+                  </a:solidFill>
+                  <a:latin typeface="+mn-lt"/>
+                  <a:ea typeface="+mn-ea"/>
+                  <a:cs typeface="+mn-cs"/>
+                </a:endParaRPr>
               </a:p>
             </p:txBody>
           </p:sp>
@@ -6046,6 +5675,14 @@
                   </a:rPr>
                   <a:t>内部等级</a:t>
                 </a:r>
+                <a:endParaRPr lang="zh-CN" sz="1800" dirty="0">
+                  <a:solidFill>
+                    <a:schemeClr val="dk2"/>
+                  </a:solidFill>
+                  <a:latin typeface="+mn-lt"/>
+                  <a:ea typeface="+mn-ea"/>
+                  <a:cs typeface="+mn-cs"/>
+                </a:endParaRPr>
               </a:p>
             </p:txBody>
           </p:sp>
@@ -6112,6 +5749,14 @@
               </a:rPr>
               <a:t>不要随意破坏 Template、Caption Text、Item Text 的引用关系</a:t>
             </a:r>
+            <a:endParaRPr lang="zh-CN" sz="1800" b="1" dirty="0">
+              <a:solidFill>
+                <a:schemeClr val="accent1"/>
+              </a:solidFill>
+              <a:latin typeface="+mn-lt"/>
+              <a:ea typeface="+mn-ea"/>
+              <a:cs typeface="+mn-cs"/>
+            </a:endParaRPr>
           </a:p>
         </p:txBody>
       </p:sp>
@@ -6167,46 +5812,6 @@
         </p:sp>
         <p:sp>
           <p:nvSpPr>
-            <p:cNvPr id="50" name="TextBox 50"/>
-            <p:cNvSpPr txBox="1"/>
-            <p:nvPr/>
-          </p:nvSpPr>
-          <p:spPr>
-            <a:xfrm>
-              <a:off x="564642" y="6521768"/>
-              <a:ext cx="3009181" cy="264033"/>
-            </a:xfrm>
-            <a:prstGeom prst="rect">
-              <a:avLst/>
-            </a:prstGeom>
-            <a:noFill/>
-            <a:ln>
-              <a:noFill/>
-            </a:ln>
-          </p:spPr>
-          <p:txBody>
-            <a:bodyPr wrap="none" lIns="0" tIns="0" rIns="0" bIns="0" anchor="t" anchorCtr="0">
-              <a:spAutoFit/>
-            </a:bodyPr>
-            <a:lstStyle/>
-            <a:p>
-              <a:pPr algn="l"/>
-              <a:r>
-                <a:rPr lang="zh-CN" sz="1350" dirty="0">
-                  <a:solidFill>
-                    <a:schemeClr val="accent5"/>
-                  </a:solidFill>
-                  <a:latin typeface="+mn-lt"/>
-                  <a:ea typeface="+mn-ea"/>
-                  <a:cs typeface="+mn-cs"/>
-                </a:rPr>
-                <a:t>TMP_Dropdown · 初始化与索引映射</a:t>
-              </a:r>
-            </a:p>
-          </p:txBody>
-        </p:sp>
-        <p:sp>
-          <p:nvSpPr>
             <p:cNvPr id="51" name="TextBox 51"/>
             <p:cNvSpPr txBox="1"/>
             <p:nvPr/>
@@ -6240,8 +5845,15 @@
                   <a:ea typeface="+mn-ea"/>
                   <a:cs typeface="+mn-cs"/>
                 </a:rPr>
-                <a:t>11</a:t>
               </a:fld>
+              <a:endParaRPr lang="en-US" sz="1350" dirty="0">
+                <a:solidFill>
+                  <a:schemeClr val="accent5"/>
+                </a:solidFill>
+                <a:latin typeface="+mn-lt"/>
+                <a:ea typeface="+mn-ea"/>
+                <a:cs typeface="+mn-cs"/>
+              </a:endParaRPr>
             </a:p>
           </p:txBody>
         </p:sp>
@@ -6251,1979 +5863,23 @@
   <p:clrMapOvr>
     <a:masterClrMapping/>
   </p:clrMapOvr>
-  <p:transition p14:dur="400">
-    <p:fade/>
-  </p:transition>
+  <mc:AlternateContent xmlns:mc="http://schemas.openxmlformats.org/markup-compatibility/2006">
+    <mc:Choice xmlns:p14="http://schemas.microsoft.com/office/powerpoint/2010/main" Requires="p14">
+      <p:transition p14:dur="400">
+        <p:fade/>
+      </p:transition>
+    </mc:Choice>
+    <mc:Fallback>
+      <p:transition>
+        <p:fade/>
+      </p:transition>
+    </mc:Fallback>
+  </mc:AlternateContent>
 </p:sld>
 </file>
 
 <file path=ppt/slides/slide12.xml><?xml version="1.0" encoding="utf-8"?>
-<p:sld xmlns:a="http://schemas.openxmlformats.org/drawingml/2006/main" xmlns:p="http://schemas.openxmlformats.org/presentationml/2006/main" xmlns:p14="http://schemas.microsoft.com/office/powerpoint/2010/main">
-  <p:cSld>
-    <p:bg>
-      <p:bgPr>
-        <a:solidFill>
-          <a:schemeClr val="lt1"/>
-        </a:solidFill>
-        <a:effectLst/>
-      </p:bgPr>
-    </p:bg>
-    <p:spTree>
-      <p:nvGrpSpPr>
-        <p:cNvPr id="1" name=""/>
-        <p:cNvGrpSpPr/>
-        <p:nvPr/>
-      </p:nvGrpSpPr>
-      <p:grpSpPr>
-        <a:xfrm>
-          <a:off x="0" y="0"/>
-          <a:ext cx="0" cy="0"/>
-          <a:chOff x="0" y="0"/>
-          <a:chExt cx="0" cy="0"/>
-        </a:xfrm>
-      </p:grpSpPr>
-      <p:sp>
-        <p:nvSpPr>
-          <p:cNvPr id="2" name="TextBox 2"/>
-          <p:cNvSpPr txBox="1"/>
-          <p:nvPr/>
-        </p:nvSpPr>
-        <p:spPr>
-          <a:xfrm>
-            <a:off x="552450" y="270510"/>
-            <a:ext cx="8192719" cy="819150"/>
-          </a:xfrm>
-          <a:prstGeom prst="rect">
-            <a:avLst/>
-          </a:prstGeom>
-          <a:noFill/>
-          <a:ln>
-            <a:noFill/>
-          </a:ln>
-        </p:spPr>
-        <p:txBody>
-          <a:bodyPr wrap="none" lIns="0" tIns="0" rIns="0" bIns="0" anchor="t" anchorCtr="0">
-            <a:spAutoFit/>
-          </a:bodyPr>
-          <a:lstStyle/>
-          <a:p>
-            <a:pPr algn="l"/>
-            <a:r>
-              <a:rPr lang="zh-CN" sz="4200" b="1" dirty="0">
-                <a:solidFill>
-                  <a:schemeClr val="dk1"/>
-                </a:solidFill>
-                <a:latin typeface="+mj-lt"/>
-                <a:ea typeface="+mj-ea"/>
-                <a:cs typeface="+mj-cs"/>
-              </a:rPr>
-              <a:t>综合实践：组装一个设置面板</a:t>
-            </a:r>
-          </a:p>
-        </p:txBody>
-      </p:sp>
-      <p:sp>
-        <p:nvSpPr>
-          <p:cNvPr id="3" name="TextBox 3"/>
-          <p:cNvSpPr txBox="1"/>
-          <p:nvPr/>
-        </p:nvSpPr>
-        <p:spPr>
-          <a:xfrm>
-            <a:off x="581406" y="986790"/>
-            <a:ext cx="4379976" cy="352044"/>
-          </a:xfrm>
-          <a:prstGeom prst="rect">
-            <a:avLst/>
-          </a:prstGeom>
-          <a:noFill/>
-          <a:ln>
-            <a:noFill/>
-          </a:ln>
-        </p:spPr>
-        <p:txBody>
-          <a:bodyPr wrap="none" lIns="0" tIns="0" rIns="0" bIns="0" anchor="t" anchorCtr="0">
-            <a:spAutoFit/>
-          </a:bodyPr>
-          <a:lstStyle/>
-          <a:p>
-            <a:pPr algn="l"/>
-            <a:r>
-              <a:rPr lang="zh-CN" sz="1800" dirty="0">
-                <a:solidFill>
-                  <a:schemeClr val="dk2"/>
-                </a:solidFill>
-                <a:latin typeface="+mn-lt"/>
-                <a:ea typeface="+mn-ea"/>
-                <a:cs typeface="+mn-cs"/>
-              </a:rPr>
-              <a:t>每个控件都有明确的数据来源与输出行为</a:t>
-            </a:r>
-          </a:p>
-        </p:txBody>
-      </p:sp>
-      <p:grpSp>
-        <p:nvGrpSpPr>
-          <p:cNvPr id="30" name="Group 30"/>
-          <p:cNvGrpSpPr/>
-          <p:nvPr/>
-        </p:nvGrpSpPr>
-        <p:grpSpPr>
-          <a:xfrm>
-            <a:off x="571500" y="1485900"/>
-            <a:ext cx="4953000" cy="4286250"/>
-            <a:chOff x="571500" y="1485900"/>
-            <a:chExt cx="4953000" cy="4286250"/>
-          </a:xfrm>
-        </p:grpSpPr>
-        <p:sp>
-          <p:nvSpPr>
-            <p:cNvPr id="4" name="Rectangle 4"/>
-            <p:cNvSpPr/>
-            <p:nvPr/>
-          </p:nvSpPr>
-          <p:spPr>
-            <a:xfrm>
-              <a:off x="571500" y="1485900"/>
-              <a:ext cx="4953000" cy="4286250"/>
-            </a:xfrm>
-            <a:prstGeom prst="roundRect">
-              <a:avLst>
-                <a:gd name="adj" fmla="val 6222"/>
-              </a:avLst>
-            </a:prstGeom>
-            <a:solidFill>
-              <a:srgbClr val="FFFFFF"/>
-            </a:solidFill>
-            <a:ln w="28575">
-              <a:solidFill>
-                <a:schemeClr val="accent4"/>
-              </a:solidFill>
-            </a:ln>
-          </p:spPr>
-        </p:sp>
-        <p:sp>
-          <p:nvSpPr>
-            <p:cNvPr id="5" name="TextBox 5"/>
-            <p:cNvSpPr txBox="1"/>
-            <p:nvPr/>
-          </p:nvSpPr>
-          <p:spPr>
-            <a:xfrm>
-              <a:off x="824484" y="1708785"/>
-              <a:ext cx="1554023" cy="528066"/>
-            </a:xfrm>
-            <a:prstGeom prst="rect">
-              <a:avLst/>
-            </a:prstGeom>
-            <a:noFill/>
-            <a:ln>
-              <a:noFill/>
-            </a:ln>
-          </p:spPr>
-          <p:txBody>
-            <a:bodyPr wrap="none" lIns="0" tIns="0" rIns="0" bIns="0" anchor="t" anchorCtr="0">
-              <a:spAutoFit/>
-            </a:bodyPr>
-            <a:lstStyle/>
-            <a:p>
-              <a:pPr algn="l"/>
-              <a:r>
-                <a:rPr lang="zh-CN" sz="2700" b="1" dirty="0">
-                  <a:solidFill>
-                    <a:schemeClr val="accent1"/>
-                  </a:solidFill>
-                  <a:latin typeface="+mn-lt"/>
-                  <a:ea typeface="+mn-ea"/>
-                  <a:cs typeface="+mn-cs"/>
-                </a:rPr>
-                <a:t>目标层级</a:t>
-              </a:r>
-            </a:p>
-          </p:txBody>
-        </p:sp>
-        <p:grpSp>
-          <p:nvGrpSpPr>
-            <p:cNvPr id="12" name="Group 12"/>
-            <p:cNvGrpSpPr/>
-            <p:nvPr/>
-          </p:nvGrpSpPr>
-          <p:grpSpPr>
-            <a:xfrm>
-              <a:off x="1466850" y="2743200"/>
-              <a:ext cx="3171825" cy="933450"/>
-              <a:chOff x="1466850" y="2743200"/>
-              <a:chExt cx="3171825" cy="933450"/>
-            </a:xfrm>
-          </p:grpSpPr>
-          <p:sp>
-            <p:nvSpPr>
-              <p:cNvPr id="6" name="Line 6"/>
-              <p:cNvSpPr/>
-              <p:nvPr/>
-            </p:nvSpPr>
-            <p:spPr>
-              <a:xfrm>
-                <a:off x="3048000" y="2743200"/>
-                <a:ext cx="9525" cy="495300"/>
-              </a:xfrm>
-              <a:custGeom>
-                <a:avLst/>
-                <a:gdLst/>
-                <a:ahLst/>
-                <a:cxnLst/>
-                <a:rect l="l" t="t" r="r" b="b"/>
-                <a:pathLst>
-                  <a:path w="9525" h="495300">
-                    <a:moveTo>
-                      <a:pt x="0" y="0"/>
-                    </a:moveTo>
-                    <a:lnTo>
-                      <a:pt x="0" y="495300"/>
-                    </a:lnTo>
-                  </a:path>
-                </a:pathLst>
-              </a:custGeom>
-              <a:noFill/>
-              <a:ln w="38100" cap="rnd">
-                <a:solidFill>
-                  <a:schemeClr val="dk2"/>
-                </a:solidFill>
-              </a:ln>
-            </p:spPr>
-          </p:sp>
-          <p:sp>
-            <p:nvSpPr>
-              <p:cNvPr id="7" name="Line 7"/>
-              <p:cNvSpPr/>
-              <p:nvPr/>
-            </p:nvSpPr>
-            <p:spPr>
-              <a:xfrm>
-                <a:off x="1466850" y="3238500"/>
-                <a:ext cx="3162300" cy="9525"/>
-              </a:xfrm>
-              <a:custGeom>
-                <a:avLst/>
-                <a:gdLst/>
-                <a:ahLst/>
-                <a:cxnLst/>
-                <a:rect l="l" t="t" r="r" b="b"/>
-                <a:pathLst>
-                  <a:path w="3162300" h="9525">
-                    <a:moveTo>
-                      <a:pt x="0" y="0"/>
-                    </a:moveTo>
-                    <a:lnTo>
-                      <a:pt x="3162300" y="0"/>
-                    </a:lnTo>
-                  </a:path>
-                </a:pathLst>
-              </a:custGeom>
-              <a:noFill/>
-              <a:ln w="38100" cap="rnd">
-                <a:solidFill>
-                  <a:schemeClr val="dk2"/>
-                </a:solidFill>
-              </a:ln>
-            </p:spPr>
-          </p:sp>
-          <p:sp>
-            <p:nvSpPr>
-              <p:cNvPr id="8" name="Line 8"/>
-              <p:cNvSpPr/>
-              <p:nvPr/>
-            </p:nvSpPr>
-            <p:spPr>
-              <a:xfrm>
-                <a:off x="1466850" y="3238500"/>
-                <a:ext cx="9525" cy="438150"/>
-              </a:xfrm>
-              <a:custGeom>
-                <a:avLst/>
-                <a:gdLst/>
-                <a:ahLst/>
-                <a:cxnLst/>
-                <a:rect l="l" t="t" r="r" b="b"/>
-                <a:pathLst>
-                  <a:path w="9525" h="438150">
-                    <a:moveTo>
-                      <a:pt x="0" y="0"/>
-                    </a:moveTo>
-                    <a:lnTo>
-                      <a:pt x="0" y="438150"/>
-                    </a:lnTo>
-                  </a:path>
-                </a:pathLst>
-              </a:custGeom>
-              <a:noFill/>
-              <a:ln w="38100" cap="rnd">
-                <a:solidFill>
-                  <a:schemeClr val="dk2"/>
-                </a:solidFill>
-              </a:ln>
-            </p:spPr>
-          </p:sp>
-          <p:sp>
-            <p:nvSpPr>
-              <p:cNvPr id="9" name="Line 9"/>
-              <p:cNvSpPr/>
-              <p:nvPr/>
-            </p:nvSpPr>
-            <p:spPr>
-              <a:xfrm>
-                <a:off x="2524125" y="3238500"/>
-                <a:ext cx="9525" cy="438150"/>
-              </a:xfrm>
-              <a:custGeom>
-                <a:avLst/>
-                <a:gdLst/>
-                <a:ahLst/>
-                <a:cxnLst/>
-                <a:rect l="l" t="t" r="r" b="b"/>
-                <a:pathLst>
-                  <a:path w="9525" h="438150">
-                    <a:moveTo>
-                      <a:pt x="0" y="0"/>
-                    </a:moveTo>
-                    <a:lnTo>
-                      <a:pt x="0" y="438150"/>
-                    </a:lnTo>
-                  </a:path>
-                </a:pathLst>
-              </a:custGeom>
-              <a:noFill/>
-              <a:ln w="38100" cap="rnd">
-                <a:solidFill>
-                  <a:schemeClr val="dk2"/>
-                </a:solidFill>
-              </a:ln>
-            </p:spPr>
-          </p:sp>
-          <p:sp>
-            <p:nvSpPr>
-              <p:cNvPr id="10" name="Line 10"/>
-              <p:cNvSpPr/>
-              <p:nvPr/>
-            </p:nvSpPr>
-            <p:spPr>
-              <a:xfrm>
-                <a:off x="3581400" y="3238500"/>
-                <a:ext cx="9525" cy="438150"/>
-              </a:xfrm>
-              <a:custGeom>
-                <a:avLst/>
-                <a:gdLst/>
-                <a:ahLst/>
-                <a:cxnLst/>
-                <a:rect l="l" t="t" r="r" b="b"/>
-                <a:pathLst>
-                  <a:path w="9525" h="438150">
-                    <a:moveTo>
-                      <a:pt x="0" y="0"/>
-                    </a:moveTo>
-                    <a:lnTo>
-                      <a:pt x="0" y="438150"/>
-                    </a:lnTo>
-                  </a:path>
-                </a:pathLst>
-              </a:custGeom>
-              <a:noFill/>
-              <a:ln w="38100" cap="rnd">
-                <a:solidFill>
-                  <a:schemeClr val="dk2"/>
-                </a:solidFill>
-              </a:ln>
-            </p:spPr>
-          </p:sp>
-          <p:sp>
-            <p:nvSpPr>
-              <p:cNvPr id="11" name="Line 11"/>
-              <p:cNvSpPr/>
-              <p:nvPr/>
-            </p:nvSpPr>
-            <p:spPr>
-              <a:xfrm>
-                <a:off x="4629150" y="3238500"/>
-                <a:ext cx="9525" cy="438150"/>
-              </a:xfrm>
-              <a:custGeom>
-                <a:avLst/>
-                <a:gdLst/>
-                <a:ahLst/>
-                <a:cxnLst/>
-                <a:rect l="l" t="t" r="r" b="b"/>
-                <a:pathLst>
-                  <a:path w="9525" h="438150">
-                    <a:moveTo>
-                      <a:pt x="0" y="0"/>
-                    </a:moveTo>
-                    <a:lnTo>
-                      <a:pt x="0" y="438150"/>
-                    </a:lnTo>
-                  </a:path>
-                </a:pathLst>
-              </a:custGeom>
-              <a:noFill/>
-              <a:ln w="38100" cap="rnd">
-                <a:solidFill>
-                  <a:schemeClr val="dk2"/>
-                </a:solidFill>
-              </a:ln>
-            </p:spPr>
-          </p:sp>
-        </p:grpSp>
-        <p:sp>
-          <p:nvSpPr>
-            <p:cNvPr id="13" name="Rectangle 13"/>
-            <p:cNvSpPr/>
-            <p:nvPr/>
-          </p:nvSpPr>
-          <p:spPr>
-            <a:xfrm>
-              <a:off x="1714500" y="2209800"/>
-              <a:ext cx="2667000" cy="552450"/>
-            </a:xfrm>
-            <a:prstGeom prst="roundRect">
-              <a:avLst>
-                <a:gd name="adj" fmla="val 27586"/>
-              </a:avLst>
-            </a:prstGeom>
-            <a:solidFill>
-              <a:schemeClr val="accent1"/>
-            </a:solidFill>
-            <a:ln>
-              <a:noFill/>
-            </a:ln>
-          </p:spPr>
-        </p:sp>
-        <p:sp>
-          <p:nvSpPr>
-            <p:cNvPr id="14" name="TextBox 14"/>
-            <p:cNvSpPr txBox="1"/>
-            <p:nvPr/>
-          </p:nvSpPr>
-          <p:spPr>
-            <a:xfrm>
-              <a:off x="1658383" y="2386965"/>
-              <a:ext cx="2779233" cy="352044"/>
-            </a:xfrm>
-            <a:prstGeom prst="rect">
-              <a:avLst/>
-            </a:prstGeom>
-            <a:noFill/>
-            <a:ln>
-              <a:noFill/>
-            </a:ln>
-          </p:spPr>
-          <p:txBody>
-            <a:bodyPr wrap="none" lIns="0" tIns="0" rIns="0" bIns="0" anchor="t" anchorCtr="0">
-              <a:spAutoFit/>
-            </a:bodyPr>
-            <a:lstStyle/>
-            <a:p>
-              <a:pPr algn="ctr"/>
-              <a:r>
-                <a:rPr lang="en-US" sz="1800" b="1" dirty="0">
-                  <a:solidFill>
-                    <a:srgbClr val="FFFFFF"/>
-                  </a:solidFill>
-                  <a:latin typeface="+mn-lt"/>
-                  <a:ea typeface="+mn-ea"/>
-                  <a:cs typeface="+mn-cs"/>
-                </a:rPr>
-                <a:t>SettingsPanel (Image)</a:t>
-              </a:r>
-            </a:p>
-          </p:txBody>
-        </p:sp>
-        <p:grpSp>
-          <p:nvGrpSpPr>
-            <p:cNvPr id="27" name="Group 27"/>
-            <p:cNvGrpSpPr/>
-            <p:nvPr/>
-          </p:nvGrpSpPr>
-          <p:grpSpPr>
-            <a:xfrm>
-              <a:off x="838200" y="3676650"/>
-              <a:ext cx="4429125" cy="895350"/>
-              <a:chOff x="838200" y="3676650"/>
-              <a:chExt cx="4429125" cy="895350"/>
-            </a:xfrm>
-          </p:grpSpPr>
-          <p:sp>
-            <p:nvSpPr>
-              <p:cNvPr id="15" name="Rectangle 15"/>
-              <p:cNvSpPr/>
-              <p:nvPr/>
-            </p:nvSpPr>
-            <p:spPr>
-              <a:xfrm>
-                <a:off x="838200" y="3676650"/>
-                <a:ext cx="1257300" cy="895350"/>
-              </a:xfrm>
-              <a:prstGeom prst="roundRect">
-                <a:avLst>
-                  <a:gd name="adj" fmla="val 17021"/>
-                </a:avLst>
-              </a:prstGeom>
-              <a:solidFill>
-                <a:srgbClr val="EAF0FA"/>
-              </a:solidFill>
-              <a:ln w="19050">
-                <a:solidFill>
-                  <a:schemeClr val="accent1"/>
-                </a:solidFill>
-              </a:ln>
-            </p:spPr>
-          </p:sp>
-          <p:sp>
-            <p:nvSpPr>
-              <p:cNvPr id="16" name="TextBox 16"/>
-              <p:cNvSpPr txBox="1"/>
-              <p:nvPr/>
-            </p:nvSpPr>
-            <p:spPr>
-              <a:xfrm>
-                <a:off x="993583" y="3863340"/>
-                <a:ext cx="946535" cy="352044"/>
-              </a:xfrm>
-              <a:prstGeom prst="rect">
-                <a:avLst/>
-              </a:prstGeom>
-              <a:noFill/>
-              <a:ln>
-                <a:noFill/>
-              </a:ln>
-            </p:spPr>
-            <p:txBody>
-              <a:bodyPr wrap="none" lIns="0" tIns="0" rIns="0" bIns="0" anchor="t" anchorCtr="0">
-                <a:spAutoFit/>
-              </a:bodyPr>
-              <a:lstStyle/>
-              <a:p>
-                <a:pPr algn="ctr"/>
-                <a:r>
-                  <a:rPr lang="en-US" sz="1800" dirty="0">
-                    <a:solidFill>
-                      <a:schemeClr val="accent1"/>
-                    </a:solidFill>
-                    <a:latin typeface="+mn-lt"/>
-                    <a:ea typeface="+mn-ea"/>
-                    <a:cs typeface="+mn-cs"/>
-                  </a:rPr>
-                  <a:t>Preview</a:t>
-                </a:r>
-              </a:p>
-            </p:txBody>
-          </p:sp>
-          <p:sp>
-            <p:nvSpPr>
-              <p:cNvPr id="17" name="TextBox 17"/>
-              <p:cNvSpPr txBox="1"/>
-              <p:nvPr/>
-            </p:nvSpPr>
-            <p:spPr>
-              <a:xfrm>
-                <a:off x="898636" y="4168140"/>
-                <a:ext cx="1136428" cy="352044"/>
-              </a:xfrm>
-              <a:prstGeom prst="rect">
-                <a:avLst/>
-              </a:prstGeom>
-              <a:noFill/>
-              <a:ln>
-                <a:noFill/>
-              </a:ln>
-            </p:spPr>
-            <p:txBody>
-              <a:bodyPr wrap="none" lIns="0" tIns="0" rIns="0" bIns="0" anchor="t" anchorCtr="0">
-                <a:spAutoFit/>
-              </a:bodyPr>
-              <a:lstStyle/>
-              <a:p>
-                <a:pPr algn="ctr"/>
-                <a:r>
-                  <a:rPr lang="en-US" sz="1800" dirty="0">
-                    <a:solidFill>
-                      <a:schemeClr val="dk2"/>
-                    </a:solidFill>
-                    <a:latin typeface="+mn-lt"/>
-                    <a:ea typeface="+mn-ea"/>
-                    <a:cs typeface="+mn-cs"/>
-                  </a:rPr>
-                  <a:t>RawImage</a:t>
-                </a:r>
-              </a:p>
-            </p:txBody>
-          </p:sp>
-          <p:sp>
-            <p:nvSpPr>
-              <p:cNvPr id="18" name="Rectangle 18"/>
-              <p:cNvSpPr/>
-              <p:nvPr/>
-            </p:nvSpPr>
-            <p:spPr>
-              <a:xfrm>
-                <a:off x="1895475" y="3676650"/>
-                <a:ext cx="1257300" cy="895350"/>
-              </a:xfrm>
-              <a:prstGeom prst="roundRect">
-                <a:avLst>
-                  <a:gd name="adj" fmla="val 17021"/>
-                </a:avLst>
-              </a:prstGeom>
-              <a:solidFill>
-                <a:srgbClr val="E8F5F0"/>
-              </a:solidFill>
-              <a:ln w="19050">
-                <a:solidFill>
-                  <a:schemeClr val="accent3"/>
-                </a:solidFill>
-              </a:ln>
-            </p:spPr>
-          </p:sp>
-          <p:sp>
-            <p:nvSpPr>
-              <p:cNvPr id="19" name="TextBox 19"/>
-              <p:cNvSpPr txBox="1"/>
-              <p:nvPr/>
-            </p:nvSpPr>
-            <p:spPr>
-              <a:xfrm>
-                <a:off x="2184151" y="3863340"/>
-                <a:ext cx="679948" cy="352044"/>
-              </a:xfrm>
-              <a:prstGeom prst="rect">
-                <a:avLst/>
-              </a:prstGeom>
-              <a:noFill/>
-              <a:ln>
-                <a:noFill/>
-              </a:ln>
-            </p:spPr>
-            <p:txBody>
-              <a:bodyPr wrap="none" lIns="0" tIns="0" rIns="0" bIns="0" anchor="t" anchorCtr="0">
-                <a:spAutoFit/>
-              </a:bodyPr>
-              <a:lstStyle/>
-              <a:p>
-                <a:pPr algn="ctr"/>
-                <a:r>
-                  <a:rPr lang="en-US" sz="1800" dirty="0">
-                    <a:solidFill>
-                      <a:srgbClr val="2F8F6A"/>
-                    </a:solidFill>
-                    <a:latin typeface="+mn-lt"/>
-                    <a:ea typeface="+mn-ea"/>
-                    <a:cs typeface="+mn-cs"/>
-                  </a:rPr>
-                  <a:t>Music</a:t>
-                </a:r>
-              </a:p>
-            </p:txBody>
-          </p:sp>
-          <p:sp>
-            <p:nvSpPr>
-              <p:cNvPr id="20" name="TextBox 20"/>
-              <p:cNvSpPr txBox="1"/>
-              <p:nvPr/>
-            </p:nvSpPr>
-            <p:spPr>
-              <a:xfrm>
-                <a:off x="2141963" y="4168140"/>
-                <a:ext cx="764324" cy="352044"/>
-              </a:xfrm>
-              <a:prstGeom prst="rect">
-                <a:avLst/>
-              </a:prstGeom>
-              <a:noFill/>
-              <a:ln>
-                <a:noFill/>
-              </a:ln>
-            </p:spPr>
-            <p:txBody>
-              <a:bodyPr wrap="none" lIns="0" tIns="0" rIns="0" bIns="0" anchor="t" anchorCtr="0">
-                <a:spAutoFit/>
-              </a:bodyPr>
-              <a:lstStyle/>
-              <a:p>
-                <a:pPr algn="ctr"/>
-                <a:r>
-                  <a:rPr lang="en-US" sz="1800" dirty="0">
-                    <a:solidFill>
-                      <a:schemeClr val="dk2"/>
-                    </a:solidFill>
-                    <a:latin typeface="+mn-lt"/>
-                    <a:ea typeface="+mn-ea"/>
-                    <a:cs typeface="+mn-cs"/>
-                  </a:rPr>
-                  <a:t>Toggle</a:t>
-                </a:r>
-              </a:p>
-            </p:txBody>
-          </p:sp>
-          <p:sp>
-            <p:nvSpPr>
-              <p:cNvPr id="21" name="Rectangle 21"/>
-              <p:cNvSpPr/>
-              <p:nvPr/>
-            </p:nvSpPr>
-            <p:spPr>
-              <a:xfrm>
-                <a:off x="2952750" y="3676650"/>
-                <a:ext cx="1257300" cy="895350"/>
-              </a:xfrm>
-              <a:prstGeom prst="roundRect">
-                <a:avLst>
-                  <a:gd name="adj" fmla="val 17021"/>
-                </a:avLst>
-              </a:prstGeom>
-              <a:solidFill>
-                <a:srgbClr val="FFF0D1"/>
-              </a:solidFill>
-              <a:ln w="19050">
-                <a:solidFill>
-                  <a:schemeClr val="accent2"/>
-                </a:solidFill>
-              </a:ln>
-            </p:spPr>
-          </p:sp>
-          <p:sp>
-            <p:nvSpPr>
-              <p:cNvPr id="22" name="TextBox 22"/>
-              <p:cNvSpPr txBox="1"/>
-              <p:nvPr/>
-            </p:nvSpPr>
-            <p:spPr>
-              <a:xfrm>
-                <a:off x="3138667" y="3863340"/>
-                <a:ext cx="885466" cy="352044"/>
-              </a:xfrm>
-              <a:prstGeom prst="rect">
-                <a:avLst/>
-              </a:prstGeom>
-              <a:noFill/>
-              <a:ln>
-                <a:noFill/>
-              </a:ln>
-            </p:spPr>
-            <p:txBody>
-              <a:bodyPr wrap="none" lIns="0" tIns="0" rIns="0" bIns="0" anchor="t" anchorCtr="0">
-                <a:spAutoFit/>
-              </a:bodyPr>
-              <a:lstStyle/>
-              <a:p>
-                <a:pPr algn="ctr"/>
-                <a:r>
-                  <a:rPr lang="en-US" sz="1800" dirty="0">
-                    <a:solidFill>
-                      <a:srgbClr val="8C5A00"/>
-                    </a:solidFill>
-                    <a:latin typeface="+mn-lt"/>
-                    <a:ea typeface="+mn-ea"/>
-                    <a:cs typeface="+mn-cs"/>
-                  </a:rPr>
-                  <a:t>Quality</a:t>
-                </a:r>
-              </a:p>
-            </p:txBody>
-          </p:sp>
-          <p:sp>
-            <p:nvSpPr>
-              <p:cNvPr id="23" name="TextBox 23"/>
-              <p:cNvSpPr txBox="1"/>
-              <p:nvPr/>
-            </p:nvSpPr>
-            <p:spPr>
-              <a:xfrm>
-                <a:off x="3010986" y="4168140"/>
-                <a:ext cx="1140828" cy="352044"/>
-              </a:xfrm>
-              <a:prstGeom prst="rect">
-                <a:avLst/>
-              </a:prstGeom>
-              <a:noFill/>
-              <a:ln>
-                <a:noFill/>
-              </a:ln>
-            </p:spPr>
-            <p:txBody>
-              <a:bodyPr wrap="none" lIns="0" tIns="0" rIns="0" bIns="0" anchor="t" anchorCtr="0">
-                <a:spAutoFit/>
-              </a:bodyPr>
-              <a:lstStyle/>
-              <a:p>
-                <a:pPr algn="ctr"/>
-                <a:r>
-                  <a:rPr lang="en-US" sz="1800" dirty="0">
-                    <a:solidFill>
-                      <a:schemeClr val="dk2"/>
-                    </a:solidFill>
-                    <a:latin typeface="+mn-lt"/>
-                    <a:ea typeface="+mn-ea"/>
-                    <a:cs typeface="+mn-cs"/>
-                  </a:rPr>
-                  <a:t>Dropdown</a:t>
-                </a:r>
-              </a:p>
-            </p:txBody>
-          </p:sp>
-          <p:sp>
-            <p:nvSpPr>
-              <p:cNvPr id="24" name="Rectangle 24"/>
-              <p:cNvSpPr/>
-              <p:nvPr/>
-            </p:nvSpPr>
-            <p:spPr>
-              <a:xfrm>
-                <a:off x="4010025" y="3676650"/>
-                <a:ext cx="1257300" cy="895350"/>
-              </a:xfrm>
-              <a:prstGeom prst="roundRect">
-                <a:avLst>
-                  <a:gd name="adj" fmla="val 17021"/>
-                </a:avLst>
-              </a:prstGeom>
-              <a:solidFill>
-                <a:schemeClr val="lt2"/>
-              </a:solidFill>
-              <a:ln w="19050">
-                <a:solidFill>
-                  <a:schemeClr val="dk2"/>
-                </a:solidFill>
-              </a:ln>
-            </p:spPr>
-          </p:sp>
-          <p:sp>
-            <p:nvSpPr>
-              <p:cNvPr id="25" name="TextBox 25"/>
-              <p:cNvSpPr txBox="1"/>
-              <p:nvPr/>
-            </p:nvSpPr>
-            <p:spPr>
-              <a:xfrm>
-                <a:off x="4323207" y="3863340"/>
-                <a:ext cx="630936" cy="352044"/>
-              </a:xfrm>
-              <a:prstGeom prst="rect">
-                <a:avLst/>
-              </a:prstGeom>
-              <a:noFill/>
-              <a:ln>
-                <a:noFill/>
-              </a:ln>
-            </p:spPr>
-            <p:txBody>
-              <a:bodyPr wrap="none" lIns="0" tIns="0" rIns="0" bIns="0" anchor="t" anchorCtr="0">
-                <a:spAutoFit/>
-              </a:bodyPr>
-              <a:lstStyle/>
-              <a:p>
-                <a:pPr algn="ctr"/>
-                <a:r>
-                  <a:rPr lang="en-US" sz="1800" dirty="0">
-                    <a:solidFill>
-                      <a:schemeClr val="dk1"/>
-                    </a:solidFill>
-                    <a:latin typeface="+mn-lt"/>
-                    <a:ea typeface="+mn-ea"/>
-                    <a:cs typeface="+mn-cs"/>
-                  </a:rPr>
-                  <a:t>Apply</a:t>
-                </a:r>
-              </a:p>
-            </p:txBody>
-          </p:sp>
-          <p:sp>
-            <p:nvSpPr>
-              <p:cNvPr id="26" name="TextBox 26"/>
-              <p:cNvSpPr txBox="1"/>
-              <p:nvPr/>
-            </p:nvSpPr>
-            <p:spPr>
-              <a:xfrm>
-                <a:off x="4225938" y="4168140"/>
-                <a:ext cx="825475" cy="352044"/>
-              </a:xfrm>
-              <a:prstGeom prst="rect">
-                <a:avLst/>
-              </a:prstGeom>
-              <a:noFill/>
-              <a:ln>
-                <a:noFill/>
-              </a:ln>
-            </p:spPr>
-            <p:txBody>
-              <a:bodyPr wrap="none" lIns="0" tIns="0" rIns="0" bIns="0" anchor="t" anchorCtr="0">
-                <a:spAutoFit/>
-              </a:bodyPr>
-              <a:lstStyle/>
-              <a:p>
-                <a:pPr algn="ctr"/>
-                <a:r>
-                  <a:rPr lang="en-US" sz="1800" dirty="0">
-                    <a:solidFill>
-                      <a:schemeClr val="dk2"/>
-                    </a:solidFill>
-                    <a:latin typeface="+mn-lt"/>
-                    <a:ea typeface="+mn-ea"/>
-                    <a:cs typeface="+mn-cs"/>
-                  </a:rPr>
-                  <a:t>Button</a:t>
-                </a:r>
-              </a:p>
-            </p:txBody>
-          </p:sp>
-        </p:grpSp>
-        <p:sp>
-          <p:nvSpPr>
-            <p:cNvPr id="28" name="Rectangle 28"/>
-            <p:cNvSpPr/>
-            <p:nvPr/>
-          </p:nvSpPr>
-          <p:spPr>
-            <a:xfrm>
-              <a:off x="1104900" y="4914900"/>
-              <a:ext cx="3886200" cy="552450"/>
-            </a:xfrm>
-            <a:prstGeom prst="roundRect">
-              <a:avLst>
-                <a:gd name="adj" fmla="val 27586"/>
-              </a:avLst>
-            </a:prstGeom>
-            <a:solidFill>
-              <a:schemeClr val="accent3"/>
-            </a:solidFill>
-            <a:ln>
-              <a:noFill/>
-            </a:ln>
-          </p:spPr>
-        </p:sp>
-        <p:sp>
-          <p:nvSpPr>
-            <p:cNvPr id="29" name="TextBox 29"/>
-            <p:cNvSpPr txBox="1"/>
-            <p:nvPr/>
-          </p:nvSpPr>
-          <p:spPr>
-            <a:xfrm>
-              <a:off x="1464423" y="5092065"/>
-              <a:ext cx="3167154" cy="352044"/>
-            </a:xfrm>
-            <a:prstGeom prst="rect">
-              <a:avLst/>
-            </a:prstGeom>
-            <a:noFill/>
-            <a:ln>
-              <a:noFill/>
-            </a:ln>
-          </p:spPr>
-          <p:txBody>
-            <a:bodyPr wrap="none" lIns="0" tIns="0" rIns="0" bIns="0" anchor="t" anchorCtr="0">
-              <a:spAutoFit/>
-            </a:bodyPr>
-            <a:lstStyle/>
-            <a:p>
-              <a:pPr algn="ctr"/>
-              <a:r>
-                <a:rPr lang="zh-CN" sz="1800" b="1" dirty="0">
-                  <a:solidFill>
-                    <a:srgbClr val="FFFFFF"/>
-                  </a:solidFill>
-                  <a:latin typeface="+mn-lt"/>
-                  <a:ea typeface="+mn-ea"/>
-                  <a:cs typeface="+mn-cs"/>
-                </a:rPr>
-                <a:t>EventSystem（场景唯一）</a:t>
-              </a:r>
-            </a:p>
-          </p:txBody>
-        </p:sp>
-      </p:grpSp>
-      <p:grpSp>
-        <p:nvGrpSpPr>
-          <p:cNvPr id="51" name="Group 51"/>
-          <p:cNvGrpSpPr/>
-          <p:nvPr/>
-        </p:nvGrpSpPr>
-        <p:grpSpPr>
-          <a:xfrm>
-            <a:off x="5905500" y="1485900"/>
-            <a:ext cx="5715000" cy="4286250"/>
-            <a:chOff x="5905500" y="1485900"/>
-            <a:chExt cx="5715000" cy="4286250"/>
-          </a:xfrm>
-        </p:grpSpPr>
-        <p:sp>
-          <p:nvSpPr>
-            <p:cNvPr id="31" name="Rectangle 31"/>
-            <p:cNvSpPr/>
-            <p:nvPr/>
-          </p:nvSpPr>
-          <p:spPr>
-            <a:xfrm>
-              <a:off x="5905500" y="1485900"/>
-              <a:ext cx="5715000" cy="4286250"/>
-            </a:xfrm>
-            <a:prstGeom prst="roundRect">
-              <a:avLst>
-                <a:gd name="adj" fmla="val 6222"/>
-              </a:avLst>
-            </a:prstGeom>
-            <a:solidFill>
-              <a:srgbClr val="FFFFFF"/>
-            </a:solidFill>
-            <a:ln w="38100">
-              <a:solidFill>
-                <a:schemeClr val="accent1"/>
-              </a:solidFill>
-            </a:ln>
-          </p:spPr>
-        </p:sp>
-        <p:sp>
-          <p:nvSpPr>
-            <p:cNvPr id="32" name="Rectangle 32"/>
-            <p:cNvSpPr/>
-            <p:nvPr/>
-          </p:nvSpPr>
-          <p:spPr>
-            <a:xfrm>
-              <a:off x="5905500" y="1485900"/>
-              <a:ext cx="5715000" cy="628650"/>
-            </a:xfrm>
-            <a:prstGeom prst="roundRect">
-              <a:avLst>
-                <a:gd name="adj" fmla="val 42424"/>
-              </a:avLst>
-            </a:prstGeom>
-            <a:solidFill>
-              <a:schemeClr val="accent1"/>
-            </a:solidFill>
-            <a:ln>
-              <a:noFill/>
-            </a:ln>
-          </p:spPr>
-        </p:sp>
-        <p:grpSp>
-          <p:nvGrpSpPr>
-            <p:cNvPr id="35" name="Group 35"/>
-            <p:cNvGrpSpPr/>
-            <p:nvPr/>
-          </p:nvGrpSpPr>
-          <p:grpSpPr>
-            <a:xfrm>
-              <a:off x="6174756" y="1650381"/>
-              <a:ext cx="299689" cy="299689"/>
-              <a:chOff x="6174756" y="1650381"/>
-              <a:chExt cx="299689" cy="299689"/>
-            </a:xfrm>
-          </p:grpSpPr>
-          <p:sp>
-            <p:nvSpPr>
-              <p:cNvPr id="33" name="Freeform 33"/>
-              <p:cNvSpPr/>
-              <p:nvPr/>
-            </p:nvSpPr>
-            <p:spPr>
-              <a:xfrm>
-                <a:off x="6174756" y="1650381"/>
-                <a:ext cx="299689" cy="299689"/>
-              </a:xfrm>
-              <a:custGeom>
-                <a:avLst/>
-                <a:gdLst/>
-                <a:ahLst/>
-                <a:cxnLst/>
-                <a:rect l="l" t="t" r="r" b="b"/>
-                <a:pathLst>
-                  <a:path w="299689" h="299689">
-                    <a:moveTo>
-                      <a:pt x="123254" y="27877"/>
-                    </a:moveTo>
-                    <a:cubicBezTo>
-                      <a:pt x="130017" y="0"/>
-                      <a:pt x="169672" y="0"/>
-                      <a:pt x="176435" y="27877"/>
-                    </a:cubicBezTo>
-                    <a:cubicBezTo>
-                      <a:pt x="178493" y="36371"/>
-                      <a:pt x="184484" y="43371"/>
-                      <a:pt x="192559" y="46716"/>
-                    </a:cubicBezTo>
-                    <a:cubicBezTo>
-                      <a:pt x="200633" y="50061"/>
-                      <a:pt x="209819" y="49349"/>
-                      <a:pt x="217282" y="44799"/>
-                    </a:cubicBezTo>
-                    <a:cubicBezTo>
-                      <a:pt x="241777" y="29877"/>
-                      <a:pt x="269828" y="57912"/>
-                      <a:pt x="254905" y="82423"/>
-                    </a:cubicBezTo>
-                    <a:cubicBezTo>
-                      <a:pt x="250362" y="89882"/>
-                      <a:pt x="249652" y="99061"/>
-                      <a:pt x="252993" y="107131"/>
-                    </a:cubicBezTo>
-                    <a:cubicBezTo>
-                      <a:pt x="256334" y="115200"/>
-                      <a:pt x="263326" y="121190"/>
-                      <a:pt x="271812" y="123254"/>
-                    </a:cubicBezTo>
-                    <a:cubicBezTo>
-                      <a:pt x="299689" y="130017"/>
-                      <a:pt x="299689" y="169672"/>
-                      <a:pt x="271812" y="176435"/>
-                    </a:cubicBezTo>
-                    <a:cubicBezTo>
-                      <a:pt x="263318" y="178493"/>
-                      <a:pt x="256318" y="184484"/>
-                      <a:pt x="252973" y="192559"/>
-                    </a:cubicBezTo>
-                    <a:cubicBezTo>
-                      <a:pt x="249627" y="200633"/>
-                      <a:pt x="250340" y="209819"/>
-                      <a:pt x="254890" y="217282"/>
-                    </a:cubicBezTo>
-                    <a:cubicBezTo>
-                      <a:pt x="269812" y="241777"/>
-                      <a:pt x="241777" y="269828"/>
-                      <a:pt x="217266" y="254905"/>
-                    </a:cubicBezTo>
-                    <a:cubicBezTo>
-                      <a:pt x="209807" y="250362"/>
-                      <a:pt x="200627" y="249652"/>
-                      <a:pt x="192558" y="252993"/>
-                    </a:cubicBezTo>
-                    <a:cubicBezTo>
-                      <a:pt x="184489" y="256334"/>
-                      <a:pt x="178499" y="263326"/>
-                      <a:pt x="176435" y="271812"/>
-                    </a:cubicBezTo>
-                    <a:cubicBezTo>
-                      <a:pt x="169672" y="299689"/>
-                      <a:pt x="130017" y="299689"/>
-                      <a:pt x="123254" y="271812"/>
-                    </a:cubicBezTo>
-                    <a:cubicBezTo>
-                      <a:pt x="121196" y="263318"/>
-                      <a:pt x="115205" y="256318"/>
-                      <a:pt x="107130" y="252973"/>
-                    </a:cubicBezTo>
-                    <a:cubicBezTo>
-                      <a:pt x="99056" y="249627"/>
-                      <a:pt x="89869" y="250340"/>
-                      <a:pt x="82407" y="254890"/>
-                    </a:cubicBezTo>
-                    <a:cubicBezTo>
-                      <a:pt x="57912" y="269812"/>
-                      <a:pt x="29861" y="241777"/>
-                      <a:pt x="44783" y="217266"/>
-                    </a:cubicBezTo>
-                    <a:cubicBezTo>
-                      <a:pt x="49327" y="209807"/>
-                      <a:pt x="50037" y="200627"/>
-                      <a:pt x="46696" y="192558"/>
-                    </a:cubicBezTo>
-                    <a:cubicBezTo>
-                      <a:pt x="43355" y="184489"/>
-                      <a:pt x="36363" y="178499"/>
-                      <a:pt x="27877" y="176435"/>
-                    </a:cubicBezTo>
-                    <a:cubicBezTo>
-                      <a:pt x="0" y="169672"/>
-                      <a:pt x="0" y="130017"/>
-                      <a:pt x="27877" y="123254"/>
-                    </a:cubicBezTo>
-                    <a:cubicBezTo>
-                      <a:pt x="36371" y="121196"/>
-                      <a:pt x="43371" y="115205"/>
-                      <a:pt x="46716" y="107130"/>
-                    </a:cubicBezTo>
-                    <a:cubicBezTo>
-                      <a:pt x="50061" y="99056"/>
-                      <a:pt x="49349" y="89869"/>
-                      <a:pt x="44799" y="82407"/>
-                    </a:cubicBezTo>
-                    <a:cubicBezTo>
-                      <a:pt x="29877" y="57912"/>
-                      <a:pt x="57912" y="29861"/>
-                      <a:pt x="82423" y="44783"/>
-                    </a:cubicBezTo>
-                    <a:cubicBezTo>
-                      <a:pt x="98298" y="54435"/>
-                      <a:pt x="118872" y="45895"/>
-                      <a:pt x="123254" y="27877"/>
-                    </a:cubicBezTo>
-                  </a:path>
-                </a:pathLst>
-              </a:custGeom>
-              <a:noFill/>
-              <a:ln w="19050">
-                <a:solidFill>
-                  <a:srgbClr val="FFFFFF"/>
-                </a:solidFill>
-              </a:ln>
-            </p:spPr>
-          </p:sp>
-          <p:sp>
-            <p:nvSpPr>
-              <p:cNvPr id="34" name="Freeform 34"/>
-              <p:cNvSpPr/>
-              <p:nvPr/>
-            </p:nvSpPr>
-            <p:spPr>
-              <a:xfrm>
-                <a:off x="6276975" y="1752600"/>
-                <a:ext cx="95250" cy="95250"/>
-              </a:xfrm>
-              <a:custGeom>
-                <a:avLst/>
-                <a:gdLst/>
-                <a:ahLst/>
-                <a:cxnLst/>
-                <a:rect l="l" t="t" r="r" b="b"/>
-                <a:pathLst>
-                  <a:path w="95250" h="95250">
-                    <a:moveTo>
-                      <a:pt x="0" y="47625"/>
-                    </a:moveTo>
-                    <a:cubicBezTo>
-                      <a:pt x="0" y="73928"/>
-                      <a:pt x="21322" y="95250"/>
-                      <a:pt x="47625" y="95250"/>
-                    </a:cubicBezTo>
-                    <a:cubicBezTo>
-                      <a:pt x="73928" y="95250"/>
-                      <a:pt x="95250" y="73928"/>
-                      <a:pt x="95250" y="47625"/>
-                    </a:cubicBezTo>
-                    <a:cubicBezTo>
-                      <a:pt x="95250" y="21322"/>
-                      <a:pt x="73928" y="0"/>
-                      <a:pt x="47625" y="0"/>
-                    </a:cubicBezTo>
-                    <a:cubicBezTo>
-                      <a:pt x="21322" y="0"/>
-                      <a:pt x="0" y="21322"/>
-                      <a:pt x="0" y="47625"/>
-                    </a:cubicBezTo>
-                  </a:path>
-                </a:pathLst>
-              </a:custGeom>
-              <a:noFill/>
-              <a:ln w="19050">
-                <a:solidFill>
-                  <a:srgbClr val="FFFFFF"/>
-                </a:solidFill>
-              </a:ln>
-            </p:spPr>
-          </p:sp>
-        </p:grpSp>
-        <p:sp>
-          <p:nvSpPr>
-            <p:cNvPr id="36" name="TextBox 36"/>
-            <p:cNvSpPr txBox="1"/>
-            <p:nvPr/>
-          </p:nvSpPr>
-          <p:spPr>
-            <a:xfrm>
-              <a:off x="6674358" y="1655445"/>
-              <a:ext cx="702869" cy="469392"/>
-            </a:xfrm>
-            <a:prstGeom prst="rect">
-              <a:avLst/>
-            </a:prstGeom>
-            <a:noFill/>
-            <a:ln>
-              <a:noFill/>
-            </a:ln>
-          </p:spPr>
-          <p:txBody>
-            <a:bodyPr wrap="none" lIns="0" tIns="0" rIns="0" bIns="0" anchor="t" anchorCtr="0">
-              <a:spAutoFit/>
-            </a:bodyPr>
-            <a:lstStyle/>
-            <a:p>
-              <a:pPr algn="l"/>
-              <a:r>
-                <a:rPr lang="zh-CN" sz="2400" b="1" dirty="0">
-                  <a:solidFill>
-                    <a:srgbClr val="FFFFFF"/>
-                  </a:solidFill>
-                  <a:latin typeface="+mn-lt"/>
-                  <a:ea typeface="+mn-ea"/>
-                  <a:cs typeface="+mn-cs"/>
-                </a:rPr>
-                <a:t>设置</a:t>
-              </a:r>
-            </a:p>
-          </p:txBody>
-        </p:sp>
-        <p:sp>
-          <p:nvSpPr>
-            <p:cNvPr id="37" name="Rectangle 37"/>
-            <p:cNvSpPr/>
-            <p:nvPr/>
-          </p:nvSpPr>
-          <p:spPr>
-            <a:xfrm>
-              <a:off x="6191250" y="2362200"/>
-              <a:ext cx="2095500" cy="1428750"/>
-            </a:xfrm>
-            <a:prstGeom prst="roundRect">
-              <a:avLst>
-                <a:gd name="adj" fmla="val 13333"/>
-              </a:avLst>
-            </a:prstGeom>
-            <a:solidFill>
-              <a:srgbClr val="EAF0FA"/>
-            </a:solidFill>
-            <a:ln>
-              <a:noFill/>
-            </a:ln>
-          </p:spPr>
-        </p:sp>
-        <p:grpSp>
-          <p:nvGrpSpPr>
-            <p:cNvPr id="40" name="Group 40"/>
-            <p:cNvGrpSpPr/>
-            <p:nvPr/>
-          </p:nvGrpSpPr>
-          <p:grpSpPr>
-            <a:xfrm>
-              <a:off x="6953250" y="2774950"/>
-              <a:ext cx="571499" cy="507999"/>
-              <a:chOff x="6953250" y="2774950"/>
-              <a:chExt cx="571499" cy="507999"/>
-            </a:xfrm>
-          </p:grpSpPr>
-          <p:sp>
-            <p:nvSpPr>
-              <p:cNvPr id="38" name="Freeform 38"/>
-              <p:cNvSpPr/>
-              <p:nvPr/>
-            </p:nvSpPr>
-            <p:spPr>
-              <a:xfrm>
-                <a:off x="6953250" y="2774950"/>
-                <a:ext cx="571499" cy="507999"/>
-              </a:xfrm>
-              <a:custGeom>
-                <a:avLst/>
-                <a:gdLst/>
-                <a:ahLst/>
-                <a:cxnLst/>
-                <a:rect l="l" t="t" r="r" b="b"/>
-                <a:pathLst>
-                  <a:path w="571499" h="507999">
-                    <a:moveTo>
-                      <a:pt x="63500" y="95250"/>
-                    </a:moveTo>
-                    <a:lnTo>
-                      <a:pt x="95250" y="95250"/>
-                    </a:lnTo>
-                    <a:cubicBezTo>
-                      <a:pt x="130320" y="95250"/>
-                      <a:pt x="158750" y="66820"/>
-                      <a:pt x="158750" y="31750"/>
-                    </a:cubicBezTo>
-                    <a:cubicBezTo>
-                      <a:pt x="158750" y="14215"/>
-                      <a:pt x="172965" y="0"/>
-                      <a:pt x="190500" y="0"/>
-                    </a:cubicBezTo>
-                    <a:lnTo>
-                      <a:pt x="381000" y="0"/>
-                    </a:lnTo>
-                    <a:cubicBezTo>
-                      <a:pt x="398535" y="0"/>
-                      <a:pt x="412750" y="14215"/>
-                      <a:pt x="412750" y="31750"/>
-                    </a:cubicBezTo>
-                    <a:cubicBezTo>
-                      <a:pt x="412750" y="66820"/>
-                      <a:pt x="441179" y="95250"/>
-                      <a:pt x="476250" y="95250"/>
-                    </a:cubicBezTo>
-                    <a:lnTo>
-                      <a:pt x="507999" y="95250"/>
-                    </a:lnTo>
-                    <a:cubicBezTo>
-                      <a:pt x="543070" y="95250"/>
-                      <a:pt x="571499" y="123680"/>
-                      <a:pt x="571499" y="158750"/>
-                    </a:cubicBezTo>
-                    <a:lnTo>
-                      <a:pt x="571499" y="444500"/>
-                    </a:lnTo>
-                    <a:cubicBezTo>
-                      <a:pt x="571499" y="479570"/>
-                      <a:pt x="543070" y="507999"/>
-                      <a:pt x="507999" y="507999"/>
-                    </a:cubicBezTo>
-                    <a:lnTo>
-                      <a:pt x="63500" y="507999"/>
-                    </a:lnTo>
-                    <a:cubicBezTo>
-                      <a:pt x="28430" y="507999"/>
-                      <a:pt x="0" y="479570"/>
-                      <a:pt x="0" y="444500"/>
-                    </a:cubicBezTo>
-                    <a:lnTo>
-                      <a:pt x="0" y="158750"/>
-                    </a:lnTo>
-                    <a:cubicBezTo>
-                      <a:pt x="0" y="123680"/>
-                      <a:pt x="28430" y="95250"/>
-                      <a:pt x="63500" y="95250"/>
-                    </a:cubicBezTo>
-                  </a:path>
-                </a:pathLst>
-              </a:custGeom>
-              <a:noFill/>
-              <a:ln w="19050">
-                <a:solidFill>
-                  <a:schemeClr val="accent1"/>
-                </a:solidFill>
-              </a:ln>
-            </p:spPr>
-          </p:sp>
-          <p:sp>
-            <p:nvSpPr>
-              <p:cNvPr id="39" name="Freeform 39"/>
-              <p:cNvSpPr/>
-              <p:nvPr/>
-            </p:nvSpPr>
-            <p:spPr>
-              <a:xfrm>
-                <a:off x="7143750" y="2965450"/>
-                <a:ext cx="190500" cy="190500"/>
-              </a:xfrm>
-              <a:custGeom>
-                <a:avLst/>
-                <a:gdLst/>
-                <a:ahLst/>
-                <a:cxnLst/>
-                <a:rect l="l" t="t" r="r" b="b"/>
-                <a:pathLst>
-                  <a:path w="190500" h="190500">
-                    <a:moveTo>
-                      <a:pt x="0" y="95250"/>
-                    </a:moveTo>
-                    <a:cubicBezTo>
-                      <a:pt x="0" y="147855"/>
-                      <a:pt x="42645" y="190500"/>
-                      <a:pt x="95250" y="190500"/>
-                    </a:cubicBezTo>
-                    <a:cubicBezTo>
-                      <a:pt x="147855" y="190500"/>
-                      <a:pt x="190500" y="147855"/>
-                      <a:pt x="190500" y="95250"/>
-                    </a:cubicBezTo>
-                    <a:cubicBezTo>
-                      <a:pt x="190500" y="42645"/>
-                      <a:pt x="147855" y="0"/>
-                      <a:pt x="95250" y="0"/>
-                    </a:cubicBezTo>
-                    <a:cubicBezTo>
-                      <a:pt x="42645" y="0"/>
-                      <a:pt x="0" y="42645"/>
-                      <a:pt x="0" y="95250"/>
-                    </a:cubicBezTo>
-                  </a:path>
-                </a:pathLst>
-              </a:custGeom>
-              <a:noFill/>
-              <a:ln w="19050">
-                <a:solidFill>
-                  <a:schemeClr val="accent1"/>
-                </a:solidFill>
-              </a:ln>
-            </p:spPr>
-          </p:sp>
-        </p:grpSp>
-        <p:sp>
-          <p:nvSpPr>
-            <p:cNvPr id="41" name="TextBox 41"/>
-            <p:cNvSpPr txBox="1"/>
-            <p:nvPr/>
-          </p:nvSpPr>
-          <p:spPr>
-            <a:xfrm>
-              <a:off x="8610981" y="2510790"/>
-              <a:ext cx="502920" cy="352044"/>
-            </a:xfrm>
-            <a:prstGeom prst="rect">
-              <a:avLst/>
-            </a:prstGeom>
-            <a:noFill/>
-            <a:ln>
-              <a:noFill/>
-            </a:ln>
-          </p:spPr>
-          <p:txBody>
-            <a:bodyPr wrap="none" lIns="0" tIns="0" rIns="0" bIns="0" anchor="t" anchorCtr="0">
-              <a:spAutoFit/>
-            </a:bodyPr>
-            <a:lstStyle/>
-            <a:p>
-              <a:pPr algn="l"/>
-              <a:r>
-                <a:rPr lang="zh-CN" sz="1800" dirty="0">
-                  <a:solidFill>
-                    <a:schemeClr val="dk1"/>
-                  </a:solidFill>
-                  <a:latin typeface="+mn-lt"/>
-                  <a:ea typeface="+mn-ea"/>
-                  <a:cs typeface="+mn-cs"/>
-                </a:rPr>
-                <a:t>音乐</a:t>
-              </a:r>
-            </a:p>
-          </p:txBody>
-        </p:sp>
-        <p:sp>
-          <p:nvSpPr>
-            <p:cNvPr id="42" name="Rectangle 42"/>
-            <p:cNvSpPr/>
-            <p:nvPr/>
-          </p:nvSpPr>
-          <p:spPr>
-            <a:xfrm>
-              <a:off x="10325100" y="2438400"/>
-              <a:ext cx="952500" cy="495300"/>
-            </a:xfrm>
-            <a:prstGeom prst="roundRect">
-              <a:avLst>
-                <a:gd name="adj" fmla="val 50000"/>
-              </a:avLst>
-            </a:prstGeom>
-            <a:solidFill>
-              <a:schemeClr val="accent3"/>
-            </a:solidFill>
-            <a:ln>
-              <a:noFill/>
-            </a:ln>
-          </p:spPr>
-        </p:sp>
-        <p:sp>
-          <p:nvSpPr>
-            <p:cNvPr id="43" name="Ellipse 43"/>
-            <p:cNvSpPr/>
-            <p:nvPr/>
-          </p:nvSpPr>
-          <p:spPr>
-            <a:xfrm>
-              <a:off x="10839450" y="2495550"/>
-              <a:ext cx="381000" cy="381000"/>
-            </a:xfrm>
-            <a:prstGeom prst="ellipse">
-              <a:avLst/>
-            </a:prstGeom>
-            <a:solidFill>
-              <a:srgbClr val="FFFFFF"/>
-            </a:solidFill>
-            <a:ln>
-              <a:noFill/>
-            </a:ln>
-          </p:spPr>
-        </p:sp>
-        <p:sp>
-          <p:nvSpPr>
-            <p:cNvPr id="44" name="TextBox 44"/>
-            <p:cNvSpPr txBox="1"/>
-            <p:nvPr/>
-          </p:nvSpPr>
-          <p:spPr>
-            <a:xfrm>
-              <a:off x="8610981" y="3177540"/>
-              <a:ext cx="502920" cy="352044"/>
-            </a:xfrm>
-            <a:prstGeom prst="rect">
-              <a:avLst/>
-            </a:prstGeom>
-            <a:noFill/>
-            <a:ln>
-              <a:noFill/>
-            </a:ln>
-          </p:spPr>
-          <p:txBody>
-            <a:bodyPr wrap="none" lIns="0" tIns="0" rIns="0" bIns="0" anchor="t" anchorCtr="0">
-              <a:spAutoFit/>
-            </a:bodyPr>
-            <a:lstStyle/>
-            <a:p>
-              <a:pPr algn="l"/>
-              <a:r>
-                <a:rPr lang="zh-CN" sz="1800" dirty="0">
-                  <a:solidFill>
-                    <a:schemeClr val="dk1"/>
-                  </a:solidFill>
-                  <a:latin typeface="+mn-lt"/>
-                  <a:ea typeface="+mn-ea"/>
-                  <a:cs typeface="+mn-cs"/>
-                </a:rPr>
-                <a:t>画质</a:t>
-              </a:r>
-            </a:p>
-          </p:txBody>
-        </p:sp>
-        <p:sp>
-          <p:nvSpPr>
-            <p:cNvPr id="45" name="Rectangle 45"/>
-            <p:cNvSpPr/>
-            <p:nvPr/>
-          </p:nvSpPr>
-          <p:spPr>
-            <a:xfrm>
-              <a:off x="10001250" y="3067050"/>
-              <a:ext cx="1276350" cy="476250"/>
-            </a:xfrm>
-            <a:prstGeom prst="roundRect">
-              <a:avLst>
-                <a:gd name="adj" fmla="val 28000"/>
-              </a:avLst>
-            </a:prstGeom>
-            <a:solidFill>
-              <a:srgbClr val="FFF9E9"/>
-            </a:solidFill>
-            <a:ln w="28575">
-              <a:solidFill>
-                <a:schemeClr val="accent4"/>
-              </a:solidFill>
-            </a:ln>
-          </p:spPr>
-        </p:sp>
-        <p:sp>
-          <p:nvSpPr>
-            <p:cNvPr id="46" name="TextBox 46"/>
-            <p:cNvSpPr txBox="1"/>
-            <p:nvPr/>
-          </p:nvSpPr>
-          <p:spPr>
-            <a:xfrm>
-              <a:off x="10163556" y="3187065"/>
-              <a:ext cx="260604" cy="352044"/>
-            </a:xfrm>
-            <a:prstGeom prst="rect">
-              <a:avLst/>
-            </a:prstGeom>
-            <a:noFill/>
-            <a:ln>
-              <a:noFill/>
-            </a:ln>
-          </p:spPr>
-          <p:txBody>
-            <a:bodyPr wrap="none" lIns="0" tIns="0" rIns="0" bIns="0" anchor="t" anchorCtr="0">
-              <a:spAutoFit/>
-            </a:bodyPr>
-            <a:lstStyle/>
-            <a:p>
-              <a:pPr algn="l"/>
-              <a:r>
-                <a:rPr lang="zh-CN" sz="1800" dirty="0">
-                  <a:solidFill>
-                    <a:schemeClr val="dk2"/>
-                  </a:solidFill>
-                  <a:latin typeface="+mn-lt"/>
-                  <a:ea typeface="+mn-ea"/>
-                  <a:cs typeface="+mn-cs"/>
-                </a:rPr>
-                <a:t>高</a:t>
-              </a:r>
-            </a:p>
-          </p:txBody>
-        </p:sp>
-        <p:sp>
-          <p:nvSpPr>
-            <p:cNvPr id="47" name="Freeform 47"/>
-            <p:cNvSpPr/>
-            <p:nvPr/>
-          </p:nvSpPr>
-          <p:spPr>
-            <a:xfrm>
-              <a:off x="10858500" y="3238500"/>
-              <a:ext cx="266700" cy="152400"/>
-            </a:xfrm>
-            <a:custGeom>
-              <a:avLst/>
-              <a:gdLst/>
-              <a:ahLst/>
-              <a:cxnLst/>
-              <a:rect l="l" t="t" r="r" b="b"/>
-              <a:pathLst>
-                <a:path w="266700" h="152400">
-                  <a:moveTo>
-                    <a:pt x="0" y="0"/>
-                  </a:moveTo>
-                  <a:lnTo>
-                    <a:pt x="133350" y="152400"/>
-                  </a:lnTo>
-                  <a:lnTo>
-                    <a:pt x="266700" y="0"/>
-                  </a:lnTo>
-                </a:path>
-              </a:pathLst>
-            </a:custGeom>
-            <a:noFill/>
-            <a:ln w="38100">
-              <a:solidFill>
-                <a:schemeClr val="dk2"/>
-              </a:solidFill>
-            </a:ln>
-          </p:spPr>
-        </p:sp>
-        <p:sp>
-          <p:nvSpPr>
-            <p:cNvPr id="48" name="Rectangle 48"/>
-            <p:cNvSpPr/>
-            <p:nvPr/>
-          </p:nvSpPr>
-          <p:spPr>
-            <a:xfrm>
-              <a:off x="6496050" y="4210050"/>
-              <a:ext cx="4533900" cy="647700"/>
-            </a:xfrm>
-            <a:prstGeom prst="roundRect">
-              <a:avLst>
-                <a:gd name="adj" fmla="val 26471"/>
-              </a:avLst>
-            </a:prstGeom>
-            <a:solidFill>
-              <a:schemeClr val="accent2"/>
-            </a:solidFill>
-            <a:ln>
-              <a:noFill/>
-            </a:ln>
-          </p:spPr>
-        </p:sp>
-        <p:sp>
-          <p:nvSpPr>
-            <p:cNvPr id="49" name="TextBox 49"/>
-            <p:cNvSpPr txBox="1"/>
-            <p:nvPr/>
-          </p:nvSpPr>
-          <p:spPr>
-            <a:xfrm>
-              <a:off x="8072323" y="4379595"/>
-              <a:ext cx="1381354" cy="469392"/>
-            </a:xfrm>
-            <a:prstGeom prst="rect">
-              <a:avLst/>
-            </a:prstGeom>
-            <a:noFill/>
-            <a:ln>
-              <a:noFill/>
-            </a:ln>
-          </p:spPr>
-          <p:txBody>
-            <a:bodyPr wrap="none" lIns="0" tIns="0" rIns="0" bIns="0" anchor="t" anchorCtr="0">
-              <a:spAutoFit/>
-            </a:bodyPr>
-            <a:lstStyle/>
-            <a:p>
-              <a:pPr algn="ctr"/>
-              <a:r>
-                <a:rPr lang="zh-CN" sz="2400" b="1" dirty="0">
-                  <a:solidFill>
-                    <a:srgbClr val="FFFFFF"/>
-                  </a:solidFill>
-                  <a:latin typeface="+mn-lt"/>
-                  <a:ea typeface="+mn-ea"/>
-                  <a:cs typeface="+mn-cs"/>
-                </a:rPr>
-                <a:t>应用设置</a:t>
-              </a:r>
-            </a:p>
-          </p:txBody>
-        </p:sp>
-        <p:sp>
-          <p:nvSpPr>
-            <p:cNvPr id="50" name="TextBox 50"/>
-            <p:cNvSpPr txBox="1"/>
-            <p:nvPr/>
-          </p:nvSpPr>
-          <p:spPr>
-            <a:xfrm>
-              <a:off x="7366597" y="5101590"/>
-              <a:ext cx="2792806" cy="352044"/>
-            </a:xfrm>
-            <a:prstGeom prst="rect">
-              <a:avLst/>
-            </a:prstGeom>
-            <a:noFill/>
-            <a:ln>
-              <a:noFill/>
-            </a:ln>
-          </p:spPr>
-          <p:txBody>
-            <a:bodyPr wrap="none" lIns="0" tIns="0" rIns="0" bIns="0" anchor="t" anchorCtr="0">
-              <a:spAutoFit/>
-            </a:bodyPr>
-            <a:lstStyle/>
-            <a:p>
-              <a:pPr algn="ctr"/>
-              <a:r>
-                <a:rPr lang="zh-CN" sz="1800" dirty="0">
-                  <a:solidFill>
-                    <a:schemeClr val="dk2"/>
-                  </a:solidFill>
-                  <a:latin typeface="+mn-lt"/>
-                  <a:ea typeface="+mn-ea"/>
-                  <a:cs typeface="+mn-cs"/>
-                </a:rPr>
-                <a:t>预览 · 状态 · 选择 · 提交</a:t>
-              </a:r>
-            </a:p>
-          </p:txBody>
-        </p:sp>
-      </p:grpSp>
-      <p:grpSp>
-        <p:nvGrpSpPr>
-          <p:cNvPr id="55" name="Group 55"/>
-          <p:cNvGrpSpPr/>
-          <p:nvPr/>
-        </p:nvGrpSpPr>
-        <p:grpSpPr>
-          <a:xfrm>
-            <a:off x="552450" y="6353175"/>
-            <a:ext cx="11055858" cy="432626"/>
-            <a:chOff x="552450" y="6353175"/>
-            <a:chExt cx="11055858" cy="432626"/>
-          </a:xfrm>
-        </p:grpSpPr>
-        <p:sp>
-          <p:nvSpPr>
-            <p:cNvPr id="52" name="Line 52"/>
-            <p:cNvSpPr/>
-            <p:nvPr/>
-          </p:nvSpPr>
-          <p:spPr>
-            <a:xfrm>
-              <a:off x="552450" y="6353175"/>
-              <a:ext cx="10668000" cy="9525"/>
-            </a:xfrm>
-            <a:custGeom>
-              <a:avLst/>
-              <a:gdLst/>
-              <a:ahLst/>
-              <a:cxnLst/>
-              <a:rect l="l" t="t" r="r" b="b"/>
-              <a:pathLst>
-                <a:path w="10668000" h="9525">
-                  <a:moveTo>
-                    <a:pt x="0" y="0"/>
-                  </a:moveTo>
-                  <a:lnTo>
-                    <a:pt x="10668000" y="0"/>
-                  </a:lnTo>
-                </a:path>
-              </a:pathLst>
-            </a:custGeom>
-            <a:noFill/>
-            <a:ln w="19050">
-              <a:solidFill>
-                <a:schemeClr val="accent4"/>
-              </a:solidFill>
-            </a:ln>
-          </p:spPr>
-        </p:sp>
-        <p:sp>
-          <p:nvSpPr>
-            <p:cNvPr id="53" name="TextBox 53"/>
-            <p:cNvSpPr txBox="1"/>
-            <p:nvPr/>
-          </p:nvSpPr>
-          <p:spPr>
-            <a:xfrm>
-              <a:off x="564642" y="6521768"/>
-              <a:ext cx="2231883" cy="264033"/>
-            </a:xfrm>
-            <a:prstGeom prst="rect">
-              <a:avLst/>
-            </a:prstGeom>
-            <a:noFill/>
-            <a:ln>
-              <a:noFill/>
-            </a:ln>
-          </p:spPr>
-          <p:txBody>
-            <a:bodyPr wrap="none" lIns="0" tIns="0" rIns="0" bIns="0" anchor="t" anchorCtr="0">
-              <a:spAutoFit/>
-            </a:bodyPr>
-            <a:lstStyle/>
-            <a:p>
-              <a:pPr algn="l"/>
-              <a:r>
-                <a:rPr lang="zh-CN" sz="1350" dirty="0">
-                  <a:solidFill>
-                    <a:schemeClr val="accent5"/>
-                  </a:solidFill>
-                  <a:latin typeface="+mn-lt"/>
-                  <a:ea typeface="+mn-ea"/>
-                  <a:cs typeface="+mn-cs"/>
-                </a:rPr>
-                <a:t>综合实践 · Settings Panel</a:t>
-              </a:r>
-            </a:p>
-          </p:txBody>
-        </p:sp>
-        <p:sp>
-          <p:nvSpPr>
-            <p:cNvPr id="54" name="TextBox 54"/>
-            <p:cNvSpPr txBox="1"/>
-            <p:nvPr/>
-          </p:nvSpPr>
-          <p:spPr>
-            <a:xfrm>
-              <a:off x="11394681" y="6521768"/>
-              <a:ext cx="213627" cy="264033"/>
-            </a:xfrm>
-            <a:prstGeom prst="rect">
-              <a:avLst/>
-            </a:prstGeom>
-            <a:noFill/>
-            <a:ln>
-              <a:noFill/>
-            </a:ln>
-          </p:spPr>
-          <p:txBody>
-            <a:bodyPr wrap="none" lIns="0" tIns="0" rIns="0" bIns="0" anchor="t" anchorCtr="0">
-              <a:spAutoFit/>
-            </a:bodyPr>
-            <a:lstStyle/>
-            <a:p>
-              <a:pPr algn="r"/>
-              <a:fld id="{47DFC295-102A-4A8A-8FC4-5DCA9EA7071F}" type="slidenum">
-                <a:rPr lang="en-US" sz="1350" dirty="0">
-                  <a:solidFill>
-                    <a:schemeClr val="accent5"/>
-                  </a:solidFill>
-                  <a:latin typeface="+mn-lt"/>
-                  <a:ea typeface="+mn-ea"/>
-                  <a:cs typeface="+mn-cs"/>
-                </a:rPr>
-                <a:t>12</a:t>
-              </a:fld>
-            </a:p>
-          </p:txBody>
-        </p:sp>
-      </p:grpSp>
-    </p:spTree>
-  </p:cSld>
-  <p:clrMapOvr>
-    <a:masterClrMapping/>
-  </p:clrMapOvr>
-  <p:transition p14:dur="400">
-    <p:fade/>
-  </p:transition>
-</p:sld>
-</file>
-
-<file path=ppt/slides/slide13.xml><?xml version="1.0" encoding="utf-8"?>
-<p:sld xmlns:a="http://schemas.openxmlformats.org/drawingml/2006/main" xmlns:p="http://schemas.openxmlformats.org/presentationml/2006/main" xmlns:p14="http://schemas.microsoft.com/office/powerpoint/2010/main">
+<p:sld xmlns:a="http://schemas.openxmlformats.org/drawingml/2006/main" xmlns:r="http://schemas.openxmlformats.org/officeDocument/2006/relationships" xmlns:p="http://schemas.openxmlformats.org/presentationml/2006/main">
   <p:cSld>
     <p:spTree>
       <p:nvGrpSpPr>
@@ -8276,6 +5932,14 @@
               </a:rPr>
               <a:t>交付前，检查这五件事</a:t>
             </a:r>
+            <a:endParaRPr lang="zh-CN" sz="4200" b="1" dirty="0">
+              <a:solidFill>
+                <a:schemeClr val="dk1"/>
+              </a:solidFill>
+              <a:latin typeface="+mj-lt"/>
+              <a:ea typeface="+mj-ea"/>
+              <a:cs typeface="+mj-cs"/>
+            </a:endParaRPr>
           </a:p>
         </p:txBody>
       </p:sp>
@@ -8316,6 +5980,14 @@
               </a:rPr>
               <a:t>UI 的完成标准不只是“能显示”</a:t>
             </a:r>
+            <a:endParaRPr lang="zh-CN" sz="1800" dirty="0">
+              <a:solidFill>
+                <a:schemeClr val="dk2"/>
+              </a:solidFill>
+              <a:latin typeface="+mn-lt"/>
+              <a:ea typeface="+mn-ea"/>
+              <a:cs typeface="+mn-cs"/>
+            </a:endParaRPr>
           </a:p>
         </p:txBody>
       </p:sp>
@@ -8406,6 +6078,14 @@
                   </a:rPr>
                   <a:t>1</a:t>
                 </a:r>
+                <a:endParaRPr lang="en-US" sz="2400" b="1" dirty="0">
+                  <a:solidFill>
+                    <a:srgbClr val="FFFFFF"/>
+                  </a:solidFill>
+                  <a:latin typeface="+mn-lt"/>
+                  <a:ea typeface="+mn-ea"/>
+                  <a:cs typeface="+mn-cs"/>
+                </a:endParaRPr>
               </a:p>
             </p:txBody>
           </p:sp>
@@ -8470,6 +6150,14 @@
                   </a:rPr>
                   <a:t>适配</a:t>
                 </a:r>
+                <a:endParaRPr lang="zh-CN" sz="2400" b="1" dirty="0">
+                  <a:solidFill>
+                    <a:schemeClr val="dk1"/>
+                  </a:solidFill>
+                  <a:latin typeface="+mn-lt"/>
+                  <a:ea typeface="+mn-ea"/>
+                  <a:cs typeface="+mn-cs"/>
+                </a:endParaRPr>
               </a:p>
             </p:txBody>
           </p:sp>
@@ -8510,6 +6198,14 @@
                   </a:rPr>
                   <a:t>Anchor、Pivot、Canvas Scaler 在不同宽高比下稳定</a:t>
                 </a:r>
+                <a:endParaRPr lang="zh-CN" sz="1800" dirty="0">
+                  <a:solidFill>
+                    <a:schemeClr val="dk2"/>
+                  </a:solidFill>
+                  <a:latin typeface="+mn-lt"/>
+                  <a:ea typeface="+mn-ea"/>
+                  <a:cs typeface="+mn-cs"/>
+                </a:endParaRPr>
               </a:p>
             </p:txBody>
           </p:sp>
@@ -8587,6 +6283,14 @@
                   </a:rPr>
                   <a:t>2</a:t>
                 </a:r>
+                <a:endParaRPr lang="en-US" sz="2400" b="1" dirty="0">
+                  <a:solidFill>
+                    <a:srgbClr val="FFFFFF"/>
+                  </a:solidFill>
+                  <a:latin typeface="+mn-lt"/>
+                  <a:ea typeface="+mn-ea"/>
+                  <a:cs typeface="+mn-cs"/>
+                </a:endParaRPr>
               </a:p>
             </p:txBody>
           </p:sp>
@@ -8651,6 +6355,14 @@
                   </a:rPr>
                   <a:t>交互</a:t>
                 </a:r>
+                <a:endParaRPr lang="zh-CN" sz="2400" b="1" dirty="0">
+                  <a:solidFill>
+                    <a:schemeClr val="dk1"/>
+                  </a:solidFill>
+                  <a:latin typeface="+mn-lt"/>
+                  <a:ea typeface="+mn-ea"/>
+                  <a:cs typeface="+mn-cs"/>
+                </a:endParaRPr>
               </a:p>
             </p:txBody>
           </p:sp>
@@ -8691,6 +6403,14 @@
                   </a:rPr>
                   <a:t>鼠标、键盘、手柄都有清楚的导航与焦点反馈</a:t>
                 </a:r>
+                <a:endParaRPr lang="zh-CN" sz="1800" dirty="0">
+                  <a:solidFill>
+                    <a:schemeClr val="dk2"/>
+                  </a:solidFill>
+                  <a:latin typeface="+mn-lt"/>
+                  <a:ea typeface="+mn-ea"/>
+                  <a:cs typeface="+mn-cs"/>
+                </a:endParaRPr>
               </a:p>
             </p:txBody>
           </p:sp>
@@ -8768,6 +6488,14 @@
                   </a:rPr>
                   <a:t>3</a:t>
                 </a:r>
+                <a:endParaRPr lang="en-US" sz="2400" b="1" dirty="0">
+                  <a:solidFill>
+                    <a:srgbClr val="FFFFFF"/>
+                  </a:solidFill>
+                  <a:latin typeface="+mn-lt"/>
+                  <a:ea typeface="+mn-ea"/>
+                  <a:cs typeface="+mn-cs"/>
+                </a:endParaRPr>
               </a:p>
             </p:txBody>
           </p:sp>
@@ -8832,6 +6560,14 @@
                   </a:rPr>
                   <a:t>状态</a:t>
                 </a:r>
+                <a:endParaRPr lang="zh-CN" sz="2400" b="1" dirty="0">
+                  <a:solidFill>
+                    <a:schemeClr val="dk1"/>
+                  </a:solidFill>
+                  <a:latin typeface="+mn-lt"/>
+                  <a:ea typeface="+mn-ea"/>
+                  <a:cs typeface="+mn-cs"/>
+                </a:endParaRPr>
               </a:p>
             </p:txBody>
           </p:sp>
@@ -8872,6 +6608,14 @@
                   </a:rPr>
                   <a:t>正常、悬停、按下、禁用与当前值都可辨认</a:t>
                 </a:r>
+                <a:endParaRPr lang="zh-CN" sz="1800" dirty="0">
+                  <a:solidFill>
+                    <a:schemeClr val="dk2"/>
+                  </a:solidFill>
+                  <a:latin typeface="+mn-lt"/>
+                  <a:ea typeface="+mn-ea"/>
+                  <a:cs typeface="+mn-cs"/>
+                </a:endParaRPr>
               </a:p>
             </p:txBody>
           </p:sp>
@@ -8949,6 +6693,14 @@
                   </a:rPr>
                   <a:t>4</a:t>
                 </a:r>
+                <a:endParaRPr lang="en-US" sz="2400" b="1" dirty="0">
+                  <a:solidFill>
+                    <a:srgbClr val="FFFFFF"/>
+                  </a:solidFill>
+                  <a:latin typeface="+mn-lt"/>
+                  <a:ea typeface="+mn-ea"/>
+                  <a:cs typeface="+mn-cs"/>
+                </a:endParaRPr>
               </a:p>
             </p:txBody>
           </p:sp>
@@ -9013,6 +6765,14 @@
                   </a:rPr>
                   <a:t>事件</a:t>
                 </a:r>
+                <a:endParaRPr lang="zh-CN" sz="2400" b="1" dirty="0">
+                  <a:solidFill>
+                    <a:schemeClr val="dk1"/>
+                  </a:solidFill>
+                  <a:latin typeface="+mn-lt"/>
+                  <a:ea typeface="+mn-ea"/>
+                  <a:cs typeface="+mn-cs"/>
+                </a:endParaRPr>
               </a:p>
             </p:txBody>
           </p:sp>
@@ -9053,6 +6813,14 @@
                   </a:rPr>
                   <a:t>监听添加与移除成对，Inspector 引用未丢失</a:t>
                 </a:r>
+                <a:endParaRPr lang="zh-CN" sz="1800" dirty="0">
+                  <a:solidFill>
+                    <a:schemeClr val="dk2"/>
+                  </a:solidFill>
+                  <a:latin typeface="+mn-lt"/>
+                  <a:ea typeface="+mn-ea"/>
+                  <a:cs typeface="+mn-cs"/>
+                </a:endParaRPr>
               </a:p>
             </p:txBody>
           </p:sp>
@@ -9130,6 +6898,14 @@
                   </a:rPr>
                   <a:t>5</a:t>
                 </a:r>
+                <a:endParaRPr lang="en-US" sz="2400" b="1" dirty="0">
+                  <a:solidFill>
+                    <a:srgbClr val="FFFFFF"/>
+                  </a:solidFill>
+                  <a:latin typeface="+mn-lt"/>
+                  <a:ea typeface="+mn-ea"/>
+                  <a:cs typeface="+mn-cs"/>
+                </a:endParaRPr>
               </a:p>
             </p:txBody>
           </p:sp>
@@ -9196,6 +6972,14 @@
                   </a:rPr>
                   <a:t>性能</a:t>
                 </a:r>
+                <a:endParaRPr lang="zh-CN" sz="2400" b="1" dirty="0">
+                  <a:solidFill>
+                    <a:schemeClr val="dk1"/>
+                  </a:solidFill>
+                  <a:latin typeface="+mn-lt"/>
+                  <a:ea typeface="+mn-ea"/>
+                  <a:cs typeface="+mn-cs"/>
+                </a:endParaRPr>
               </a:p>
             </p:txBody>
           </p:sp>
@@ -9236,6 +7020,14 @@
                   </a:rPr>
                   <a:t>装饰图关闭 Raycast，RawImage 与纹理批次不过度使用</a:t>
                 </a:r>
+                <a:endParaRPr lang="zh-CN" sz="1800" dirty="0">
+                  <a:solidFill>
+                    <a:schemeClr val="dk2"/>
+                  </a:solidFill>
+                  <a:latin typeface="+mn-lt"/>
+                  <a:ea typeface="+mn-ea"/>
+                  <a:cs typeface="+mn-cs"/>
+                </a:endParaRPr>
               </a:p>
             </p:txBody>
           </p:sp>
@@ -9278,6 +7070,14 @@
               </a:rPr>
               <a:t>会布局、能点击、状态清楚、事件可靠</a:t>
             </a:r>
+            <a:endParaRPr lang="zh-CN" sz="3150" b="1" dirty="0">
+              <a:solidFill>
+                <a:schemeClr val="accent1"/>
+              </a:solidFill>
+              <a:latin typeface="+mj-lt"/>
+              <a:ea typeface="+mj-ea"/>
+              <a:cs typeface="+mj-cs"/>
+            </a:endParaRPr>
           </a:p>
         </p:txBody>
       </p:sp>
@@ -9333,46 +7133,6 @@
         </p:sp>
         <p:sp>
           <p:nvSpPr>
-            <p:cNvPr id="37" name="TextBox 37"/>
-            <p:cNvSpPr txBox="1"/>
-            <p:nvPr/>
-          </p:nvSpPr>
-          <p:spPr>
-            <a:xfrm>
-              <a:off x="564642" y="6521768"/>
-              <a:ext cx="2079933" cy="264033"/>
-            </a:xfrm>
-            <a:prstGeom prst="rect">
-              <a:avLst/>
-            </a:prstGeom>
-            <a:noFill/>
-            <a:ln>
-              <a:noFill/>
-            </a:ln>
-          </p:spPr>
-          <p:txBody>
-            <a:bodyPr wrap="none" lIns="0" tIns="0" rIns="0" bIns="0" anchor="t" anchorCtr="0">
-              <a:spAutoFit/>
-            </a:bodyPr>
-            <a:lstStyle/>
-            <a:p>
-              <a:pPr algn="l"/>
-              <a:r>
-                <a:rPr lang="zh-CN" sz="1350" dirty="0">
-                  <a:solidFill>
-                    <a:schemeClr val="accent5"/>
-                  </a:solidFill>
-                  <a:latin typeface="+mn-lt"/>
-                  <a:ea typeface="+mn-ea"/>
-                  <a:cs typeface="+mn-cs"/>
-                </a:rPr>
-                <a:t>Unity UI 基础 · 完成标准</a:t>
-              </a:r>
-            </a:p>
-          </p:txBody>
-        </p:sp>
-        <p:sp>
-          <p:nvSpPr>
             <p:cNvPr id="38" name="TextBox 38"/>
             <p:cNvSpPr txBox="1"/>
             <p:nvPr/>
@@ -9406,8 +7166,15 @@
                   <a:ea typeface="+mn-ea"/>
                   <a:cs typeface="+mn-cs"/>
                 </a:rPr>
-                <a:t>13</a:t>
               </a:fld>
+              <a:endParaRPr lang="en-US" sz="1350" dirty="0">
+                <a:solidFill>
+                  <a:schemeClr val="accent5"/>
+                </a:solidFill>
+                <a:latin typeface="+mn-lt"/>
+                <a:ea typeface="+mn-ea"/>
+                <a:cs typeface="+mn-cs"/>
+              </a:endParaRPr>
             </a:p>
           </p:txBody>
         </p:sp>
@@ -9417,9 +7184,18 @@
   <p:clrMapOvr>
     <a:masterClrMapping/>
   </p:clrMapOvr>
-  <p:transition p14:dur="400">
-    <p:fade/>
-  </p:transition>
+  <mc:AlternateContent xmlns:mc="http://schemas.openxmlformats.org/markup-compatibility/2006">
+    <mc:Choice xmlns:p14="http://schemas.microsoft.com/office/powerpoint/2010/main" Requires="p14">
+      <p:transition p14:dur="400">
+        <p:fade/>
+      </p:transition>
+    </mc:Choice>
+    <mc:Fallback>
+      <p:transition>
+        <p:fade/>
+      </p:transition>
+    </mc:Fallback>
+  </mc:AlternateContent>
 </p:sld>
 </file>
 
@@ -9477,6 +7253,14 @@
               </a:rPr>
               <a:t>UGUI 的四层结构：空间、输入、控件、行为</a:t>
             </a:r>
+            <a:endParaRPr lang="zh-CN" sz="4200" b="1" dirty="0">
+              <a:solidFill>
+                <a:schemeClr val="dk1"/>
+              </a:solidFill>
+              <a:latin typeface="+mj-lt"/>
+              <a:ea typeface="+mj-ea"/>
+              <a:cs typeface="+mj-cs"/>
+            </a:endParaRPr>
           </a:p>
         </p:txBody>
       </p:sp>
@@ -9517,6 +7301,14 @@
               </a:rPr>
               <a:t>把职责分清，UI 问题就更容易定位</a:t>
             </a:r>
+            <a:endParaRPr lang="zh-CN" sz="1800" dirty="0">
+              <a:solidFill>
+                <a:schemeClr val="dk2"/>
+              </a:solidFill>
+              <a:latin typeface="+mn-lt"/>
+              <a:ea typeface="+mn-ea"/>
+              <a:cs typeface="+mn-cs"/>
+            </a:endParaRPr>
           </a:p>
         </p:txBody>
       </p:sp>
@@ -9884,6 +7676,14 @@
                   </a:rPr>
                   <a:t>Canvas：布局与渲染空间</a:t>
                 </a:r>
+                <a:endParaRPr lang="zh-CN" sz="2400" b="1" dirty="0">
+                  <a:solidFill>
+                    <a:srgbClr val="FFFFFF"/>
+                  </a:solidFill>
+                  <a:latin typeface="+mn-lt"/>
+                  <a:ea typeface="+mn-ea"/>
+                  <a:cs typeface="+mn-cs"/>
+                </a:endParaRPr>
               </a:p>
             </p:txBody>
           </p:sp>
@@ -9924,6 +7724,14 @@
                   </a:rPr>
                   <a:t>决定 UI 在屏幕或 3D 世界中如何存在</a:t>
                 </a:r>
+                <a:endParaRPr lang="zh-CN" sz="1800" dirty="0">
+                  <a:solidFill>
+                    <a:srgbClr val="FFFFFF"/>
+                  </a:solidFill>
+                  <a:latin typeface="+mn-lt"/>
+                  <a:ea typeface="+mn-ea"/>
+                  <a:cs typeface="+mn-cs"/>
+                </a:endParaRPr>
               </a:p>
             </p:txBody>
           </p:sp>
@@ -10097,6 +7905,14 @@
                   </a:rPr>
                   <a:t>EventSystem：输入事件调度</a:t>
                 </a:r>
+                <a:endParaRPr lang="zh-CN" sz="2400" b="1" dirty="0">
+                  <a:solidFill>
+                    <a:srgbClr val="FFFFFF"/>
+                  </a:solidFill>
+                  <a:latin typeface="+mn-lt"/>
+                  <a:ea typeface="+mn-ea"/>
+                  <a:cs typeface="+mn-cs"/>
+                </a:endParaRPr>
               </a:p>
             </p:txBody>
           </p:sp>
@@ -10137,6 +7953,14 @@
                   </a:rPr>
                   <a:t>维护选中对象，并把鼠标、键盘、手柄事件送出去</a:t>
                 </a:r>
+                <a:endParaRPr lang="zh-CN" sz="1800" dirty="0">
+                  <a:solidFill>
+                    <a:srgbClr val="FFFFFF"/>
+                  </a:solidFill>
+                  <a:latin typeface="+mn-lt"/>
+                  <a:ea typeface="+mn-ea"/>
+                  <a:cs typeface="+mn-cs"/>
+                </a:endParaRPr>
               </a:p>
             </p:txBody>
           </p:sp>
@@ -10390,6 +8214,14 @@
                   </a:rPr>
                   <a:t>Controls：显示、状态与交互</a:t>
                 </a:r>
+                <a:endParaRPr lang="zh-CN" sz="2400" b="1" dirty="0">
+                  <a:solidFill>
+                    <a:srgbClr val="FFFFFF"/>
+                  </a:solidFill>
+                  <a:latin typeface="+mn-lt"/>
+                  <a:ea typeface="+mn-ea"/>
+                  <a:cs typeface="+mn-cs"/>
+                </a:endParaRPr>
               </a:p>
             </p:txBody>
           </p:sp>
@@ -10430,6 +8262,14 @@
                   </a:rPr>
                   <a:t>Button、Image、RawImage、Toggle、Dropdown</a:t>
                 </a:r>
+                <a:endParaRPr lang="zh-CN" sz="1800" dirty="0">
+                  <a:solidFill>
+                    <a:srgbClr val="FFFFFF"/>
+                  </a:solidFill>
+                  <a:latin typeface="+mn-lt"/>
+                  <a:ea typeface="+mn-ea"/>
+                  <a:cs typeface="+mn-cs"/>
+                </a:endParaRPr>
               </a:p>
             </p:txBody>
           </p:sp>
@@ -10725,6 +8565,14 @@
                   </a:rPr>
                   <a:t>Behaviour：真正的游戏行为</a:t>
                 </a:r>
+                <a:endParaRPr lang="zh-CN" sz="2400" b="1" dirty="0">
+                  <a:solidFill>
+                    <a:srgbClr val="FFFFFF"/>
+                  </a:solidFill>
+                  <a:latin typeface="+mn-lt"/>
+                  <a:ea typeface="+mn-ea"/>
+                  <a:cs typeface="+mn-cs"/>
+                </a:endParaRPr>
               </a:p>
             </p:txBody>
           </p:sp>
@@ -10765,6 +8613,14 @@
                   </a:rPr>
                   <a:t>通过 Inspector 事件或脚本监听执行逻辑</a:t>
                 </a:r>
+                <a:endParaRPr lang="zh-CN" sz="1800" dirty="0">
+                  <a:solidFill>
+                    <a:srgbClr val="FFFFFF"/>
+                  </a:solidFill>
+                  <a:latin typeface="+mn-lt"/>
+                  <a:ea typeface="+mn-ea"/>
+                  <a:cs typeface="+mn-cs"/>
+                </a:endParaRPr>
               </a:p>
             </p:txBody>
           </p:sp>
@@ -10822,46 +8678,6 @@
         </p:sp>
         <p:sp>
           <p:nvSpPr>
-            <p:cNvPr id="36" name="TextBox 36"/>
-            <p:cNvSpPr txBox="1"/>
-            <p:nvPr/>
-          </p:nvSpPr>
-          <p:spPr>
-            <a:xfrm>
-              <a:off x="564642" y="6521768"/>
-              <a:ext cx="1761134" cy="264033"/>
-            </a:xfrm>
-            <a:prstGeom prst="rect">
-              <a:avLst/>
-            </a:prstGeom>
-            <a:noFill/>
-            <a:ln>
-              <a:noFill/>
-            </a:ln>
-          </p:spPr>
-          <p:txBody>
-            <a:bodyPr wrap="none" lIns="0" tIns="0" rIns="0" bIns="0" anchor="t" anchorCtr="0">
-              <a:spAutoFit/>
-            </a:bodyPr>
-            <a:lstStyle/>
-            <a:p>
-              <a:pPr algn="l"/>
-              <a:r>
-                <a:rPr lang="zh-CN" sz="1350" dirty="0">
-                  <a:solidFill>
-                    <a:schemeClr val="accent5"/>
-                  </a:solidFill>
-                  <a:latin typeface="+mn-lt"/>
-                  <a:ea typeface="+mn-ea"/>
-                  <a:cs typeface="+mn-cs"/>
-                </a:rPr>
-                <a:t>UGUI · 四层职责模型</a:t>
-              </a:r>
-            </a:p>
-          </p:txBody>
-        </p:sp>
-        <p:sp>
-          <p:nvSpPr>
             <p:cNvPr id="37" name="TextBox 37"/>
             <p:cNvSpPr txBox="1"/>
             <p:nvPr/>
@@ -10897,6 +8713,14 @@
                 </a:rPr>
                 <a:t>02</a:t>
               </a:r>
+              <a:endParaRPr lang="en-US" sz="1350" dirty="0">
+                <a:solidFill>
+                  <a:schemeClr val="accent5"/>
+                </a:solidFill>
+                <a:latin typeface="+mn-lt"/>
+                <a:ea typeface="+mn-ea"/>
+                <a:cs typeface="+mn-cs"/>
+              </a:endParaRPr>
             </a:p>
           </p:txBody>
         </p:sp>
@@ -10906,9 +8730,18 @@
   <p:clrMapOvr>
     <a:masterClrMapping/>
   </p:clrMapOvr>
-  <p:transition xmlns:p14="http://schemas.microsoft.com/office/powerpoint/2010/main" p14:dur="400">
-    <p:fade/>
-  </p:transition>
+  <mc:AlternateContent xmlns:mc="http://schemas.openxmlformats.org/markup-compatibility/2006">
+    <mc:Choice xmlns:p14="http://schemas.microsoft.com/office/powerpoint/2010/main" Requires="p14">
+      <p:transition p14:dur="400">
+        <p:fade/>
+      </p:transition>
+    </mc:Choice>
+    <mc:Fallback>
+      <p:transition>
+        <p:fade/>
+      </p:transition>
+    </mc:Fallback>
+  </mc:AlternateContent>
 </p:sld>
 </file>
 
@@ -10966,6 +8799,14 @@
               </a:rPr>
               <a:t>Canvas 模式：贴在屏幕上，还是放进世界里？</a:t>
             </a:r>
+            <a:endParaRPr lang="zh-CN" sz="4200" b="1" dirty="0">
+              <a:solidFill>
+                <a:schemeClr val="dk1"/>
+              </a:solidFill>
+              <a:latin typeface="+mj-lt"/>
+              <a:ea typeface="+mj-ea"/>
+              <a:cs typeface="+mj-cs"/>
+            </a:endParaRPr>
           </a:p>
         </p:txBody>
       </p:sp>
@@ -11006,6 +8847,14 @@
               </a:rPr>
               <a:t>选择 Render Mode，就是选择 UI 所在的空间</a:t>
             </a:r>
+            <a:endParaRPr lang="zh-CN" sz="1800" dirty="0">
+              <a:solidFill>
+                <a:schemeClr val="dk2"/>
+              </a:solidFill>
+              <a:latin typeface="+mn-lt"/>
+              <a:ea typeface="+mn-ea"/>
+              <a:cs typeface="+mn-cs"/>
+            </a:endParaRPr>
           </a:p>
         </p:txBody>
       </p:sp>
@@ -11399,6 +9248,14 @@
                   </a:rPr>
                   <a:t>Screen Space - Overlay</a:t>
                 </a:r>
+                <a:endParaRPr lang="en-US" sz="2700" b="1" dirty="0">
+                  <a:solidFill>
+                    <a:srgbClr val="FFFFFF"/>
+                  </a:solidFill>
+                  <a:latin typeface="+mn-lt"/>
+                  <a:ea typeface="+mn-ea"/>
+                  <a:cs typeface="+mn-cs"/>
+                </a:endParaRPr>
               </a:p>
             </p:txBody>
           </p:sp>
@@ -11439,6 +9296,14 @@
                   </a:rPr>
                   <a:t>最适合菜单与 HUD</a:t>
                 </a:r>
+                <a:endParaRPr lang="zh-CN" sz="2400" b="1" dirty="0">
+                  <a:solidFill>
+                    <a:schemeClr val="dk1"/>
+                  </a:solidFill>
+                  <a:latin typeface="+mn-lt"/>
+                  <a:ea typeface="+mn-ea"/>
+                  <a:cs typeface="+mn-cs"/>
+                </a:endParaRPr>
               </a:p>
             </p:txBody>
           </p:sp>
@@ -11467,7 +9332,7 @@
               </a:bodyPr>
               <a:lstStyle/>
               <a:p>
-                <a:pPr algn="l" marL="194310" indent="-194310">
+                <a:pPr marL="194310" indent="-194310" algn="l">
                   <a:buClr>
                     <a:schemeClr val="dk2"/>
                   </a:buClr>
@@ -11486,6 +9351,14 @@
                   </a:rPr>
                   <a:t>不需要渲染摄像机</a:t>
                 </a:r>
+                <a:endParaRPr lang="zh-CN" sz="1800" dirty="0">
+                  <a:solidFill>
+                    <a:schemeClr val="dk2"/>
+                  </a:solidFill>
+                  <a:latin typeface="+mn-lt"/>
+                  <a:ea typeface="+mn-ea"/>
+                  <a:cs typeface="+mn-cs"/>
+                </a:endParaRPr>
               </a:p>
             </p:txBody>
           </p:sp>
@@ -11514,7 +9387,7 @@
               </a:bodyPr>
               <a:lstStyle/>
               <a:p>
-                <a:pPr algn="l" marL="194310" indent="-194310">
+                <a:pPr marL="194310" indent="-194310" algn="l">
                   <a:buClr>
                     <a:schemeClr val="dk2"/>
                   </a:buClr>
@@ -11533,6 +9406,14 @@
                   </a:rPr>
                   <a:t>不受 3D 场景遮挡</a:t>
                 </a:r>
+                <a:endParaRPr lang="zh-CN" sz="1800" dirty="0">
+                  <a:solidFill>
+                    <a:schemeClr val="dk2"/>
+                  </a:solidFill>
+                  <a:latin typeface="+mn-lt"/>
+                  <a:ea typeface="+mn-ea"/>
+                  <a:cs typeface="+mn-cs"/>
+                </a:endParaRPr>
               </a:p>
             </p:txBody>
           </p:sp>
@@ -11561,7 +9442,7 @@
               </a:bodyPr>
               <a:lstStyle/>
               <a:p>
-                <a:pPr algn="l" marL="194310" indent="-194310">
+                <a:pPr marL="194310" indent="-194310" algn="l">
                   <a:buClr>
                     <a:schemeClr val="dk2"/>
                   </a:buClr>
@@ -11580,6 +9461,14 @@
                   </a:rPr>
                   <a:t>由屏幕与 Canvas Scaler 决定尺寸</a:t>
                 </a:r>
+                <a:endParaRPr lang="zh-CN" sz="1800" dirty="0">
+                  <a:solidFill>
+                    <a:schemeClr val="dk2"/>
+                  </a:solidFill>
+                  <a:latin typeface="+mn-lt"/>
+                  <a:ea typeface="+mn-ea"/>
+                  <a:cs typeface="+mn-cs"/>
+                </a:endParaRPr>
               </a:p>
             </p:txBody>
           </p:sp>
@@ -11644,6 +9533,14 @@
                   </a:rPr>
                   <a:t>适配重点</a:t>
                 </a:r>
+                <a:endParaRPr lang="zh-CN" sz="1800" dirty="0">
+                  <a:solidFill>
+                    <a:schemeClr val="accent1"/>
+                  </a:solidFill>
+                  <a:latin typeface="+mn-lt"/>
+                  <a:ea typeface="+mn-ea"/>
+                  <a:cs typeface="+mn-cs"/>
+                </a:endParaRPr>
               </a:p>
             </p:txBody>
           </p:sp>
@@ -11684,6 +9581,14 @@
                   </a:rPr>
                   <a:t>分辨率 + 锚点</a:t>
                 </a:r>
+                <a:endParaRPr lang="zh-CN" sz="2400" b="1" dirty="0">
+                  <a:solidFill>
+                    <a:schemeClr val="accent1"/>
+                  </a:solidFill>
+                  <a:latin typeface="+mn-lt"/>
+                  <a:ea typeface="+mn-ea"/>
+                  <a:cs typeface="+mn-cs"/>
+                </a:endParaRPr>
               </a:p>
             </p:txBody>
           </p:sp>
@@ -12005,6 +9910,14 @@
                   </a:rPr>
                   <a:t>World Space</a:t>
                 </a:r>
+                <a:endParaRPr lang="en-US" sz="2700" b="1" dirty="0">
+                  <a:solidFill>
+                    <a:srgbClr val="FFFFFF"/>
+                  </a:solidFill>
+                  <a:latin typeface="+mn-lt"/>
+                  <a:ea typeface="+mn-ea"/>
+                  <a:cs typeface="+mn-cs"/>
+                </a:endParaRPr>
               </a:p>
             </p:txBody>
           </p:sp>
@@ -12045,6 +9958,14 @@
                   </a:rPr>
                   <a:t>最适合世界面板与头顶 UI</a:t>
                 </a:r>
+                <a:endParaRPr lang="zh-CN" sz="2400" b="1" dirty="0">
+                  <a:solidFill>
+                    <a:schemeClr val="dk1"/>
+                  </a:solidFill>
+                  <a:latin typeface="+mn-lt"/>
+                  <a:ea typeface="+mn-ea"/>
+                  <a:cs typeface="+mn-cs"/>
+                </a:endParaRPr>
               </a:p>
             </p:txBody>
           </p:sp>
@@ -12073,7 +9994,7 @@
               </a:bodyPr>
               <a:lstStyle/>
               <a:p>
-                <a:pPr algn="l" marL="194310" indent="-194310">
+                <a:pPr marL="194310" indent="-194310" algn="l">
                   <a:buClr>
                     <a:schemeClr val="dk2"/>
                   </a:buClr>
@@ -12092,6 +10013,14 @@
                   </a:rPr>
                   <a:t>有真实世界位置与尺寸</a:t>
                 </a:r>
+                <a:endParaRPr lang="zh-CN" sz="1800" dirty="0">
+                  <a:solidFill>
+                    <a:schemeClr val="dk2"/>
+                  </a:solidFill>
+                  <a:latin typeface="+mn-lt"/>
+                  <a:ea typeface="+mn-ea"/>
+                  <a:cs typeface="+mn-cs"/>
+                </a:endParaRPr>
               </a:p>
             </p:txBody>
           </p:sp>
@@ -12120,7 +10049,7 @@
               </a:bodyPr>
               <a:lstStyle/>
               <a:p>
-                <a:pPr algn="l" marL="194310" indent="-194310">
+                <a:pPr marL="194310" indent="-194310" algn="l">
                   <a:buClr>
                     <a:schemeClr val="dk2"/>
                   </a:buClr>
@@ -12139,6 +10068,14 @@
                   </a:rPr>
                   <a:t>受距离、角度、遮挡影响</a:t>
                 </a:r>
+                <a:endParaRPr lang="zh-CN" sz="1800" dirty="0">
+                  <a:solidFill>
+                    <a:schemeClr val="dk2"/>
+                  </a:solidFill>
+                  <a:latin typeface="+mn-lt"/>
+                  <a:ea typeface="+mn-ea"/>
+                  <a:cs typeface="+mn-cs"/>
+                </a:endParaRPr>
               </a:p>
             </p:txBody>
           </p:sp>
@@ -12167,7 +10104,7 @@
               </a:bodyPr>
               <a:lstStyle/>
               <a:p>
-                <a:pPr algn="l" marL="194310" indent="-194310">
+                <a:pPr marL="194310" indent="-194310" algn="l">
                   <a:buClr>
                     <a:schemeClr val="dk2"/>
                   </a:buClr>
@@ -12186,6 +10123,14 @@
                   </a:rPr>
                   <a:t>需要 Event Camera 与正确缩放</a:t>
                 </a:r>
+                <a:endParaRPr lang="zh-CN" sz="1800" dirty="0">
+                  <a:solidFill>
+                    <a:schemeClr val="dk2"/>
+                  </a:solidFill>
+                  <a:latin typeface="+mn-lt"/>
+                  <a:ea typeface="+mn-ea"/>
+                  <a:cs typeface="+mn-cs"/>
+                </a:endParaRPr>
               </a:p>
             </p:txBody>
           </p:sp>
@@ -12250,6 +10195,14 @@
                   </a:rPr>
                   <a:t>适配重点</a:t>
                 </a:r>
+                <a:endParaRPr lang="zh-CN" sz="1800" dirty="0">
+                  <a:solidFill>
+                    <a:srgbClr val="2F8F6A"/>
+                  </a:solidFill>
+                  <a:latin typeface="+mn-lt"/>
+                  <a:ea typeface="+mn-ea"/>
+                  <a:cs typeface="+mn-cs"/>
+                </a:endParaRPr>
               </a:p>
             </p:txBody>
           </p:sp>
@@ -12290,6 +10243,14 @@
                   </a:rPr>
                   <a:t>尺寸 + 朝向 + 射线</a:t>
                 </a:r>
+                <a:endParaRPr lang="zh-CN" sz="2400" b="1" dirty="0">
+                  <a:solidFill>
+                    <a:srgbClr val="2F8F6A"/>
+                  </a:solidFill>
+                  <a:latin typeface="+mn-lt"/>
+                  <a:ea typeface="+mn-ea"/>
+                  <a:cs typeface="+mn-cs"/>
+                </a:endParaRPr>
               </a:p>
             </p:txBody>
           </p:sp>
@@ -12347,46 +10308,6 @@
         </p:sp>
         <p:sp>
           <p:nvSpPr>
-            <p:cNvPr id="39" name="TextBox 39"/>
-            <p:cNvSpPr txBox="1"/>
-            <p:nvPr/>
-          </p:nvSpPr>
-          <p:spPr>
-            <a:xfrm>
-              <a:off x="564642" y="6521768"/>
-              <a:ext cx="1933024" cy="264033"/>
-            </a:xfrm>
-            <a:prstGeom prst="rect">
-              <a:avLst/>
-            </a:prstGeom>
-            <a:noFill/>
-            <a:ln>
-              <a:noFill/>
-            </a:ln>
-          </p:spPr>
-          <p:txBody>
-            <a:bodyPr wrap="none" lIns="0" tIns="0" rIns="0" bIns="0" anchor="t" anchorCtr="0">
-              <a:spAutoFit/>
-            </a:bodyPr>
-            <a:lstStyle/>
-            <a:p>
-              <a:pPr algn="l"/>
-              <a:r>
-                <a:rPr lang="en-US" sz="1350" dirty="0">
-                  <a:solidFill>
-                    <a:schemeClr val="accent5"/>
-                  </a:solidFill>
-                  <a:latin typeface="+mn-lt"/>
-                  <a:ea typeface="+mn-ea"/>
-                  <a:cs typeface="+mn-cs"/>
-                </a:rPr>
-                <a:t>Canvas · Render Mode</a:t>
-              </a:r>
-            </a:p>
-          </p:txBody>
-        </p:sp>
-        <p:sp>
-          <p:nvSpPr>
             <p:cNvPr id="40" name="TextBox 40"/>
             <p:cNvSpPr txBox="1"/>
             <p:nvPr/>
@@ -12422,6 +10343,14 @@
                 </a:rPr>
                 <a:t>03</a:t>
               </a:r>
+              <a:endParaRPr lang="en-US" sz="1350" dirty="0">
+                <a:solidFill>
+                  <a:schemeClr val="accent5"/>
+                </a:solidFill>
+                <a:latin typeface="+mn-lt"/>
+                <a:ea typeface="+mn-ea"/>
+                <a:cs typeface="+mn-cs"/>
+              </a:endParaRPr>
             </a:p>
           </p:txBody>
         </p:sp>
@@ -12431,9 +10360,18 @@
   <p:clrMapOvr>
     <a:masterClrMapping/>
   </p:clrMapOvr>
-  <p:transition xmlns:p14="http://schemas.microsoft.com/office/powerpoint/2010/main" p14:dur="400">
-    <p:fade/>
-  </p:transition>
+  <mc:AlternateContent xmlns:mc="http://schemas.openxmlformats.org/markup-compatibility/2006">
+    <mc:Choice xmlns:p14="http://schemas.microsoft.com/office/powerpoint/2010/main" Requires="p14">
+      <p:transition p14:dur="400">
+        <p:fade/>
+      </p:transition>
+    </mc:Choice>
+    <mc:Fallback>
+      <p:transition>
+        <p:fade/>
+      </p:transition>
+    </mc:Fallback>
+  </mc:AlternateContent>
 </p:sld>
 </file>
 
@@ -12491,6 +10429,14 @@
               </a:rPr>
               <a:t>RectTransform：适配的关键是“相对关系”</a:t>
             </a:r>
+            <a:endParaRPr lang="zh-CN" sz="4200" b="1" dirty="0">
+              <a:solidFill>
+                <a:schemeClr val="dk1"/>
+              </a:solidFill>
+              <a:latin typeface="+mj-lt"/>
+              <a:ea typeface="+mj-ea"/>
+              <a:cs typeface="+mj-cs"/>
+            </a:endParaRPr>
           </a:p>
         </p:txBody>
       </p:sp>
@@ -12531,6 +10477,14 @@
               </a:rPr>
               <a:t>别先写死坐标，先把 Anchor 与 Pivot 放对</a:t>
             </a:r>
+            <a:endParaRPr lang="zh-CN" sz="1800" dirty="0">
+              <a:solidFill>
+                <a:schemeClr val="dk2"/>
+              </a:solidFill>
+              <a:latin typeface="+mn-lt"/>
+              <a:ea typeface="+mn-ea"/>
+              <a:cs typeface="+mn-cs"/>
+            </a:endParaRPr>
           </a:p>
         </p:txBody>
       </p:sp>
@@ -12611,6 +10565,14 @@
                 </a:rPr>
                 <a:t>父矩形与 UI 元素</a:t>
               </a:r>
+              <a:endParaRPr lang="zh-CN" sz="2700" b="1" dirty="0">
+                <a:solidFill>
+                  <a:schemeClr val="accent1"/>
+                </a:solidFill>
+                <a:latin typeface="+mn-lt"/>
+                <a:ea typeface="+mn-ea"/>
+                <a:cs typeface="+mn-cs"/>
+              </a:endParaRPr>
             </a:p>
           </p:txBody>
         </p:sp>
@@ -12780,6 +10742,14 @@
                 </a:rPr>
                 <a:t>Anchor</a:t>
               </a:r>
+              <a:endParaRPr lang="en-US" sz="1800" dirty="0">
+                <a:solidFill>
+                  <a:srgbClr val="8C5A00"/>
+                </a:solidFill>
+                <a:latin typeface="+mn-lt"/>
+                <a:ea typeface="+mn-ea"/>
+                <a:cs typeface="+mn-cs"/>
+              </a:endParaRPr>
             </a:p>
           </p:txBody>
         </p:sp>
@@ -12866,6 +10836,14 @@
                 </a:rPr>
                 <a:t>Pivot</a:t>
               </a:r>
+              <a:endParaRPr lang="en-US" sz="1800" dirty="0">
+                <a:solidFill>
+                  <a:srgbClr val="2F8F6A"/>
+                </a:solidFill>
+                <a:latin typeface="+mn-lt"/>
+                <a:ea typeface="+mn-ea"/>
+                <a:cs typeface="+mn-cs"/>
+              </a:endParaRPr>
             </a:p>
           </p:txBody>
         </p:sp>
@@ -12944,6 +10922,14 @@
                 </a:rPr>
                 <a:t>Anchored Position 是相对 Anchor 的偏移</a:t>
               </a:r>
+              <a:endParaRPr lang="zh-CN" sz="1800" dirty="0">
+                <a:solidFill>
+                  <a:schemeClr val="dk2"/>
+                </a:solidFill>
+                <a:latin typeface="+mn-lt"/>
+                <a:ea typeface="+mn-ea"/>
+                <a:cs typeface="+mn-cs"/>
+              </a:endParaRPr>
             </a:p>
           </p:txBody>
         </p:sp>
@@ -13252,6 +11238,14 @@
                 </a:rPr>
                 <a:t>Canvas Scaler</a:t>
               </a:r>
+              <a:endParaRPr lang="en-US" sz="2700" b="1" dirty="0">
+                <a:solidFill>
+                  <a:schemeClr val="dk1"/>
+                </a:solidFill>
+                <a:latin typeface="+mn-lt"/>
+                <a:ea typeface="+mn-ea"/>
+                <a:cs typeface="+mn-cs"/>
+              </a:endParaRPr>
             </a:p>
           </p:txBody>
         </p:sp>
@@ -13316,6 +11310,14 @@
                 </a:rPr>
                 <a:t>UI Scale Mode</a:t>
               </a:r>
+              <a:endParaRPr lang="en-US" sz="1800" dirty="0">
+                <a:solidFill>
+                  <a:schemeClr val="dk2"/>
+                </a:solidFill>
+                <a:latin typeface="+mn-lt"/>
+                <a:ea typeface="+mn-ea"/>
+                <a:cs typeface="+mn-cs"/>
+              </a:endParaRPr>
             </a:p>
           </p:txBody>
         </p:sp>
@@ -13356,6 +11358,14 @@
                 </a:rPr>
                 <a:t>Scale With Screen Size</a:t>
               </a:r>
+              <a:endParaRPr lang="en-US" sz="1800" b="1" dirty="0">
+                <a:solidFill>
+                  <a:schemeClr val="accent1"/>
+                </a:solidFill>
+                <a:latin typeface="+mn-lt"/>
+                <a:ea typeface="+mn-ea"/>
+                <a:cs typeface="+mn-cs"/>
+              </a:endParaRPr>
             </a:p>
           </p:txBody>
         </p:sp>
@@ -13420,6 +11430,14 @@
                 </a:rPr>
                 <a:t>Reference Resolution</a:t>
               </a:r>
+              <a:endParaRPr lang="en-US" sz="1800" dirty="0">
+                <a:solidFill>
+                  <a:schemeClr val="dk2"/>
+                </a:solidFill>
+                <a:latin typeface="+mn-lt"/>
+                <a:ea typeface="+mn-ea"/>
+                <a:cs typeface="+mn-cs"/>
+              </a:endParaRPr>
             </a:p>
           </p:txBody>
         </p:sp>
@@ -13460,6 +11478,14 @@
                 </a:rPr>
                 <a:t>1920 × 1080</a:t>
               </a:r>
+              <a:endParaRPr lang="en-US" sz="1800" b="1" dirty="0">
+                <a:solidFill>
+                  <a:srgbClr val="2F8F6A"/>
+                </a:solidFill>
+                <a:latin typeface="+mn-lt"/>
+                <a:ea typeface="+mn-ea"/>
+                <a:cs typeface="+mn-cs"/>
+              </a:endParaRPr>
             </a:p>
           </p:txBody>
         </p:sp>
@@ -13524,6 +11550,14 @@
                 </a:rPr>
                 <a:t>Match</a:t>
               </a:r>
+              <a:endParaRPr lang="en-US" sz="1800" dirty="0">
+                <a:solidFill>
+                  <a:schemeClr val="dk2"/>
+                </a:solidFill>
+                <a:latin typeface="+mn-lt"/>
+                <a:ea typeface="+mn-ea"/>
+                <a:cs typeface="+mn-cs"/>
+              </a:endParaRPr>
             </a:p>
           </p:txBody>
         </p:sp>
@@ -13622,6 +11656,14 @@
                 </a:rPr>
                 <a:t>宽 0</a:t>
               </a:r>
+              <a:endParaRPr lang="zh-CN" sz="1800" dirty="0">
+                <a:solidFill>
+                  <a:srgbClr val="8C5A00"/>
+                </a:solidFill>
+                <a:latin typeface="+mn-lt"/>
+                <a:ea typeface="+mn-ea"/>
+                <a:cs typeface="+mn-cs"/>
+              </a:endParaRPr>
             </a:p>
           </p:txBody>
         </p:sp>
@@ -13662,6 +11704,14 @@
                 </a:rPr>
                 <a:t>高 1</a:t>
               </a:r>
+              <a:endParaRPr lang="zh-CN" sz="1800" dirty="0">
+                <a:solidFill>
+                  <a:srgbClr val="8C5A00"/>
+                </a:solidFill>
+                <a:latin typeface="+mn-lt"/>
+                <a:ea typeface="+mn-ea"/>
+                <a:cs typeface="+mn-cs"/>
+              </a:endParaRPr>
             </a:p>
           </p:txBody>
         </p:sp>
@@ -13718,46 +11768,6 @@
         </p:sp>
         <p:sp>
           <p:nvSpPr>
-            <p:cNvPr id="38" name="TextBox 38"/>
-            <p:cNvSpPr txBox="1"/>
-            <p:nvPr/>
-          </p:nvSpPr>
-          <p:spPr>
-            <a:xfrm>
-              <a:off x="564642" y="6521768"/>
-              <a:ext cx="3618538" cy="264033"/>
-            </a:xfrm>
-            <a:prstGeom prst="rect">
-              <a:avLst/>
-            </a:prstGeom>
-            <a:noFill/>
-            <a:ln>
-              <a:noFill/>
-            </a:ln>
-          </p:spPr>
-          <p:txBody>
-            <a:bodyPr wrap="none" lIns="0" tIns="0" rIns="0" bIns="0" anchor="t" anchorCtr="0">
-              <a:spAutoFit/>
-            </a:bodyPr>
-            <a:lstStyle/>
-            <a:p>
-              <a:pPr algn="l"/>
-              <a:r>
-                <a:rPr lang="en-US" sz="1350" dirty="0">
-                  <a:solidFill>
-                    <a:schemeClr val="accent5"/>
-                  </a:solidFill>
-                  <a:latin typeface="+mn-lt"/>
-                  <a:ea typeface="+mn-ea"/>
-                  <a:cs typeface="+mn-cs"/>
-                </a:rPr>
-                <a:t>RectTransform · Anchor / Pivot / Scaler</a:t>
-              </a:r>
-            </a:p>
-          </p:txBody>
-        </p:sp>
-        <p:sp>
-          <p:nvSpPr>
             <p:cNvPr id="39" name="TextBox 39"/>
             <p:cNvSpPr txBox="1"/>
             <p:nvPr/>
@@ -13793,6 +11803,14 @@
                 </a:rPr>
                 <a:t>04</a:t>
               </a:r>
+              <a:endParaRPr lang="en-US" sz="1350" dirty="0">
+                <a:solidFill>
+                  <a:schemeClr val="accent5"/>
+                </a:solidFill>
+                <a:latin typeface="+mn-lt"/>
+                <a:ea typeface="+mn-ea"/>
+                <a:cs typeface="+mn-cs"/>
+              </a:endParaRPr>
             </a:p>
           </p:txBody>
         </p:sp>
@@ -13802,9 +11820,18 @@
   <p:clrMapOvr>
     <a:masterClrMapping/>
   </p:clrMapOvr>
-  <p:transition xmlns:p14="http://schemas.microsoft.com/office/powerpoint/2010/main" p14:dur="400">
-    <p:fade/>
-  </p:transition>
+  <mc:AlternateContent xmlns:mc="http://schemas.openxmlformats.org/markup-compatibility/2006">
+    <mc:Choice xmlns:p14="http://schemas.microsoft.com/office/powerpoint/2010/main" Requires="p14">
+      <p:transition p14:dur="400">
+        <p:fade/>
+      </p:transition>
+    </mc:Choice>
+    <mc:Fallback>
+      <p:transition>
+        <p:fade/>
+      </p:transition>
+    </mc:Fallback>
+  </mc:AlternateContent>
 </p:sld>
 </file>
 
@@ -13862,6 +11889,14 @@
               </a:rPr>
               <a:t>EventSystem：输入如何抵达一个控件</a:t>
             </a:r>
+            <a:endParaRPr lang="zh-CN" sz="4200" b="1" dirty="0">
+              <a:solidFill>
+                <a:schemeClr val="dk1"/>
+              </a:solidFill>
+              <a:latin typeface="+mj-lt"/>
+              <a:ea typeface="+mj-ea"/>
+              <a:cs typeface="+mj-cs"/>
+            </a:endParaRPr>
           </a:p>
         </p:txBody>
       </p:sp>
@@ -13902,6 +11937,14 @@
               </a:rPr>
               <a:t>缺一环，UI 都可能“看得见但点不到”</a:t>
             </a:r>
+            <a:endParaRPr lang="zh-CN" sz="1800" dirty="0">
+              <a:solidFill>
+                <a:schemeClr val="dk2"/>
+              </a:solidFill>
+              <a:latin typeface="+mn-lt"/>
+              <a:ea typeface="+mn-ea"/>
+              <a:cs typeface="+mn-cs"/>
+            </a:endParaRPr>
           </a:p>
         </p:txBody>
       </p:sp>
@@ -13913,7 +11956,7 @@
         </p:nvGrpSpPr>
         <p:grpSpPr>
           <a:xfrm>
-            <a:off x="666750" y="1790700"/>
+            <a:off x="304800" y="1790700"/>
             <a:ext cx="11620500" cy="2667000"/>
             <a:chOff x="666750" y="1790700"/>
             <a:chExt cx="11620500" cy="2667000"/>
@@ -14112,6 +12155,14 @@
                   </a:rPr>
                   <a:t>输入设备</a:t>
                 </a:r>
+                <a:endParaRPr lang="zh-CN" sz="2700" b="1" dirty="0">
+                  <a:solidFill>
+                    <a:schemeClr val="dk1"/>
+                  </a:solidFill>
+                  <a:latin typeface="+mn-lt"/>
+                  <a:ea typeface="+mn-ea"/>
+                  <a:cs typeface="+mn-cs"/>
+                </a:endParaRPr>
               </a:p>
             </p:txBody>
           </p:sp>
@@ -14152,6 +12203,14 @@
                   </a:rPr>
                   <a:t>鼠标 · 键盘</a:t>
                 </a:r>
+                <a:endParaRPr lang="zh-CN" sz="1800" dirty="0">
+                  <a:solidFill>
+                    <a:schemeClr val="dk2"/>
+                  </a:solidFill>
+                  <a:latin typeface="+mn-lt"/>
+                  <a:ea typeface="+mn-ea"/>
+                  <a:cs typeface="+mn-cs"/>
+                </a:endParaRPr>
               </a:p>
             </p:txBody>
           </p:sp>
@@ -14192,6 +12251,14 @@
                   </a:rPr>
                   <a:t>手柄 · 触摸</a:t>
                 </a:r>
+                <a:endParaRPr lang="zh-CN" sz="1800" dirty="0">
+                  <a:solidFill>
+                    <a:schemeClr val="dk2"/>
+                  </a:solidFill>
+                  <a:latin typeface="+mn-lt"/>
+                  <a:ea typeface="+mn-ea"/>
+                  <a:cs typeface="+mn-cs"/>
+                </a:endParaRPr>
               </a:p>
             </p:txBody>
           </p:sp>
@@ -14537,6 +12604,14 @@
                   </a:rPr>
                   <a:t>输入模块</a:t>
                 </a:r>
+                <a:endParaRPr lang="zh-CN" sz="2700" b="1" dirty="0">
+                  <a:solidFill>
+                    <a:schemeClr val="dk1"/>
+                  </a:solidFill>
+                  <a:latin typeface="+mn-lt"/>
+                  <a:ea typeface="+mn-ea"/>
+                  <a:cs typeface="+mn-cs"/>
+                </a:endParaRPr>
               </a:p>
             </p:txBody>
           </p:sp>
@@ -14577,6 +12652,14 @@
                   </a:rPr>
                   <a:t>Input System UI</a:t>
                 </a:r>
+                <a:endParaRPr lang="en-US" sz="1800" dirty="0">
+                  <a:solidFill>
+                    <a:schemeClr val="dk2"/>
+                  </a:solidFill>
+                  <a:latin typeface="+mn-lt"/>
+                  <a:ea typeface="+mn-ea"/>
+                  <a:cs typeface="+mn-cs"/>
+                </a:endParaRPr>
               </a:p>
             </p:txBody>
           </p:sp>
@@ -14617,6 +12700,14 @@
                   </a:rPr>
                   <a:t>Input Module</a:t>
                 </a:r>
+                <a:endParaRPr lang="en-US" sz="1800" dirty="0">
+                  <a:solidFill>
+                    <a:schemeClr val="dk2"/>
+                  </a:solidFill>
+                  <a:latin typeface="+mn-lt"/>
+                  <a:ea typeface="+mn-ea"/>
+                  <a:cs typeface="+mn-cs"/>
+                </a:endParaRPr>
               </a:p>
             </p:txBody>
           </p:sp>
@@ -14840,6 +12931,14 @@
                   </a:rPr>
                   <a:t>EventSystem</a:t>
                 </a:r>
+                <a:endParaRPr lang="en-US" sz="2700" b="1" dirty="0">
+                  <a:solidFill>
+                    <a:schemeClr val="dk1"/>
+                  </a:solidFill>
+                  <a:latin typeface="+mn-lt"/>
+                  <a:ea typeface="+mn-ea"/>
+                  <a:cs typeface="+mn-cs"/>
+                </a:endParaRPr>
               </a:p>
             </p:txBody>
           </p:sp>
@@ -14880,6 +12979,14 @@
                   </a:rPr>
                   <a:t>选中与导航</a:t>
                 </a:r>
+                <a:endParaRPr lang="zh-CN" sz="1800" dirty="0">
+                  <a:solidFill>
+                    <a:schemeClr val="dk2"/>
+                  </a:solidFill>
+                  <a:latin typeface="+mn-lt"/>
+                  <a:ea typeface="+mn-ea"/>
+                  <a:cs typeface="+mn-cs"/>
+                </a:endParaRPr>
               </a:p>
             </p:txBody>
           </p:sp>
@@ -14920,6 +13027,14 @@
                   </a:rPr>
                   <a:t>事件分发</a:t>
                 </a:r>
+                <a:endParaRPr lang="zh-CN" sz="1800" dirty="0">
+                  <a:solidFill>
+                    <a:schemeClr val="dk2"/>
+                  </a:solidFill>
+                  <a:latin typeface="+mn-lt"/>
+                  <a:ea typeface="+mn-ea"/>
+                  <a:cs typeface="+mn-cs"/>
+                </a:endParaRPr>
               </a:p>
             </p:txBody>
           </p:sp>
@@ -15289,6 +13404,14 @@
                   </a:rPr>
                   <a:t>控件</a:t>
                 </a:r>
+                <a:endParaRPr lang="zh-CN" sz="2700" b="1" dirty="0">
+                  <a:solidFill>
+                    <a:schemeClr val="dk1"/>
+                  </a:solidFill>
+                  <a:latin typeface="+mn-lt"/>
+                  <a:ea typeface="+mn-ea"/>
+                  <a:cs typeface="+mn-cs"/>
+                </a:endParaRPr>
               </a:p>
             </p:txBody>
           </p:sp>
@@ -15329,6 +13452,14 @@
                   </a:rPr>
                   <a:t>Graphic Raycaster</a:t>
                 </a:r>
+                <a:endParaRPr lang="en-US" sz="1800" dirty="0">
+                  <a:solidFill>
+                    <a:schemeClr val="dk2"/>
+                  </a:solidFill>
+                  <a:latin typeface="+mn-lt"/>
+                  <a:ea typeface="+mn-ea"/>
+                  <a:cs typeface="+mn-cs"/>
+                </a:endParaRPr>
               </a:p>
             </p:txBody>
           </p:sp>
@@ -15369,6 +13500,14 @@
                   </a:rPr>
                   <a:t>命中并响应</a:t>
                 </a:r>
+                <a:endParaRPr lang="zh-CN" sz="1800" dirty="0">
+                  <a:solidFill>
+                    <a:schemeClr val="dk2"/>
+                  </a:solidFill>
+                  <a:latin typeface="+mn-lt"/>
+                  <a:ea typeface="+mn-ea"/>
+                  <a:cs typeface="+mn-cs"/>
+                </a:endParaRPr>
               </a:p>
             </p:txBody>
           </p:sp>
@@ -15406,8 +13545,8 @@
         </p:nvSpPr>
         <p:spPr>
           <a:xfrm>
-            <a:off x="3076319" y="5151120"/>
-            <a:ext cx="6039361" cy="469392"/>
+            <a:off x="3724909" y="5151120"/>
+            <a:ext cx="4742180" cy="368935"/>
           </a:xfrm>
           <a:prstGeom prst="rect">
             <a:avLst/>
@@ -15433,8 +13572,16 @@
                 <a:ea typeface="+mn-ea"/>
                 <a:cs typeface="+mn-cs"/>
               </a:rPr>
-              <a:t>一个场景通常只保留一个 EventSystem</a:t>
+              <a:t>一个场景只保留一个 EventSystem</a:t>
             </a:r>
+            <a:endParaRPr lang="zh-CN" sz="2400" b="1" dirty="0">
+              <a:solidFill>
+                <a:srgbClr val="FFFFFF"/>
+              </a:solidFill>
+              <a:latin typeface="+mn-lt"/>
+              <a:ea typeface="+mn-ea"/>
+              <a:cs typeface="+mn-cs"/>
+            </a:endParaRPr>
           </a:p>
         </p:txBody>
       </p:sp>
@@ -15490,46 +13637,6 @@
         </p:sp>
         <p:sp>
           <p:nvSpPr>
-            <p:cNvPr id="45" name="TextBox 45"/>
-            <p:cNvSpPr txBox="1"/>
-            <p:nvPr/>
-          </p:nvSpPr>
-          <p:spPr>
-            <a:xfrm>
-              <a:off x="564642" y="6521768"/>
-              <a:ext cx="2474055" cy="264033"/>
-            </a:xfrm>
-            <a:prstGeom prst="rect">
-              <a:avLst/>
-            </a:prstGeom>
-            <a:noFill/>
-            <a:ln>
-              <a:noFill/>
-            </a:ln>
-          </p:spPr>
-          <p:txBody>
-            <a:bodyPr wrap="none" lIns="0" tIns="0" rIns="0" bIns="0" anchor="t" anchorCtr="0">
-              <a:spAutoFit/>
-            </a:bodyPr>
-            <a:lstStyle/>
-            <a:p>
-              <a:pPr algn="l"/>
-              <a:r>
-                <a:rPr lang="zh-CN" sz="1350" dirty="0">
-                  <a:solidFill>
-                    <a:schemeClr val="accent5"/>
-                  </a:solidFill>
-                  <a:latin typeface="+mn-lt"/>
-                  <a:ea typeface="+mn-ea"/>
-                  <a:cs typeface="+mn-cs"/>
-                </a:rPr>
-                <a:t>EventSystem · 输入事件管线</a:t>
-              </a:r>
-            </a:p>
-          </p:txBody>
-        </p:sp>
-        <p:sp>
-          <p:nvSpPr>
             <p:cNvPr id="46" name="TextBox 46"/>
             <p:cNvSpPr txBox="1"/>
             <p:nvPr/>
@@ -15565,6 +13672,14 @@
                 </a:rPr>
                 <a:t>05</a:t>
               </a:r>
+              <a:endParaRPr lang="en-US" sz="1350" dirty="0">
+                <a:solidFill>
+                  <a:schemeClr val="accent5"/>
+                </a:solidFill>
+                <a:latin typeface="+mn-lt"/>
+                <a:ea typeface="+mn-ea"/>
+                <a:cs typeface="+mn-cs"/>
+              </a:endParaRPr>
             </a:p>
           </p:txBody>
         </p:sp>
@@ -15574,9 +13689,18 @@
   <p:clrMapOvr>
     <a:masterClrMapping/>
   </p:clrMapOvr>
-  <p:transition xmlns:p14="http://schemas.microsoft.com/office/powerpoint/2010/main" p14:dur="400">
-    <p:fade/>
-  </p:transition>
+  <mc:AlternateContent xmlns:mc="http://schemas.openxmlformats.org/markup-compatibility/2006">
+    <mc:Choice xmlns:p14="http://schemas.microsoft.com/office/powerpoint/2010/main" Requires="p14">
+      <p:transition p14:dur="400">
+        <p:fade/>
+      </p:transition>
+    </mc:Choice>
+    <mc:Fallback>
+      <p:transition>
+        <p:fade/>
+      </p:transition>
+    </mc:Fallback>
+  </mc:AlternateContent>
 </p:sld>
 </file>
 
@@ -15634,6 +13758,14 @@
               </a:rPr>
               <a:t>UI 看得见但点不到：按顺序排查</a:t>
             </a:r>
+            <a:endParaRPr lang="zh-CN" sz="4200" b="1" dirty="0">
+              <a:solidFill>
+                <a:schemeClr val="dk1"/>
+              </a:solidFill>
+              <a:latin typeface="+mj-lt"/>
+              <a:ea typeface="+mj-ea"/>
+              <a:cs typeface="+mj-cs"/>
+            </a:endParaRPr>
           </a:p>
         </p:txBody>
       </p:sp>
@@ -15674,6 +13806,14 @@
               </a:rPr>
               <a:t>从全局基础设施，到控件自身，再到遮挡关系</a:t>
             </a:r>
+            <a:endParaRPr lang="zh-CN" sz="1800" dirty="0">
+              <a:solidFill>
+                <a:schemeClr val="dk2"/>
+              </a:solidFill>
+              <a:latin typeface="+mn-lt"/>
+              <a:ea typeface="+mn-ea"/>
+              <a:cs typeface="+mn-cs"/>
+            </a:endParaRPr>
           </a:p>
         </p:txBody>
       </p:sp>
@@ -15764,6 +13904,14 @@
                   </a:rPr>
                   <a:t>1</a:t>
                 </a:r>
+                <a:endParaRPr lang="en-US" sz="1800" b="1" dirty="0">
+                  <a:solidFill>
+                    <a:srgbClr val="FFFFFF"/>
+                  </a:solidFill>
+                  <a:latin typeface="+mn-lt"/>
+                  <a:ea typeface="+mn-ea"/>
+                  <a:cs typeface="+mn-cs"/>
+                </a:endParaRPr>
               </a:p>
             </p:txBody>
           </p:sp>
@@ -15828,6 +13976,14 @@
                   </a:rPr>
                   <a:t>场景中有启用的 EventSystem</a:t>
                 </a:r>
+                <a:endParaRPr lang="zh-CN" sz="1800" dirty="0">
+                  <a:solidFill>
+                    <a:schemeClr val="dk1"/>
+                  </a:solidFill>
+                  <a:latin typeface="+mn-lt"/>
+                  <a:ea typeface="+mn-ea"/>
+                  <a:cs typeface="+mn-cs"/>
+                </a:endParaRPr>
               </a:p>
             </p:txBody>
           </p:sp>
@@ -15905,6 +14061,14 @@
                   </a:rPr>
                   <a:t>2</a:t>
                 </a:r>
+                <a:endParaRPr lang="en-US" sz="1800" b="1" dirty="0">
+                  <a:solidFill>
+                    <a:srgbClr val="FFFFFF"/>
+                  </a:solidFill>
+                  <a:latin typeface="+mn-lt"/>
+                  <a:ea typeface="+mn-ea"/>
+                  <a:cs typeface="+mn-cs"/>
+                </a:endParaRPr>
               </a:p>
             </p:txBody>
           </p:sp>
@@ -15969,6 +14133,14 @@
                   </a:rPr>
                   <a:t>输入模块与项目输入系统匹配</a:t>
                 </a:r>
+                <a:endParaRPr lang="zh-CN" sz="1800" dirty="0">
+                  <a:solidFill>
+                    <a:schemeClr val="dk1"/>
+                  </a:solidFill>
+                  <a:latin typeface="+mn-lt"/>
+                  <a:ea typeface="+mn-ea"/>
+                  <a:cs typeface="+mn-cs"/>
+                </a:endParaRPr>
               </a:p>
             </p:txBody>
           </p:sp>
@@ -16046,6 +14218,14 @@
                   </a:rPr>
                   <a:t>3</a:t>
                 </a:r>
+                <a:endParaRPr lang="en-US" sz="1800" b="1" dirty="0">
+                  <a:solidFill>
+                    <a:srgbClr val="FFFFFF"/>
+                  </a:solidFill>
+                  <a:latin typeface="+mn-lt"/>
+                  <a:ea typeface="+mn-ea"/>
+                  <a:cs typeface="+mn-cs"/>
+                </a:endParaRPr>
               </a:p>
             </p:txBody>
           </p:sp>
@@ -16110,6 +14290,14 @@
                   </a:rPr>
                   <a:t>Canvas 上有 Graphic Raycaster</a:t>
                 </a:r>
+                <a:endParaRPr lang="zh-CN" sz="1800" dirty="0">
+                  <a:solidFill>
+                    <a:schemeClr val="dk1"/>
+                  </a:solidFill>
+                  <a:latin typeface="+mn-lt"/>
+                  <a:ea typeface="+mn-ea"/>
+                  <a:cs typeface="+mn-cs"/>
+                </a:endParaRPr>
               </a:p>
             </p:txBody>
           </p:sp>
@@ -16187,6 +14375,14 @@
                   </a:rPr>
                   <a:t>4</a:t>
                 </a:r>
+                <a:endParaRPr lang="en-US" sz="1800" b="1" dirty="0">
+                  <a:solidFill>
+                    <a:srgbClr val="FFFFFF"/>
+                  </a:solidFill>
+                  <a:latin typeface="+mn-lt"/>
+                  <a:ea typeface="+mn-ea"/>
+                  <a:cs typeface="+mn-cs"/>
+                </a:endParaRPr>
               </a:p>
             </p:txBody>
           </p:sp>
@@ -16251,6 +14447,14 @@
                   </a:rPr>
                   <a:t>控件 Interactable 已开启</a:t>
                 </a:r>
+                <a:endParaRPr lang="zh-CN" sz="1800" dirty="0">
+                  <a:solidFill>
+                    <a:schemeClr val="dk1"/>
+                  </a:solidFill>
+                  <a:latin typeface="+mn-lt"/>
+                  <a:ea typeface="+mn-ea"/>
+                  <a:cs typeface="+mn-cs"/>
+                </a:endParaRPr>
               </a:p>
             </p:txBody>
           </p:sp>
@@ -16328,6 +14532,14 @@
                   </a:rPr>
                   <a:t>5</a:t>
                 </a:r>
+                <a:endParaRPr lang="en-US" sz="1800" b="1" dirty="0">
+                  <a:solidFill>
+                    <a:srgbClr val="FFFFFF"/>
+                  </a:solidFill>
+                  <a:latin typeface="+mn-lt"/>
+                  <a:ea typeface="+mn-ea"/>
+                  <a:cs typeface="+mn-cs"/>
+                </a:endParaRPr>
               </a:p>
             </p:txBody>
           </p:sp>
@@ -16392,6 +14604,14 @@
                   </a:rPr>
                   <a:t>CanvasGroup 没有阻止交互</a:t>
                 </a:r>
+                <a:endParaRPr lang="zh-CN" sz="1800" dirty="0">
+                  <a:solidFill>
+                    <a:schemeClr val="dk1"/>
+                  </a:solidFill>
+                  <a:latin typeface="+mn-lt"/>
+                  <a:ea typeface="+mn-ea"/>
+                  <a:cs typeface="+mn-cs"/>
+                </a:endParaRPr>
               </a:p>
             </p:txBody>
           </p:sp>
@@ -16469,6 +14689,14 @@
                   </a:rPr>
                   <a:t>6</a:t>
                 </a:r>
+                <a:endParaRPr lang="en-US" sz="1800" b="1" dirty="0">
+                  <a:solidFill>
+                    <a:srgbClr val="FFFFFF"/>
+                  </a:solidFill>
+                  <a:latin typeface="+mn-lt"/>
+                  <a:ea typeface="+mn-ea"/>
+                  <a:cs typeface="+mn-cs"/>
+                </a:endParaRPr>
               </a:p>
             </p:txBody>
           </p:sp>
@@ -16533,6 +14761,14 @@
                   </a:rPr>
                   <a:t>透明 Image 没有误开 Raycast Target</a:t>
                 </a:r>
+                <a:endParaRPr lang="zh-CN" sz="1800" dirty="0">
+                  <a:solidFill>
+                    <a:schemeClr val="dk1"/>
+                  </a:solidFill>
+                  <a:latin typeface="+mn-lt"/>
+                  <a:ea typeface="+mn-ea"/>
+                  <a:cs typeface="+mn-cs"/>
+                </a:endParaRPr>
               </a:p>
             </p:txBody>
           </p:sp>
@@ -16610,6 +14846,14 @@
                   </a:rPr>
                   <a:t>7</a:t>
                 </a:r>
+                <a:endParaRPr lang="en-US" sz="1800" b="1" dirty="0">
+                  <a:solidFill>
+                    <a:srgbClr val="FFFFFF"/>
+                  </a:solidFill>
+                  <a:latin typeface="+mn-lt"/>
+                  <a:ea typeface="+mn-ea"/>
+                  <a:cs typeface="+mn-cs"/>
+                </a:endParaRPr>
               </a:p>
             </p:txBody>
           </p:sp>
@@ -16674,6 +14918,14 @@
                   </a:rPr>
                   <a:t>World Space 已设置 Event Camera</a:t>
                 </a:r>
+                <a:endParaRPr lang="zh-CN" sz="1800" dirty="0">
+                  <a:solidFill>
+                    <a:schemeClr val="dk1"/>
+                  </a:solidFill>
+                  <a:latin typeface="+mn-lt"/>
+                  <a:ea typeface="+mn-ea"/>
+                  <a:cs typeface="+mn-cs"/>
+                </a:endParaRPr>
               </a:p>
             </p:txBody>
           </p:sp>
@@ -16751,6 +15003,14 @@
                   </a:rPr>
                   <a:t>8</a:t>
                 </a:r>
+                <a:endParaRPr lang="en-US" sz="1800" b="1" dirty="0">
+                  <a:solidFill>
+                    <a:srgbClr val="FFFFFF"/>
+                  </a:solidFill>
+                  <a:latin typeface="+mn-lt"/>
+                  <a:ea typeface="+mn-ea"/>
+                  <a:cs typeface="+mn-cs"/>
+                </a:endParaRPr>
               </a:p>
             </p:txBody>
           </p:sp>
@@ -16815,6 +15075,14 @@
                   </a:rPr>
                   <a:t>摄像机能看到 Canvas 所在 Layer</a:t>
                 </a:r>
+                <a:endParaRPr lang="zh-CN" sz="1800" dirty="0">
+                  <a:solidFill>
+                    <a:schemeClr val="dk1"/>
+                  </a:solidFill>
+                  <a:latin typeface="+mn-lt"/>
+                  <a:ea typeface="+mn-ea"/>
+                  <a:cs typeface="+mn-cs"/>
+                </a:endParaRPr>
               </a:p>
             </p:txBody>
           </p:sp>
@@ -16892,6 +15160,14 @@
                   </a:rPr>
                   <a:t>9</a:t>
                 </a:r>
+                <a:endParaRPr lang="en-US" sz="1800" b="1" dirty="0">
+                  <a:solidFill>
+                    <a:srgbClr val="FFFFFF"/>
+                  </a:solidFill>
+                  <a:latin typeface="+mn-lt"/>
+                  <a:ea typeface="+mn-ea"/>
+                  <a:cs typeface="+mn-cs"/>
+                </a:endParaRPr>
               </a:p>
             </p:txBody>
           </p:sp>
@@ -16958,6 +15234,14 @@
                   </a:rPr>
                   <a:t>没有被其他 Canvas 或控件挡住</a:t>
                 </a:r>
+                <a:endParaRPr lang="zh-CN" sz="1800" dirty="0">
+                  <a:solidFill>
+                    <a:schemeClr val="dk1"/>
+                  </a:solidFill>
+                  <a:latin typeface="+mn-lt"/>
+                  <a:ea typeface="+mn-ea"/>
+                  <a:cs typeface="+mn-cs"/>
+                </a:endParaRPr>
               </a:p>
             </p:txBody>
           </p:sp>
@@ -17223,6 +15507,14 @@
                   </a:rPr>
                   <a:t>排错原则</a:t>
                 </a:r>
+                <a:endParaRPr lang="zh-CN" sz="1800" b="1" dirty="0">
+                  <a:solidFill>
+                    <a:srgbClr val="FFFFFF"/>
+                  </a:solidFill>
+                  <a:latin typeface="+mn-lt"/>
+                  <a:ea typeface="+mn-ea"/>
+                  <a:cs typeface="+mn-cs"/>
+                </a:endParaRPr>
               </a:p>
             </p:txBody>
           </p:sp>
@@ -17263,6 +15555,14 @@
                   </a:rPr>
                   <a:t>先系统，后控件；先输入，后遮挡</a:t>
                 </a:r>
+                <a:endParaRPr lang="zh-CN" sz="1800" dirty="0">
+                  <a:solidFill>
+                    <a:srgbClr val="FFFFFF"/>
+                  </a:solidFill>
+                  <a:latin typeface="+mn-lt"/>
+                  <a:ea typeface="+mn-ea"/>
+                  <a:cs typeface="+mn-cs"/>
+                </a:endParaRPr>
               </a:p>
             </p:txBody>
           </p:sp>
@@ -17320,46 +15620,6 @@
         </p:sp>
         <p:sp>
           <p:nvSpPr>
-            <p:cNvPr id="60" name="TextBox 60"/>
-            <p:cNvSpPr txBox="1"/>
-            <p:nvPr/>
-          </p:nvSpPr>
-          <p:spPr>
-            <a:xfrm>
-              <a:off x="564642" y="6521768"/>
-              <a:ext cx="1761134" cy="264033"/>
-            </a:xfrm>
-            <a:prstGeom prst="rect">
-              <a:avLst/>
-            </a:prstGeom>
-            <a:noFill/>
-            <a:ln>
-              <a:noFill/>
-            </a:ln>
-          </p:spPr>
-          <p:txBody>
-            <a:bodyPr wrap="none" lIns="0" tIns="0" rIns="0" bIns="0" anchor="t" anchorCtr="0">
-              <a:spAutoFit/>
-            </a:bodyPr>
-            <a:lstStyle/>
-            <a:p>
-              <a:pPr algn="l"/>
-              <a:r>
-                <a:rPr lang="zh-CN" sz="1350" dirty="0">
-                  <a:solidFill>
-                    <a:schemeClr val="accent5"/>
-                  </a:solidFill>
-                  <a:latin typeface="+mn-lt"/>
-                  <a:ea typeface="+mn-ea"/>
-                  <a:cs typeface="+mn-cs"/>
-                </a:rPr>
-                <a:t>UGUI · 点击问题排查</a:t>
-              </a:r>
-            </a:p>
-          </p:txBody>
-        </p:sp>
-        <p:sp>
-          <p:nvSpPr>
             <p:cNvPr id="61" name="TextBox 61"/>
             <p:cNvSpPr txBox="1"/>
             <p:nvPr/>
@@ -17395,6 +15655,14 @@
                 </a:rPr>
                 <a:t>06</a:t>
               </a:r>
+              <a:endParaRPr lang="en-US" sz="1350" dirty="0">
+                <a:solidFill>
+                  <a:schemeClr val="accent5"/>
+                </a:solidFill>
+                <a:latin typeface="+mn-lt"/>
+                <a:ea typeface="+mn-ea"/>
+                <a:cs typeface="+mn-cs"/>
+              </a:endParaRPr>
             </a:p>
           </p:txBody>
         </p:sp>
@@ -17404,9 +15672,18 @@
   <p:clrMapOvr>
     <a:masterClrMapping/>
   </p:clrMapOvr>
-  <p:transition xmlns:p14="http://schemas.microsoft.com/office/powerpoint/2010/main" p14:dur="400">
-    <p:fade/>
-  </p:transition>
+  <mc:AlternateContent xmlns:mc="http://schemas.openxmlformats.org/markup-compatibility/2006">
+    <mc:Choice xmlns:p14="http://schemas.microsoft.com/office/powerpoint/2010/main" Requires="p14">
+      <p:transition p14:dur="400">
+        <p:fade/>
+      </p:transition>
+    </mc:Choice>
+    <mc:Fallback>
+      <p:transition>
+        <p:fade/>
+      </p:transition>
+    </mc:Fallback>
+  </mc:AlternateContent>
 </p:sld>
 </file>
 
@@ -17464,6 +15741,14 @@
               </a:rPr>
               <a:t>Button：明确状态，执行一次明确操作</a:t>
             </a:r>
+            <a:endParaRPr lang="zh-CN" sz="4200" b="1" dirty="0">
+              <a:solidFill>
+                <a:schemeClr val="dk1"/>
+              </a:solidFill>
+              <a:latin typeface="+mj-lt"/>
+              <a:ea typeface="+mj-ea"/>
+              <a:cs typeface="+mj-cs"/>
+            </a:endParaRPr>
           </a:p>
         </p:txBody>
       </p:sp>
@@ -17504,6 +15789,14 @@
               </a:rPr>
               <a:t>视觉反馈与事件连接同样重要</a:t>
             </a:r>
+            <a:endParaRPr lang="zh-CN" sz="1800" dirty="0">
+              <a:solidFill>
+                <a:schemeClr val="dk2"/>
+              </a:solidFill>
+              <a:latin typeface="+mn-lt"/>
+              <a:ea typeface="+mn-ea"/>
+              <a:cs typeface="+mn-cs"/>
+            </a:endParaRPr>
           </a:p>
         </p:txBody>
       </p:sp>
@@ -17624,6 +15917,14 @@
                   </a:rPr>
                   <a:t>状态与 Transition</a:t>
                 </a:r>
+                <a:endParaRPr lang="zh-CN" sz="2400" b="1" dirty="0">
+                  <a:solidFill>
+                    <a:schemeClr val="accent1"/>
+                  </a:solidFill>
+                  <a:latin typeface="+mn-lt"/>
+                  <a:ea typeface="+mn-ea"/>
+                  <a:cs typeface="+mn-cs"/>
+                </a:endParaRPr>
               </a:p>
             </p:txBody>
           </p:sp>
@@ -17704,6 +16005,14 @@
                     </a:rPr>
                     <a:t>普通</a:t>
                   </a:r>
+                  <a:endParaRPr lang="zh-CN" sz="1800" dirty="0">
+                    <a:solidFill>
+                      <a:schemeClr val="dk1"/>
+                    </a:solidFill>
+                    <a:latin typeface="+mn-lt"/>
+                    <a:ea typeface="+mn-ea"/>
+                    <a:cs typeface="+mn-cs"/>
+                  </a:endParaRPr>
                 </a:p>
               </p:txBody>
             </p:sp>
@@ -17770,6 +16079,14 @@
                     </a:rPr>
                     <a:t>悬停</a:t>
                   </a:r>
+                  <a:endParaRPr lang="zh-CN" sz="1800" dirty="0">
+                    <a:solidFill>
+                      <a:srgbClr val="2F8F6A"/>
+                    </a:solidFill>
+                    <a:latin typeface="+mn-lt"/>
+                    <a:ea typeface="+mn-ea"/>
+                    <a:cs typeface="+mn-cs"/>
+                  </a:endParaRPr>
                 </a:p>
               </p:txBody>
             </p:sp>
@@ -17836,6 +16153,14 @@
                     </a:rPr>
                     <a:t>按下</a:t>
                   </a:r>
+                  <a:endParaRPr lang="zh-CN" sz="1800" dirty="0">
+                    <a:solidFill>
+                      <a:srgbClr val="8C5A00"/>
+                    </a:solidFill>
+                    <a:latin typeface="+mn-lt"/>
+                    <a:ea typeface="+mn-ea"/>
+                    <a:cs typeface="+mn-cs"/>
+                  </a:endParaRPr>
                 </a:p>
               </p:txBody>
             </p:sp>
@@ -17900,6 +16225,14 @@
                     </a:rPr>
                     <a:t>禁用</a:t>
                   </a:r>
+                  <a:endParaRPr lang="zh-CN" sz="1800" dirty="0">
+                    <a:solidFill>
+                      <a:schemeClr val="accent5"/>
+                    </a:solidFill>
+                    <a:latin typeface="+mn-lt"/>
+                    <a:ea typeface="+mn-ea"/>
+                    <a:cs typeface="+mn-cs"/>
+                  </a:endParaRPr>
                 </a:p>
               </p:txBody>
             </p:sp>
@@ -17941,6 +16274,14 @@
                   </a:rPr>
                   <a:t>Color Tint / Sprite / Animation</a:t>
                 </a:r>
+                <a:endParaRPr lang="en-US" sz="1800" dirty="0">
+                  <a:solidFill>
+                    <a:schemeClr val="dk2"/>
+                  </a:solidFill>
+                  <a:latin typeface="+mn-lt"/>
+                  <a:ea typeface="+mn-ea"/>
+                  <a:cs typeface="+mn-cs"/>
+                </a:endParaRPr>
               </a:p>
             </p:txBody>
           </p:sp>
@@ -18022,6 +16363,14 @@
                   </a:rPr>
                   <a:t>Inspector 连接</a:t>
                 </a:r>
+                <a:endParaRPr lang="zh-CN" sz="2400" b="1" dirty="0">
+                  <a:solidFill>
+                    <a:srgbClr val="2F8F6A"/>
+                  </a:solidFill>
+                  <a:latin typeface="+mn-lt"/>
+                  <a:ea typeface="+mn-ea"/>
+                  <a:cs typeface="+mn-cs"/>
+                </a:endParaRPr>
               </a:p>
             </p:txBody>
           </p:sp>
@@ -18062,6 +16411,14 @@
                   </a:rPr>
                   <a:t>On Click() → + → 拖入对象</a:t>
                 </a:r>
+                <a:endParaRPr lang="zh-CN" sz="1800" dirty="0">
+                  <a:solidFill>
+                    <a:schemeClr val="dk2"/>
+                  </a:solidFill>
+                  <a:latin typeface="+mn-lt"/>
+                  <a:ea typeface="+mn-ea"/>
+                  <a:cs typeface="+mn-cs"/>
+                </a:endParaRPr>
               </a:p>
             </p:txBody>
           </p:sp>
@@ -18102,6 +16459,14 @@
                   </a:rPr>
                   <a:t>选择 public 方法</a:t>
                 </a:r>
+                <a:endParaRPr lang="zh-CN" sz="1800" dirty="0">
+                  <a:solidFill>
+                    <a:schemeClr val="dk2"/>
+                  </a:solidFill>
+                  <a:latin typeface="+mn-lt"/>
+                  <a:ea typeface="+mn-ea"/>
+                  <a:cs typeface="+mn-cs"/>
+                </a:endParaRPr>
               </a:p>
             </p:txBody>
           </p:sp>
@@ -18142,6 +16507,14 @@
                   </a:rPr>
                   <a:t>直观，但关系藏在场景中</a:t>
                 </a:r>
+                <a:endParaRPr lang="zh-CN" sz="1800" b="1" dirty="0">
+                  <a:solidFill>
+                    <a:srgbClr val="2F8F6A"/>
+                  </a:solidFill>
+                  <a:latin typeface="+mn-lt"/>
+                  <a:ea typeface="+mn-ea"/>
+                  <a:cs typeface="+mn-cs"/>
+                </a:endParaRPr>
               </a:p>
             </p:txBody>
           </p:sp>
@@ -18223,6 +16596,14 @@
                   </a:rPr>
                   <a:t>脚本监听</a:t>
                 </a:r>
+                <a:endParaRPr lang="zh-CN" sz="2400" b="1" dirty="0">
+                  <a:solidFill>
+                    <a:srgbClr val="8C5A00"/>
+                  </a:solidFill>
+                  <a:latin typeface="+mn-lt"/>
+                  <a:ea typeface="+mn-ea"/>
+                  <a:cs typeface="+mn-cs"/>
+                </a:endParaRPr>
               </a:p>
             </p:txBody>
           </p:sp>
@@ -18257,12 +16638,20 @@
                     <a:solidFill>
                       <a:schemeClr val="dk1"/>
                     </a:solidFill>
-                    <a:latin typeface="Consolas"/>
-                    <a:ea typeface="Consolas"/>
-                    <a:cs typeface="Consolas"/>
+                    <a:latin typeface="Consolas" panose="020B0609020204030204"/>
+                    <a:ea typeface="Consolas" panose="020B0609020204030204"/>
+                    <a:cs typeface="Consolas" panose="020B0609020204030204"/>
                   </a:rPr>
                   <a:t>OnEnable: AddListener</a:t>
                 </a:r>
+                <a:endParaRPr lang="en-US" sz="1800" dirty="0">
+                  <a:solidFill>
+                    <a:schemeClr val="dk1"/>
+                  </a:solidFill>
+                  <a:latin typeface="Consolas" panose="020B0609020204030204"/>
+                  <a:ea typeface="Consolas" panose="020B0609020204030204"/>
+                  <a:cs typeface="Consolas" panose="020B0609020204030204"/>
+                </a:endParaRPr>
               </a:p>
             </p:txBody>
           </p:sp>
@@ -18297,12 +16686,20 @@
                     <a:solidFill>
                       <a:schemeClr val="dk1"/>
                     </a:solidFill>
-                    <a:latin typeface="Consolas"/>
-                    <a:ea typeface="Consolas"/>
-                    <a:cs typeface="Consolas"/>
+                    <a:latin typeface="Consolas" panose="020B0609020204030204"/>
+                    <a:ea typeface="Consolas" panose="020B0609020204030204"/>
+                    <a:cs typeface="Consolas" panose="020B0609020204030204"/>
                   </a:rPr>
                   <a:t>OnDisable: RemoveListener</a:t>
                 </a:r>
+                <a:endParaRPr lang="en-US" sz="1800" dirty="0">
+                  <a:solidFill>
+                    <a:schemeClr val="dk1"/>
+                  </a:solidFill>
+                  <a:latin typeface="Consolas" panose="020B0609020204030204"/>
+                  <a:ea typeface="Consolas" panose="020B0609020204030204"/>
+                  <a:cs typeface="Consolas" panose="020B0609020204030204"/>
+                </a:endParaRPr>
               </a:p>
             </p:txBody>
           </p:sp>
@@ -18343,6 +16740,14 @@
                   </a:rPr>
                   <a:t>避免重复订阅</a:t>
                 </a:r>
+                <a:endParaRPr lang="zh-CN" sz="1800" b="1" dirty="0">
+                  <a:solidFill>
+                    <a:srgbClr val="8C5A00"/>
+                  </a:solidFill>
+                  <a:latin typeface="+mn-lt"/>
+                  <a:ea typeface="+mn-ea"/>
+                  <a:cs typeface="+mn-cs"/>
+                </a:endParaRPr>
               </a:p>
             </p:txBody>
           </p:sp>
@@ -18664,58 +17069,26 @@
                   </a:rPr>
                   <a:t>Button 文案描述结果</a:t>
                 </a:r>
+                <a:endParaRPr lang="zh-CN" sz="2700" b="1" dirty="0">
+                  <a:solidFill>
+                    <a:schemeClr val="dk1"/>
+                  </a:solidFill>
+                  <a:latin typeface="+mn-lt"/>
+                  <a:ea typeface="+mn-ea"/>
+                  <a:cs typeface="+mn-cs"/>
+                </a:endParaRPr>
               </a:p>
             </p:txBody>
           </p:sp>
           <p:sp>
             <p:nvSpPr>
-              <p:cNvPr id="39" name="TextBox 39"/>
-              <p:cNvSpPr txBox="1"/>
-              <p:nvPr/>
-            </p:nvSpPr>
-            <p:spPr>
-              <a:xfrm>
-                <a:off x="2216658" y="4312920"/>
-                <a:ext cx="4256837" cy="469392"/>
-              </a:xfrm>
-              <a:prstGeom prst="rect">
-                <a:avLst/>
-              </a:prstGeom>
-              <a:noFill/>
-              <a:ln>
-                <a:noFill/>
-              </a:ln>
-            </p:spPr>
-            <p:txBody>
-              <a:bodyPr wrap="none" lIns="0" tIns="0" rIns="0" bIns="0" anchor="t" anchorCtr="0">
-                <a:spAutoFit/>
-              </a:bodyPr>
-              <a:lstStyle/>
-              <a:p>
-                <a:pPr algn="l"/>
-                <a:r>
-                  <a:rPr lang="zh-CN" sz="2400" dirty="0">
-                    <a:solidFill>
-                      <a:schemeClr val="dk2"/>
-                    </a:solidFill>
-                    <a:latin typeface="+mn-lt"/>
-                    <a:ea typeface="+mn-ea"/>
-                    <a:cs typeface="+mn-cs"/>
-                  </a:rPr>
-                  <a:t>“保存设置” 比 “确定” 更清楚</a:t>
-                </a:r>
-              </a:p>
-            </p:txBody>
-          </p:sp>
-          <p:sp>
-            <p:nvSpPr>
               <p:cNvPr id="40" name="TextBox 40"/>
               <p:cNvSpPr txBox="1"/>
               <p:nvPr/>
             </p:nvSpPr>
             <p:spPr>
               <a:xfrm>
-                <a:off x="2219706" y="4796790"/>
+                <a:off x="2219706" y="4377690"/>
                 <a:ext cx="6633515" cy="352044"/>
               </a:xfrm>
               <a:prstGeom prst="rect">
@@ -18744,6 +17117,14 @@
                   </a:rPr>
                   <a:t>点击区域足够大 · 禁用时说明原因 · 破坏性操作可确认或撤销</a:t>
                 </a:r>
+                <a:endParaRPr lang="zh-CN" sz="1800" dirty="0">
+                  <a:solidFill>
+                    <a:schemeClr val="dk2"/>
+                  </a:solidFill>
+                  <a:latin typeface="+mn-lt"/>
+                  <a:ea typeface="+mn-ea"/>
+                  <a:cs typeface="+mn-cs"/>
+                </a:endParaRPr>
               </a:p>
             </p:txBody>
           </p:sp>
@@ -18801,46 +17182,6 @@
         </p:sp>
         <p:sp>
           <p:nvSpPr>
-            <p:cNvPr id="44" name="TextBox 44"/>
-            <p:cNvSpPr txBox="1"/>
-            <p:nvPr/>
-          </p:nvSpPr>
-          <p:spPr>
-            <a:xfrm>
-              <a:off x="564642" y="6521768"/>
-              <a:ext cx="2481139" cy="264033"/>
-            </a:xfrm>
-            <a:prstGeom prst="rect">
-              <a:avLst/>
-            </a:prstGeom>
-            <a:noFill/>
-            <a:ln>
-              <a:noFill/>
-            </a:ln>
-          </p:spPr>
-          <p:txBody>
-            <a:bodyPr wrap="none" lIns="0" tIns="0" rIns="0" bIns="0" anchor="t" anchorCtr="0">
-              <a:spAutoFit/>
-            </a:bodyPr>
-            <a:lstStyle/>
-            <a:p>
-              <a:pPr algn="l"/>
-              <a:r>
-                <a:rPr lang="zh-CN" sz="1350" dirty="0">
-                  <a:solidFill>
-                    <a:schemeClr val="accent5"/>
-                  </a:solidFill>
-                  <a:latin typeface="+mn-lt"/>
-                  <a:ea typeface="+mn-ea"/>
-                  <a:cs typeface="+mn-cs"/>
-                </a:rPr>
-                <a:t>Button · 状态与事件生命周期</a:t>
-              </a:r>
-            </a:p>
-          </p:txBody>
-        </p:sp>
-        <p:sp>
-          <p:nvSpPr>
             <p:cNvPr id="45" name="TextBox 45"/>
             <p:cNvSpPr txBox="1"/>
             <p:nvPr/>
@@ -18876,6 +17217,14 @@
                 </a:rPr>
                 <a:t>07</a:t>
               </a:r>
+              <a:endParaRPr lang="en-US" sz="1350" dirty="0">
+                <a:solidFill>
+                  <a:schemeClr val="accent5"/>
+                </a:solidFill>
+                <a:latin typeface="+mn-lt"/>
+                <a:ea typeface="+mn-ea"/>
+                <a:cs typeface="+mn-cs"/>
+              </a:endParaRPr>
             </a:p>
           </p:txBody>
         </p:sp>
@@ -18885,9 +17234,18 @@
   <p:clrMapOvr>
     <a:masterClrMapping/>
   </p:clrMapOvr>
-  <p:transition xmlns:p14="http://schemas.microsoft.com/office/powerpoint/2010/main" p14:dur="400">
-    <p:fade/>
-  </p:transition>
+  <mc:AlternateContent xmlns:mc="http://schemas.openxmlformats.org/markup-compatibility/2006">
+    <mc:Choice xmlns:p14="http://schemas.microsoft.com/office/powerpoint/2010/main" Requires="p14">
+      <p:transition p14:dur="400">
+        <p:fade/>
+      </p:transition>
+    </mc:Choice>
+    <mc:Fallback>
+      <p:transition>
+        <p:fade/>
+      </p:transition>
+    </mc:Fallback>
+  </mc:AlternateContent>
 </p:sld>
 </file>
 
@@ -18945,6 +17303,14 @@
               </a:rPr>
               <a:t>Image：同一张 Sprite，有四种显示方式</a:t>
             </a:r>
+            <a:endParaRPr lang="zh-CN" sz="4200" b="1" dirty="0">
+              <a:solidFill>
+                <a:schemeClr val="dk1"/>
+              </a:solidFill>
+              <a:latin typeface="+mj-lt"/>
+              <a:ea typeface="+mj-ea"/>
+              <a:cs typeface="+mj-cs"/>
+            </a:endParaRPr>
           </a:p>
         </p:txBody>
       </p:sp>
@@ -18985,6 +17351,14 @@
               </a:rPr>
               <a:t>Image Type 决定拉伸、切片、平铺或按比例填充</a:t>
             </a:r>
+            <a:endParaRPr lang="zh-CN" sz="1800" dirty="0">
+              <a:solidFill>
+                <a:schemeClr val="dk2"/>
+              </a:solidFill>
+              <a:latin typeface="+mn-lt"/>
+              <a:ea typeface="+mn-ea"/>
+              <a:cs typeface="+mn-cs"/>
+            </a:endParaRPr>
           </a:p>
         </p:txBody>
       </p:sp>
@@ -19151,6 +17525,14 @@
                   </a:rPr>
                   <a:t>Simple</a:t>
                 </a:r>
+                <a:endParaRPr lang="en-US" sz="2700" b="1" dirty="0">
+                  <a:solidFill>
+                    <a:schemeClr val="accent1"/>
+                  </a:solidFill>
+                  <a:latin typeface="+mn-lt"/>
+                  <a:ea typeface="+mn-ea"/>
+                  <a:cs typeface="+mn-cs"/>
+                </a:endParaRPr>
               </a:p>
             </p:txBody>
           </p:sp>
@@ -19191,6 +17573,14 @@
                   </a:rPr>
                   <a:t>整张拉伸</a:t>
                 </a:r>
+                <a:endParaRPr lang="zh-CN" sz="1800" dirty="0">
+                  <a:solidFill>
+                    <a:schemeClr val="dk2"/>
+                  </a:solidFill>
+                  <a:latin typeface="+mn-lt"/>
+                  <a:ea typeface="+mn-ea"/>
+                  <a:cs typeface="+mn-cs"/>
+                </a:endParaRPr>
               </a:p>
             </p:txBody>
           </p:sp>
@@ -19231,6 +17621,14 @@
                   </a:rPr>
                   <a:t>图标与普通图片</a:t>
                 </a:r>
+                <a:endParaRPr lang="zh-CN" sz="1800" dirty="0">
+                  <a:solidFill>
+                    <a:schemeClr val="dk2"/>
+                  </a:solidFill>
+                  <a:latin typeface="+mn-lt"/>
+                  <a:ea typeface="+mn-ea"/>
+                  <a:cs typeface="+mn-cs"/>
+                </a:endParaRPr>
               </a:p>
             </p:txBody>
           </p:sp>
@@ -19271,6 +17669,14 @@
                   </a:rPr>
                   <a:t>可 Preserve Aspect</a:t>
                 </a:r>
+                <a:endParaRPr lang="zh-CN" sz="1800" b="1" dirty="0">
+                  <a:solidFill>
+                    <a:schemeClr val="dk1"/>
+                  </a:solidFill>
+                  <a:latin typeface="+mn-lt"/>
+                  <a:ea typeface="+mn-ea"/>
+                  <a:cs typeface="+mn-cs"/>
+                </a:endParaRPr>
               </a:p>
             </p:txBody>
           </p:sp>
@@ -19534,6 +17940,14 @@
                   </a:rPr>
                   <a:t>Sliced</a:t>
                 </a:r>
+                <a:endParaRPr lang="en-US" sz="2700" b="1" dirty="0">
+                  <a:solidFill>
+                    <a:srgbClr val="2F8F6A"/>
+                  </a:solidFill>
+                  <a:latin typeface="+mn-lt"/>
+                  <a:ea typeface="+mn-ea"/>
+                  <a:cs typeface="+mn-cs"/>
+                </a:endParaRPr>
               </a:p>
             </p:txBody>
           </p:sp>
@@ -19574,6 +17988,14 @@
                   </a:rPr>
                   <a:t>九宫格</a:t>
                 </a:r>
+                <a:endParaRPr lang="zh-CN" sz="1800" dirty="0">
+                  <a:solidFill>
+                    <a:schemeClr val="dk2"/>
+                  </a:solidFill>
+                  <a:latin typeface="+mn-lt"/>
+                  <a:ea typeface="+mn-ea"/>
+                  <a:cs typeface="+mn-cs"/>
+                </a:endParaRPr>
               </a:p>
             </p:txBody>
           </p:sp>
@@ -19614,6 +18036,14 @@
                   </a:rPr>
                   <a:t>按钮与面板</a:t>
                 </a:r>
+                <a:endParaRPr lang="zh-CN" sz="1800" dirty="0">
+                  <a:solidFill>
+                    <a:schemeClr val="dk2"/>
+                  </a:solidFill>
+                  <a:latin typeface="+mn-lt"/>
+                  <a:ea typeface="+mn-ea"/>
+                  <a:cs typeface="+mn-cs"/>
+                </a:endParaRPr>
               </a:p>
             </p:txBody>
           </p:sp>
@@ -19654,6 +18084,14 @@
                   </a:rPr>
                   <a:t>四角保持形状</a:t>
                 </a:r>
+                <a:endParaRPr lang="zh-CN" sz="1800" b="1" dirty="0">
+                  <a:solidFill>
+                    <a:schemeClr val="dk1"/>
+                  </a:solidFill>
+                  <a:latin typeface="+mn-lt"/>
+                  <a:ea typeface="+mn-ea"/>
+                  <a:cs typeface="+mn-cs"/>
+                </a:endParaRPr>
               </a:p>
             </p:txBody>
           </p:sp>
@@ -19908,6 +18346,14 @@
                   </a:rPr>
                   <a:t>Tiled</a:t>
                 </a:r>
+                <a:endParaRPr lang="en-US" sz="2700" b="1" dirty="0">
+                  <a:solidFill>
+                    <a:srgbClr val="8C5A00"/>
+                  </a:solidFill>
+                  <a:latin typeface="+mn-lt"/>
+                  <a:ea typeface="+mn-ea"/>
+                  <a:cs typeface="+mn-cs"/>
+                </a:endParaRPr>
               </a:p>
             </p:txBody>
           </p:sp>
@@ -19948,6 +18394,14 @@
                   </a:rPr>
                   <a:t>平铺填充</a:t>
                 </a:r>
+                <a:endParaRPr lang="zh-CN" sz="1800" dirty="0">
+                  <a:solidFill>
+                    <a:schemeClr val="dk2"/>
+                  </a:solidFill>
+                  <a:latin typeface="+mn-lt"/>
+                  <a:ea typeface="+mn-ea"/>
+                  <a:cs typeface="+mn-cs"/>
+                </a:endParaRPr>
               </a:p>
             </p:txBody>
           </p:sp>
@@ -19988,6 +18442,14 @@
                   </a:rPr>
                   <a:t>重复纹理</a:t>
                 </a:r>
+                <a:endParaRPr lang="zh-CN" sz="1800" dirty="0">
+                  <a:solidFill>
+                    <a:schemeClr val="dk2"/>
+                  </a:solidFill>
+                  <a:latin typeface="+mn-lt"/>
+                  <a:ea typeface="+mn-ea"/>
+                  <a:cs typeface="+mn-cs"/>
+                </a:endParaRPr>
               </a:p>
             </p:txBody>
           </p:sp>
@@ -20028,6 +18490,14 @@
                   </a:rPr>
                   <a:t>不拉伸图案</a:t>
                 </a:r>
+                <a:endParaRPr lang="zh-CN" sz="1800" b="1" dirty="0">
+                  <a:solidFill>
+                    <a:schemeClr val="dk1"/>
+                  </a:solidFill>
+                  <a:latin typeface="+mn-lt"/>
+                  <a:ea typeface="+mn-ea"/>
+                  <a:cs typeface="+mn-cs"/>
+                </a:endParaRPr>
               </a:p>
             </p:txBody>
           </p:sp>
@@ -20183,6 +18653,14 @@
                   </a:rPr>
                   <a:t>Filled</a:t>
                 </a:r>
+                <a:endParaRPr lang="en-US" sz="2700" b="1" dirty="0">
+                  <a:solidFill>
+                    <a:srgbClr val="D85C45"/>
+                  </a:solidFill>
+                  <a:latin typeface="+mn-lt"/>
+                  <a:ea typeface="+mn-ea"/>
+                  <a:cs typeface="+mn-cs"/>
+                </a:endParaRPr>
               </a:p>
             </p:txBody>
           </p:sp>
@@ -20223,6 +18701,14 @@
                   </a:rPr>
                   <a:t>按比例显示</a:t>
                 </a:r>
+                <a:endParaRPr lang="zh-CN" sz="1800" dirty="0">
+                  <a:solidFill>
+                    <a:schemeClr val="dk2"/>
+                  </a:solidFill>
+                  <a:latin typeface="+mn-lt"/>
+                  <a:ea typeface="+mn-ea"/>
+                  <a:cs typeface="+mn-cs"/>
+                </a:endParaRPr>
               </a:p>
             </p:txBody>
           </p:sp>
@@ -20263,6 +18749,14 @@
                   </a:rPr>
                   <a:t>血条与冷却</a:t>
                 </a:r>
+                <a:endParaRPr lang="zh-CN" sz="1800" dirty="0">
+                  <a:solidFill>
+                    <a:schemeClr val="dk2"/>
+                  </a:solidFill>
+                  <a:latin typeface="+mn-lt"/>
+                  <a:ea typeface="+mn-ea"/>
+                  <a:cs typeface="+mn-cs"/>
+                </a:endParaRPr>
               </a:p>
             </p:txBody>
           </p:sp>
@@ -20297,12 +18791,20 @@
                     <a:solidFill>
                       <a:schemeClr val="dk1"/>
                     </a:solidFill>
-                    <a:latin typeface="Consolas"/>
-                    <a:ea typeface="Consolas"/>
-                    <a:cs typeface="Consolas"/>
+                    <a:latin typeface="Consolas" panose="020B0609020204030204"/>
+                    <a:ea typeface="Consolas" panose="020B0609020204030204"/>
+                    <a:cs typeface="Consolas" panose="020B0609020204030204"/>
                   </a:rPr>
                   <a:t>fillAmount</a:t>
                 </a:r>
+                <a:endParaRPr lang="en-US" sz="1800" b="1" dirty="0">
+                  <a:solidFill>
+                    <a:schemeClr val="dk1"/>
+                  </a:solidFill>
+                  <a:latin typeface="Consolas" panose="020B0609020204030204"/>
+                  <a:ea typeface="Consolas" panose="020B0609020204030204"/>
+                  <a:cs typeface="Consolas" panose="020B0609020204030204"/>
+                </a:endParaRPr>
               </a:p>
             </p:txBody>
           </p:sp>
@@ -20369,6 +18871,14 @@
               </a:rPr>
               <a:t>纯装饰 Image 可关闭 Raycast Target，避免挡住后方按钮</a:t>
             </a:r>
+            <a:endParaRPr lang="zh-CN" sz="1800" b="1" dirty="0">
+              <a:solidFill>
+                <a:schemeClr val="accent1"/>
+              </a:solidFill>
+              <a:latin typeface="+mn-lt"/>
+              <a:ea typeface="+mn-ea"/>
+              <a:cs typeface="+mn-cs"/>
+            </a:endParaRPr>
           </a:p>
         </p:txBody>
       </p:sp>
@@ -20424,46 +18934,6 @@
         </p:sp>
         <p:sp>
           <p:nvSpPr>
-            <p:cNvPr id="49" name="TextBox 49"/>
-            <p:cNvSpPr txBox="1"/>
-            <p:nvPr/>
-          </p:nvSpPr>
-          <p:spPr>
-            <a:xfrm>
-              <a:off x="564642" y="6521768"/>
-              <a:ext cx="1824091" cy="264033"/>
-            </a:xfrm>
-            <a:prstGeom prst="rect">
-              <a:avLst/>
-            </a:prstGeom>
-            <a:noFill/>
-            <a:ln>
-              <a:noFill/>
-            </a:ln>
-          </p:spPr>
-          <p:txBody>
-            <a:bodyPr wrap="none" lIns="0" tIns="0" rIns="0" bIns="0" anchor="t" anchorCtr="0">
-              <a:spAutoFit/>
-            </a:bodyPr>
-            <a:lstStyle/>
-            <a:p>
-              <a:pPr algn="l"/>
-              <a:r>
-                <a:rPr lang="zh-CN" sz="1350" dirty="0">
-                  <a:solidFill>
-                    <a:schemeClr val="accent5"/>
-                  </a:solidFill>
-                  <a:latin typeface="+mn-lt"/>
-                  <a:ea typeface="+mn-ea"/>
-                  <a:cs typeface="+mn-cs"/>
-                </a:rPr>
-                <a:t>Image · 四种显示模式</a:t>
-              </a:r>
-            </a:p>
-          </p:txBody>
-        </p:sp>
-        <p:sp>
-          <p:nvSpPr>
             <p:cNvPr id="50" name="TextBox 50"/>
             <p:cNvSpPr txBox="1"/>
             <p:nvPr/>
@@ -20499,6 +18969,14 @@
                 </a:rPr>
                 <a:t>08</a:t>
               </a:r>
+              <a:endParaRPr lang="en-US" sz="1350" dirty="0">
+                <a:solidFill>
+                  <a:schemeClr val="accent5"/>
+                </a:solidFill>
+                <a:latin typeface="+mn-lt"/>
+                <a:ea typeface="+mn-ea"/>
+                <a:cs typeface="+mn-cs"/>
+              </a:endParaRPr>
             </a:p>
           </p:txBody>
         </p:sp>
@@ -20508,9 +18986,18 @@
   <p:clrMapOvr>
     <a:masterClrMapping/>
   </p:clrMapOvr>
-  <p:transition xmlns:p14="http://schemas.microsoft.com/office/powerpoint/2010/main" p14:dur="400">
-    <p:fade/>
-  </p:transition>
+  <mc:AlternateContent xmlns:mc="http://schemas.openxmlformats.org/markup-compatibility/2006">
+    <mc:Choice xmlns:p14="http://schemas.microsoft.com/office/powerpoint/2010/main" Requires="p14">
+      <p:transition p14:dur="400">
+        <p:fade/>
+      </p:transition>
+    </mc:Choice>
+    <mc:Fallback>
+      <p:transition>
+        <p:fade/>
+      </p:transition>
+    </mc:Fallback>
+  </mc:AlternateContent>
 </p:sld>
 </file>
 
@@ -20568,6 +19055,14 @@
               </a:rPr>
               <a:t>RawImage：直接显示 Texture，而不是 Sprite</a:t>
             </a:r>
+            <a:endParaRPr lang="zh-CN" sz="4200" b="1" dirty="0">
+              <a:solidFill>
+                <a:schemeClr val="dk1"/>
+              </a:solidFill>
+              <a:latin typeface="+mj-lt"/>
+              <a:ea typeface="+mj-ea"/>
+              <a:cs typeface="+mj-cs"/>
+            </a:endParaRPr>
           </a:p>
         </p:txBody>
       </p:sp>
@@ -20608,6 +19103,14 @@
               </a:rPr>
               <a:t>摄像机画面、视频与运行时纹理，走同一条管线</a:t>
             </a:r>
+            <a:endParaRPr lang="zh-CN" sz="1800" dirty="0">
+              <a:solidFill>
+                <a:schemeClr val="dk2"/>
+              </a:solidFill>
+              <a:latin typeface="+mn-lt"/>
+              <a:ea typeface="+mn-ea"/>
+              <a:cs typeface="+mn-cs"/>
+            </a:endParaRPr>
           </a:p>
         </p:txBody>
       </p:sp>
@@ -20861,6 +19364,14 @@
                   </a:rPr>
                   <a:t>Camera</a:t>
                 </a:r>
+                <a:endParaRPr lang="en-US" sz="2700" b="1" dirty="0">
+                  <a:solidFill>
+                    <a:schemeClr val="dk1"/>
+                  </a:solidFill>
+                  <a:latin typeface="+mn-lt"/>
+                  <a:ea typeface="+mn-ea"/>
+                  <a:cs typeface="+mn-cs"/>
+                </a:endParaRPr>
               </a:p>
             </p:txBody>
           </p:sp>
@@ -20901,6 +19412,14 @@
                   </a:rPr>
                   <a:t>Target Texture</a:t>
                 </a:r>
+                <a:endParaRPr lang="en-US" sz="1800" dirty="0">
+                  <a:solidFill>
+                    <a:schemeClr val="dk2"/>
+                  </a:solidFill>
+                  <a:latin typeface="+mn-lt"/>
+                  <a:ea typeface="+mn-ea"/>
+                  <a:cs typeface="+mn-cs"/>
+                </a:endParaRPr>
               </a:p>
             </p:txBody>
           </p:sp>
@@ -20941,6 +19460,14 @@
                   </a:rPr>
                   <a:t>指定输出纹理</a:t>
                 </a:r>
+                <a:endParaRPr lang="zh-CN" sz="1800" dirty="0">
+                  <a:solidFill>
+                    <a:schemeClr val="dk2"/>
+                  </a:solidFill>
+                  <a:latin typeface="+mn-lt"/>
+                  <a:ea typeface="+mn-ea"/>
+                  <a:cs typeface="+mn-cs"/>
+                </a:endParaRPr>
               </a:p>
             </p:txBody>
           </p:sp>
@@ -21189,6 +19716,14 @@
                   </a:rPr>
                   <a:t>RenderTexture</a:t>
                 </a:r>
+                <a:endParaRPr lang="en-US" sz="2700" b="1" dirty="0">
+                  <a:solidFill>
+                    <a:schemeClr val="dk1"/>
+                  </a:solidFill>
+                  <a:latin typeface="+mn-lt"/>
+                  <a:ea typeface="+mn-ea"/>
+                  <a:cs typeface="+mn-cs"/>
+                </a:endParaRPr>
               </a:p>
             </p:txBody>
           </p:sp>
@@ -21229,6 +19764,14 @@
                   </a:rPr>
                   <a:t>保存画面</a:t>
                 </a:r>
+                <a:endParaRPr lang="zh-CN" sz="1800" dirty="0">
+                  <a:solidFill>
+                    <a:schemeClr val="dk2"/>
+                  </a:solidFill>
+                  <a:latin typeface="+mn-lt"/>
+                  <a:ea typeface="+mn-ea"/>
+                  <a:cs typeface="+mn-cs"/>
+                </a:endParaRPr>
               </a:p>
             </p:txBody>
           </p:sp>
@@ -21269,6 +19812,14 @@
                   </a:rPr>
                   <a:t>注意分辨率与宽高比</a:t>
                 </a:r>
+                <a:endParaRPr lang="zh-CN" sz="1800" dirty="0">
+                  <a:solidFill>
+                    <a:schemeClr val="dk2"/>
+                  </a:solidFill>
+                  <a:latin typeface="+mn-lt"/>
+                  <a:ea typeface="+mn-ea"/>
+                  <a:cs typeface="+mn-cs"/>
+                </a:endParaRPr>
               </a:p>
             </p:txBody>
           </p:sp>
@@ -21673,6 +20224,14 @@
                   </a:rPr>
                   <a:t>RawImage</a:t>
                 </a:r>
+                <a:endParaRPr lang="en-US" sz="2700" b="1" dirty="0">
+                  <a:solidFill>
+                    <a:schemeClr val="dk1"/>
+                  </a:solidFill>
+                  <a:latin typeface="+mn-lt"/>
+                  <a:ea typeface="+mn-ea"/>
+                  <a:cs typeface="+mn-cs"/>
+                </a:endParaRPr>
               </a:p>
             </p:txBody>
           </p:sp>
@@ -21713,6 +20272,14 @@
                   </a:rPr>
                   <a:t>Texture 引用</a:t>
                 </a:r>
+                <a:endParaRPr lang="zh-CN" sz="1800" dirty="0">
+                  <a:solidFill>
+                    <a:schemeClr val="dk2"/>
+                  </a:solidFill>
+                  <a:latin typeface="+mn-lt"/>
+                  <a:ea typeface="+mn-ea"/>
+                  <a:cs typeface="+mn-cs"/>
+                </a:endParaRPr>
               </a:p>
             </p:txBody>
           </p:sp>
@@ -21753,6 +20320,14 @@
                   </a:rPr>
                   <a:t>Canvas 中显示</a:t>
                 </a:r>
+                <a:endParaRPr lang="zh-CN" sz="1800" dirty="0">
+                  <a:solidFill>
+                    <a:schemeClr val="dk2"/>
+                  </a:solidFill>
+                  <a:latin typeface="+mn-lt"/>
+                  <a:ea typeface="+mn-ea"/>
+                  <a:cs typeface="+mn-cs"/>
+                </a:endParaRPr>
               </a:p>
             </p:txBody>
           </p:sp>
@@ -21833,6 +20408,14 @@
                 </a:rPr>
                 <a:t>Image：Sprite · 九宫格 · Filled</a:t>
               </a:r>
+              <a:endParaRPr lang="zh-CN" sz="2400" b="1" dirty="0">
+                <a:solidFill>
+                  <a:srgbClr val="FFFFFF"/>
+                </a:solidFill>
+                <a:latin typeface="+mn-lt"/>
+                <a:ea typeface="+mn-ea"/>
+                <a:cs typeface="+mn-cs"/>
+              </a:endParaRPr>
             </a:p>
           </p:txBody>
         </p:sp>
@@ -21897,6 +20480,14 @@
                 </a:rPr>
                 <a:t>RawImage：Texture · UV Rect</a:t>
               </a:r>
+              <a:endParaRPr lang="zh-CN" sz="2400" b="1" dirty="0">
+                <a:solidFill>
+                  <a:srgbClr val="FFFFFF"/>
+                </a:solidFill>
+                <a:latin typeface="+mn-lt"/>
+                <a:ea typeface="+mn-ea"/>
+                <a:cs typeface="+mn-cs"/>
+              </a:endParaRPr>
             </a:p>
           </p:txBody>
         </p:sp>
@@ -21953,46 +20544,6 @@
         </p:sp>
         <p:sp>
           <p:nvSpPr>
-            <p:cNvPr id="39" name="TextBox 39"/>
-            <p:cNvSpPr txBox="1"/>
-            <p:nvPr/>
-          </p:nvSpPr>
-          <p:spPr>
-            <a:xfrm>
-              <a:off x="564642" y="6521768"/>
-              <a:ext cx="2559268" cy="264033"/>
-            </a:xfrm>
-            <a:prstGeom prst="rect">
-              <a:avLst/>
-            </a:prstGeom>
-            <a:noFill/>
-            <a:ln>
-              <a:noFill/>
-            </a:ln>
-          </p:spPr>
-          <p:txBody>
-            <a:bodyPr wrap="none" lIns="0" tIns="0" rIns="0" bIns="0" anchor="t" anchorCtr="0">
-              <a:spAutoFit/>
-            </a:bodyPr>
-            <a:lstStyle/>
-            <a:p>
-              <a:pPr algn="l"/>
-              <a:r>
-                <a:rPr lang="zh-CN" sz="1350" dirty="0">
-                  <a:solidFill>
-                    <a:schemeClr val="accent5"/>
-                  </a:solidFill>
-                  <a:latin typeface="+mn-lt"/>
-                  <a:ea typeface="+mn-ea"/>
-                  <a:cs typeface="+mn-cs"/>
-                </a:rPr>
-                <a:t>RawImage · Texture 输出管线</a:t>
-              </a:r>
-            </a:p>
-          </p:txBody>
-        </p:sp>
-        <p:sp>
-          <p:nvSpPr>
             <p:cNvPr id="40" name="TextBox 40"/>
             <p:cNvSpPr txBox="1"/>
             <p:nvPr/>
@@ -22028,6 +20579,14 @@
                 </a:rPr>
                 <a:t>09</a:t>
               </a:r>
+              <a:endParaRPr lang="en-US" sz="1350" dirty="0">
+                <a:solidFill>
+                  <a:schemeClr val="accent5"/>
+                </a:solidFill>
+                <a:latin typeface="+mn-lt"/>
+                <a:ea typeface="+mn-ea"/>
+                <a:cs typeface="+mn-cs"/>
+              </a:endParaRPr>
             </a:p>
           </p:txBody>
         </p:sp>
@@ -22037,9 +20596,18 @@
   <p:clrMapOvr>
     <a:masterClrMapping/>
   </p:clrMapOvr>
-  <p:transition xmlns:p14="http://schemas.microsoft.com/office/powerpoint/2010/main" p14:dur="400">
-    <p:fade/>
-  </p:transition>
+  <mc:AlternateContent xmlns:mc="http://schemas.openxmlformats.org/markup-compatibility/2006">
+    <mc:Choice xmlns:p14="http://schemas.microsoft.com/office/powerpoint/2010/main" Requires="p14">
+      <p:transition p14:dur="400">
+        <p:fade/>
+      </p:transition>
+    </mc:Choice>
+    <mc:Fallback>
+      <p:transition>
+        <p:fade/>
+      </p:transition>
+    </mc:Fallback>
+  </mc:AlternateContent>
 </p:sld>
 </file>
 
@@ -22359,7 +20927,11 @@
       </a:style>
     </a:lnDef>
   </a:objectDefaults>
-  <a:extraClrSchemeLst/>
+  <a:extLst>
+    <a:ext uri="{05A4C25C-085E-4340-85A3-A5531E510DB2}">
+      <thm15:themeFamily xmlns:thm15="http://schemas.microsoft.com/office/thememl/2012/main" name="Office Theme" id="{62F939B6-93AF-4DB8-9C6B-D6C7DFDC589F}" vid="{4A3C46E8-61CC-4603-A589-7422A47A8E4A}"/>
+    </a:ext>
+  </a:extLst>
 </a:theme>
 </file>
 
@@ -22679,6 +21251,10 @@
       </a:style>
     </a:lnDef>
   </a:objectDefaults>
-  <a:extraClrSchemeLst/>
+  <a:extLst>
+    <a:ext uri="{05A4C25C-085E-4340-85A3-A5531E510DB2}">
+      <thm15:themeFamily xmlns:thm15="http://schemas.microsoft.com/office/thememl/2012/main" name="Office Theme" id="{62F939B6-93AF-4DB8-9C6B-D6C7DFDC589F}" vid="{4A3C46E8-61CC-4603-A589-7422A47A8E4A}"/>
+    </a:ext>
+  </a:extLst>
 </a:theme>
 </file>